--- a/Parcours_de_professionnalisation_E5_diapo.pptx
+++ b/Parcours_de_professionnalisation_E5_diapo.pptx
@@ -18,7 +18,7 @@
     <p:sldId id="267" r:id="rId12"/>
     <p:sldId id="268" r:id="rId13"/>
     <p:sldId id="269" r:id="rId14"/>
-    <p:sldId id="277" r:id="rId15"/>
+    <p:sldId id="275" r:id="rId15"/>
     <p:sldId id="270" r:id="rId16"/>
     <p:sldId id="271" r:id="rId17"/>
     <p:sldId id="272" r:id="rId18"/>
@@ -27,16 +27,23 @@
   <p:notesSz cx="6858000" cy="9144000"/>
   <p:embeddedFontLst>
     <p:embeddedFont>
-      <p:font typeface="Poppins" panose="00000500000000000000" pitchFamily="2" charset="0"/>
+      <p:font typeface="Calibri" panose="020F0502020204030204" pitchFamily="34" charset="0"/>
       <p:regular r:id="rId19"/>
       <p:bold r:id="rId20"/>
       <p:italic r:id="rId21"/>
       <p:boldItalic r:id="rId22"/>
     </p:embeddedFont>
     <p:embeddedFont>
-      <p:font typeface="Poppins ExtraBold" panose="00000900000000000000" pitchFamily="2" charset="0"/>
-      <p:bold r:id="rId23"/>
-      <p:boldItalic r:id="rId24"/>
+      <p:font typeface="Poppins" panose="020B0604020202020204" charset="0"/>
+      <p:regular r:id="rId23"/>
+      <p:bold r:id="rId24"/>
+      <p:italic r:id="rId25"/>
+      <p:boldItalic r:id="rId26"/>
+    </p:embeddedFont>
+    <p:embeddedFont>
+      <p:font typeface="Poppins ExtraBold" panose="020B0604020202020204" charset="0"/>
+      <p:bold r:id="rId27"/>
+      <p:boldItalic r:id="rId28"/>
     </p:embeddedFont>
   </p:embeddedFontLst>
   <p:defaultTextStyle>
@@ -151,7 +158,7 @@
             <p14:sldId id="267"/>
             <p14:sldId id="268"/>
             <p14:sldId id="269"/>
-            <p14:sldId id="277"/>
+            <p14:sldId id="275"/>
             <p14:sldId id="270"/>
             <p14:sldId id="271"/>
             <p14:sldId id="272"/>
@@ -365,7 +372,7 @@
             <a:fld id="{1D8BD707-D9CF-40AE-B4C6-C98DA3205C09}" type="datetimeFigureOut">
               <a:rPr lang="en-US" smtClean="0"/>
               <a:pPr/>
-              <a:t>4/16/2026</a:t>
+              <a:t>5/20/2026</a:t>
             </a:fld>
             <a:endParaRPr lang="en-US"/>
           </a:p>
@@ -408,7 +415,7 @@
             <a:fld id="{B6F15528-21DE-4FAA-801E-634DDDAF4B2B}" type="slidenum">
               <a:rPr lang="en-US" smtClean="0"/>
               <a:pPr/>
-              <a:t>‹#›</a:t>
+              <a:t>‹N°›</a:t>
             </a:fld>
             <a:endParaRPr lang="en-US"/>
           </a:p>
@@ -530,7 +537,7 @@
             <a:fld id="{1D8BD707-D9CF-40AE-B4C6-C98DA3205C09}" type="datetimeFigureOut">
               <a:rPr lang="en-US" smtClean="0"/>
               <a:pPr/>
-              <a:t>4/16/2026</a:t>
+              <a:t>5/20/2026</a:t>
             </a:fld>
             <a:endParaRPr lang="en-US"/>
           </a:p>
@@ -573,7 +580,7 @@
             <a:fld id="{B6F15528-21DE-4FAA-801E-634DDDAF4B2B}" type="slidenum">
               <a:rPr lang="en-US" smtClean="0"/>
               <a:pPr/>
-              <a:t>‹#›</a:t>
+              <a:t>‹N°›</a:t>
             </a:fld>
             <a:endParaRPr lang="en-US"/>
           </a:p>
@@ -705,7 +712,7 @@
             <a:fld id="{1D8BD707-D9CF-40AE-B4C6-C98DA3205C09}" type="datetimeFigureOut">
               <a:rPr lang="en-US" smtClean="0"/>
               <a:pPr/>
-              <a:t>4/16/2026</a:t>
+              <a:t>5/20/2026</a:t>
             </a:fld>
             <a:endParaRPr lang="en-US"/>
           </a:p>
@@ -748,7 +755,7 @@
             <a:fld id="{B6F15528-21DE-4FAA-801E-634DDDAF4B2B}" type="slidenum">
               <a:rPr lang="en-US" smtClean="0"/>
               <a:pPr/>
-              <a:t>‹#›</a:t>
+              <a:t>‹N°›</a:t>
             </a:fld>
             <a:endParaRPr lang="en-US"/>
           </a:p>
@@ -797,7 +804,7 @@
             <a:fld id="{1D8BD707-D9CF-40AE-B4C6-C98DA3205C09}" type="datetimeFigureOut">
               <a:rPr lang="en-US" smtClean="0"/>
               <a:pPr/>
-              <a:t>4/16/2026</a:t>
+              <a:t>5/20/2026</a:t>
             </a:fld>
             <a:endParaRPr lang="en-US"/>
           </a:p>
@@ -840,7 +847,7 @@
             <a:fld id="{B6F15528-21DE-4FAA-801E-634DDDAF4B2B}" type="slidenum">
               <a:rPr lang="en-US" smtClean="0"/>
               <a:pPr/>
-              <a:t>‹#›</a:t>
+              <a:t>‹N°›</a:t>
             </a:fld>
             <a:endParaRPr lang="en-US"/>
           </a:p>
@@ -962,7 +969,7 @@
             <a:fld id="{1D8BD707-D9CF-40AE-B4C6-C98DA3205C09}" type="datetimeFigureOut">
               <a:rPr lang="en-US" smtClean="0"/>
               <a:pPr/>
-              <a:t>4/16/2026</a:t>
+              <a:t>5/20/2026</a:t>
             </a:fld>
             <a:endParaRPr lang="en-US"/>
           </a:p>
@@ -1005,7 +1012,7 @@
             <a:fld id="{B6F15528-21DE-4FAA-801E-634DDDAF4B2B}" type="slidenum">
               <a:rPr lang="en-US" smtClean="0"/>
               <a:pPr/>
-              <a:t>‹#›</a:t>
+              <a:t>‹N°›</a:t>
             </a:fld>
             <a:endParaRPr lang="en-US"/>
           </a:p>
@@ -1204,7 +1211,7 @@
             <a:fld id="{1D8BD707-D9CF-40AE-B4C6-C98DA3205C09}" type="datetimeFigureOut">
               <a:rPr lang="en-US" smtClean="0"/>
               <a:pPr/>
-              <a:t>4/16/2026</a:t>
+              <a:t>5/20/2026</a:t>
             </a:fld>
             <a:endParaRPr lang="en-US"/>
           </a:p>
@@ -1247,7 +1254,7 @@
             <a:fld id="{B6F15528-21DE-4FAA-801E-634DDDAF4B2B}" type="slidenum">
               <a:rPr lang="en-US" smtClean="0"/>
               <a:pPr/>
-              <a:t>‹#›</a:t>
+              <a:t>‹N°›</a:t>
             </a:fld>
             <a:endParaRPr lang="en-US"/>
           </a:p>
@@ -1486,7 +1493,7 @@
             <a:fld id="{1D8BD707-D9CF-40AE-B4C6-C98DA3205C09}" type="datetimeFigureOut">
               <a:rPr lang="en-US" smtClean="0"/>
               <a:pPr/>
-              <a:t>4/16/2026</a:t>
+              <a:t>5/20/2026</a:t>
             </a:fld>
             <a:endParaRPr lang="en-US"/>
           </a:p>
@@ -1529,7 +1536,7 @@
             <a:fld id="{B6F15528-21DE-4FAA-801E-634DDDAF4B2B}" type="slidenum">
               <a:rPr lang="en-US" smtClean="0"/>
               <a:pPr/>
-              <a:t>‹#›</a:t>
+              <a:t>‹N°›</a:t>
             </a:fld>
             <a:endParaRPr lang="en-US"/>
           </a:p>
@@ -1902,7 +1909,7 @@
             <a:fld id="{1D8BD707-D9CF-40AE-B4C6-C98DA3205C09}" type="datetimeFigureOut">
               <a:rPr lang="en-US" smtClean="0"/>
               <a:pPr/>
-              <a:t>4/16/2026</a:t>
+              <a:t>5/20/2026</a:t>
             </a:fld>
             <a:endParaRPr lang="en-US"/>
           </a:p>
@@ -1945,7 +1952,7 @@
             <a:fld id="{B6F15528-21DE-4FAA-801E-634DDDAF4B2B}" type="slidenum">
               <a:rPr lang="en-US" smtClean="0"/>
               <a:pPr/>
-              <a:t>‹#›</a:t>
+              <a:t>‹N°›</a:t>
             </a:fld>
             <a:endParaRPr lang="en-US"/>
           </a:p>
@@ -2016,7 +2023,7 @@
             <a:fld id="{1D8BD707-D9CF-40AE-B4C6-C98DA3205C09}" type="datetimeFigureOut">
               <a:rPr lang="en-US" smtClean="0"/>
               <a:pPr/>
-              <a:t>4/16/2026</a:t>
+              <a:t>5/20/2026</a:t>
             </a:fld>
             <a:endParaRPr lang="en-US"/>
           </a:p>
@@ -2059,7 +2066,7 @@
             <a:fld id="{B6F15528-21DE-4FAA-801E-634DDDAF4B2B}" type="slidenum">
               <a:rPr lang="en-US" smtClean="0"/>
               <a:pPr/>
-              <a:t>‹#›</a:t>
+              <a:t>‹N°›</a:t>
             </a:fld>
             <a:endParaRPr lang="en-US"/>
           </a:p>
@@ -2108,7 +2115,7 @@
             <a:fld id="{1D8BD707-D9CF-40AE-B4C6-C98DA3205C09}" type="datetimeFigureOut">
               <a:rPr lang="en-US" smtClean="0"/>
               <a:pPr/>
-              <a:t>4/16/2026</a:t>
+              <a:t>5/20/2026</a:t>
             </a:fld>
             <a:endParaRPr lang="en-US"/>
           </a:p>
@@ -2151,7 +2158,7 @@
             <a:fld id="{B6F15528-21DE-4FAA-801E-634DDDAF4B2B}" type="slidenum">
               <a:rPr lang="en-US" smtClean="0"/>
               <a:pPr/>
-              <a:t>‹#›</a:t>
+              <a:t>‹N°›</a:t>
             </a:fld>
             <a:endParaRPr lang="en-US"/>
           </a:p>
@@ -2380,7 +2387,7 @@
             <a:fld id="{1D8BD707-D9CF-40AE-B4C6-C98DA3205C09}" type="datetimeFigureOut">
               <a:rPr lang="en-US" smtClean="0"/>
               <a:pPr/>
-              <a:t>4/16/2026</a:t>
+              <a:t>5/20/2026</a:t>
             </a:fld>
             <a:endParaRPr lang="en-US"/>
           </a:p>
@@ -2423,7 +2430,7 @@
             <a:fld id="{B6F15528-21DE-4FAA-801E-634DDDAF4B2B}" type="slidenum">
               <a:rPr lang="en-US" smtClean="0"/>
               <a:pPr/>
-              <a:t>‹#›</a:t>
+              <a:t>‹N°›</a:t>
             </a:fld>
             <a:endParaRPr lang="en-US"/>
           </a:p>
@@ -2629,7 +2636,7 @@
             <a:fld id="{1D8BD707-D9CF-40AE-B4C6-C98DA3205C09}" type="datetimeFigureOut">
               <a:rPr lang="en-US" smtClean="0"/>
               <a:pPr/>
-              <a:t>4/16/2026</a:t>
+              <a:t>5/20/2026</a:t>
             </a:fld>
             <a:endParaRPr lang="en-US"/>
           </a:p>
@@ -2672,7 +2679,7 @@
             <a:fld id="{B6F15528-21DE-4FAA-801E-634DDDAF4B2B}" type="slidenum">
               <a:rPr lang="en-US" smtClean="0"/>
               <a:pPr/>
-              <a:t>‹#›</a:t>
+              <a:t>‹N°›</a:t>
             </a:fld>
             <a:endParaRPr lang="en-US"/>
           </a:p>
@@ -2837,7 +2844,7 @@
             <a:fld id="{1D8BD707-D9CF-40AE-B4C6-C98DA3205C09}" type="datetimeFigureOut">
               <a:rPr lang="en-US" smtClean="0"/>
               <a:pPr/>
-              <a:t>4/16/2026</a:t>
+              <a:t>5/20/2026</a:t>
             </a:fld>
             <a:endParaRPr lang="en-US"/>
           </a:p>
@@ -2916,7 +2923,7 @@
             <a:fld id="{B6F15528-21DE-4FAA-801E-634DDDAF4B2B}" type="slidenum">
               <a:rPr lang="en-US" smtClean="0"/>
               <a:pPr/>
-              <a:t>‹#›</a:t>
+              <a:t>‹N°›</a:t>
             </a:fld>
             <a:endParaRPr lang="en-US"/>
           </a:p>
@@ -3342,7 +3349,7 @@
             <a:fld id="{1D8BD707-D9CF-40AE-B4C6-C98DA3205C09}" type="datetimeFigureOut">
               <a:rPr lang="en-US" smtClean="0"/>
               <a:pPr/>
-              <a:t>4/16/2026</a:t>
+              <a:t>5/20/2026</a:t>
             </a:fld>
             <a:endParaRPr lang="en-US"/>
           </a:p>
@@ -3421,7 +3428,7 @@
             <a:fld id="{B6F15528-21DE-4FAA-801E-634DDDAF4B2B}" type="slidenum">
               <a:rPr lang="en-US" smtClean="0"/>
               <a:pPr/>
-              <a:t>‹#›</a:t>
+              <a:t>‹N°›</a:t>
             </a:fld>
             <a:endParaRPr lang="en-US"/>
           </a:p>
@@ -8759,31 +8766,6 @@
           <a:chExt cx="0" cy="0"/>
         </a:xfrm>
       </p:grpSpPr>
-      <p:pic>
-        <p:nvPicPr>
-          <p:cNvPr id="5" name="Picture 5"/>
-          <p:cNvPicPr>
-            <a:picLocks noChangeAspect="1"/>
-          </p:cNvPicPr>
-          <p:nvPr/>
-        </p:nvPicPr>
-        <p:blipFill>
-          <a:blip r:embed="rId2"/>
-          <a:srcRect/>
-          <a:stretch>
-            <a:fillRect/>
-          </a:stretch>
-        </p:blipFill>
-        <p:spPr>
-          <a:xfrm>
-            <a:off x="12245101" y="6109319"/>
-            <a:ext cx="5245361" cy="5245361"/>
-          </a:xfrm>
-          <a:prstGeom prst="rect">
-            <a:avLst/>
-          </a:prstGeom>
-        </p:spPr>
-      </p:pic>
       <p:sp>
         <p:nvSpPr>
           <p:cNvPr id="6" name="TextBox 6"/>
@@ -8792,7 +8774,7 @@
         </p:nvSpPr>
         <p:spPr>
           <a:xfrm>
-            <a:off x="2831475" y="389628"/>
+            <a:off x="2831473" y="31474"/>
             <a:ext cx="12625043" cy="1285875"/>
           </a:xfrm>
           <a:prstGeom prst="rect">
@@ -8811,50 +8793,13 @@
               </a:lnSpc>
             </a:pPr>
             <a:r>
-              <a:rPr lang="en-US" sz="9000">
+              <a:rPr lang="en-US" sz="9000" dirty="0">
                 <a:solidFill>
                   <a:srgbClr val="3D05AD"/>
                 </a:solidFill>
                 <a:latin typeface="+mj-lt"/>
               </a:rPr>
-              <a:t>06. VEILLE </a:t>
-            </a:r>
-          </a:p>
-        </p:txBody>
-      </p:sp>
-      <p:sp>
-        <p:nvSpPr>
-          <p:cNvPr id="7" name="TextBox 7"/>
-          <p:cNvSpPr txBox="1"/>
-          <p:nvPr/>
-        </p:nvSpPr>
-        <p:spPr>
-          <a:xfrm>
-            <a:off x="0" y="3208435"/>
-            <a:ext cx="7421391" cy="654025"/>
-          </a:xfrm>
-          <a:prstGeom prst="rect">
-            <a:avLst/>
-          </a:prstGeom>
-        </p:spPr>
-        <p:txBody>
-          <a:bodyPr wrap="square" lIns="0" tIns="0" rIns="0" bIns="0" rtlCol="0" anchor="t">
-            <a:spAutoFit/>
-          </a:bodyPr>
-          <a:lstStyle/>
-          <a:p>
-            <a:pPr algn="ctr">
-              <a:lnSpc>
-                <a:spcPts val="5117"/>
-              </a:lnSpc>
-            </a:pPr>
-            <a:r>
-              <a:rPr lang="fr-FR" sz="4264" dirty="0">
-                <a:solidFill>
-                  <a:srgbClr val="3D05AD"/>
-                </a:solidFill>
-              </a:rPr>
-              <a:t>Montres connectées</a:t>
+              <a:t>06. VEILLE SUR RGPD </a:t>
             </a:r>
           </a:p>
         </p:txBody>
@@ -8867,7 +8812,7 @@
         </p:nvSpPr>
         <p:spPr>
           <a:xfrm>
-            <a:off x="1590132" y="1783570"/>
+            <a:off x="1590130" y="1439990"/>
             <a:ext cx="15107727" cy="1024127"/>
           </a:xfrm>
           <a:prstGeom prst="rect">
@@ -8894,127 +8839,17 @@
                   <a:srgbClr val="3D05AD"/>
                 </a:solidFill>
               </a:rPr>
-              <a:t>La veille technologique consiste à s'informer de façon systématique sur les techniques les plus récentes et surtout sur leur mise à disposition commerciale</a:t>
+              <a:t>La veille technologique consiste à s'informer de façon systématique sur les techniques et informations les plus récentes concernant un domaine</a:t>
             </a:r>
           </a:p>
         </p:txBody>
       </p:sp>
       <p:sp>
         <p:nvSpPr>
-          <p:cNvPr id="9" name="TextBox 9"/>
-          <p:cNvSpPr txBox="1"/>
-          <p:nvPr/>
-        </p:nvSpPr>
-        <p:spPr>
-          <a:xfrm>
-            <a:off x="7239000" y="5497985"/>
-            <a:ext cx="6501372" cy="782265"/>
-          </a:xfrm>
-          <a:prstGeom prst="rect">
-            <a:avLst/>
-          </a:prstGeom>
-        </p:spPr>
-        <p:txBody>
-          <a:bodyPr lIns="0" tIns="0" rIns="0" bIns="0" rtlCol="0" anchor="t">
-            <a:spAutoFit/>
-          </a:bodyPr>
-          <a:lstStyle/>
-          <a:p>
-            <a:pPr algn="ctr">
-              <a:lnSpc>
-                <a:spcPts val="6123"/>
-              </a:lnSpc>
-            </a:pPr>
-            <a:r>
-              <a:rPr lang="en-US" sz="5102" dirty="0">
-                <a:solidFill>
-                  <a:srgbClr val="3D05AD"/>
-                </a:solidFill>
-                <a:latin typeface="+mj-lt"/>
-              </a:rPr>
-              <a:t>Flux RRS</a:t>
-            </a:r>
-          </a:p>
-        </p:txBody>
-      </p:sp>
-      <p:pic>
-        <p:nvPicPr>
-          <p:cNvPr id="14" name="Image 13">
+          <p:cNvPr id="13" name="TextBox 8">
             <a:extLst>
               <a:ext uri="{FF2B5EF4-FFF2-40B4-BE49-F238E27FC236}">
-                <a16:creationId xmlns:a16="http://schemas.microsoft.com/office/drawing/2014/main" id="{8464F549-27DF-4DF9-BE51-5974D29AA5CA}"/>
-              </a:ext>
-            </a:extLst>
-          </p:cNvPr>
-          <p:cNvPicPr>
-            <a:picLocks noChangeAspect="1"/>
-          </p:cNvPicPr>
-          <p:nvPr/>
-        </p:nvPicPr>
-        <p:blipFill>
-          <a:blip r:embed="rId3" cstate="print">
-            <a:extLst>
-              <a:ext uri="{28A0092B-C50C-407E-A947-70E740481C1C}">
-                <a14:useLocalDpi xmlns:a14="http://schemas.microsoft.com/office/drawing/2010/main" val="0"/>
-              </a:ext>
-            </a:extLst>
-          </a:blip>
-          <a:stretch>
-            <a:fillRect/>
-          </a:stretch>
-        </p:blipFill>
-        <p:spPr>
-          <a:xfrm>
-            <a:off x="12189262" y="3305278"/>
-            <a:ext cx="1814879" cy="1814879"/>
-          </a:xfrm>
-          <a:prstGeom prst="rect">
-            <a:avLst/>
-          </a:prstGeom>
-        </p:spPr>
-      </p:pic>
-      <p:pic>
-        <p:nvPicPr>
-          <p:cNvPr id="16" name="Image 15">
-            <a:extLst>
-              <a:ext uri="{FF2B5EF4-FFF2-40B4-BE49-F238E27FC236}">
-                <a16:creationId xmlns:a16="http://schemas.microsoft.com/office/drawing/2014/main" id="{C13E0066-0D53-4EF6-A367-0435813E893E}"/>
-              </a:ext>
-            </a:extLst>
-          </p:cNvPr>
-          <p:cNvPicPr>
-            <a:picLocks noChangeAspect="1"/>
-          </p:cNvPicPr>
-          <p:nvPr/>
-        </p:nvPicPr>
-        <p:blipFill>
-          <a:blip r:embed="rId4" cstate="print">
-            <a:extLst>
-              <a:ext uri="{28A0092B-C50C-407E-A947-70E740481C1C}">
-                <a14:useLocalDpi xmlns:a14="http://schemas.microsoft.com/office/drawing/2010/main" val="0"/>
-              </a:ext>
-            </a:extLst>
-          </a:blip>
-          <a:stretch>
-            <a:fillRect/>
-          </a:stretch>
-        </p:blipFill>
-        <p:spPr>
-          <a:xfrm>
-            <a:off x="12418217" y="5857980"/>
-            <a:ext cx="1519731" cy="1519731"/>
-          </a:xfrm>
-          <a:prstGeom prst="rect">
-            <a:avLst/>
-          </a:prstGeom>
-        </p:spPr>
-      </p:pic>
-      <p:sp>
-        <p:nvSpPr>
-          <p:cNvPr id="17" name="TextBox 13">
-            <a:extLst>
-              <a:ext uri="{FF2B5EF4-FFF2-40B4-BE49-F238E27FC236}">
-                <a16:creationId xmlns:a16="http://schemas.microsoft.com/office/drawing/2014/main" id="{DE1F7A2A-C40F-49FB-8E89-2FE1B6DE10BA}"/>
+                <a16:creationId xmlns:a16="http://schemas.microsoft.com/office/drawing/2014/main" id="{5076A4CD-2D20-4105-803D-6CA53A8BAF8C}"/>
               </a:ext>
             </a:extLst>
           </p:cNvPr>
@@ -9023,8 +8858,8 @@
         </p:nvSpPr>
         <p:spPr>
           <a:xfrm>
-            <a:off x="12751418" y="3949731"/>
-            <a:ext cx="5410200" cy="694036"/>
+            <a:off x="1795787" y="2781300"/>
+            <a:ext cx="14935200" cy="2723823"/>
           </a:xfrm>
           <a:prstGeom prst="rect">
             <a:avLst/>
@@ -9036,106 +8871,175 @@
           </a:bodyPr>
           <a:lstStyle/>
           <a:p>
-            <a:pPr algn="ctr">
-              <a:lnSpc>
-                <a:spcPts val="5199"/>
-              </a:lnSpc>
-            </a:pPr>
-            <a:r>
-              <a:rPr lang="en-US" sz="5400" b="1" dirty="0" err="1"/>
-              <a:t>Feedly</a:t>
-            </a:r>
-            <a:endParaRPr lang="en-US" sz="5400" b="1" dirty="0"/>
+            <a:r>
+              <a:rPr lang="fr-FR" sz="2900" dirty="0"/>
+              <a:t>Le </a:t>
+            </a:r>
+            <a:r>
+              <a:rPr lang="fr-FR" sz="2900" b="1" dirty="0"/>
+              <a:t>RGPD (Règlement Général sur la Protection des Données)</a:t>
+            </a:r>
+            <a:r>
+              <a:rPr lang="fr-FR" sz="2900" dirty="0"/>
+              <a:t> est un règlement européen entré en vigueur le </a:t>
+            </a:r>
+            <a:r>
+              <a:rPr lang="fr-FR" sz="2900" b="1" dirty="0"/>
+              <a:t>25 mai 2018</a:t>
+            </a:r>
+            <a:r>
+              <a:rPr lang="fr-FR" sz="2900" dirty="0"/>
+              <a:t>.</a:t>
+            </a:r>
+            <a:br>
+              <a:rPr lang="fr-FR" sz="2900" dirty="0"/>
+            </a:br>
+            <a:r>
+              <a:rPr lang="fr-FR" sz="2900" dirty="0"/>
+              <a:t>Son objectif est de </a:t>
+            </a:r>
+            <a:r>
+              <a:rPr lang="fr-FR" sz="2900" b="1" dirty="0"/>
+              <a:t>protéger les données personnelles des citoyens</a:t>
+            </a:r>
+            <a:r>
+              <a:rPr lang="fr-FR" sz="2900" dirty="0"/>
+              <a:t> et d’</a:t>
+            </a:r>
+            <a:r>
+              <a:rPr lang="fr-FR" sz="2900" b="1" dirty="0"/>
+              <a:t>harmoniser les règles</a:t>
+            </a:r>
+            <a:r>
+              <a:rPr lang="fr-FR" sz="2900" dirty="0"/>
+              <a:t> dans toute l’Union européenne.</a:t>
+            </a:r>
+          </a:p>
+          <a:p>
+            <a:r>
+              <a:rPr lang="fr-FR" sz="2900" dirty="0"/>
+              <a:t>Il s’applique et est imposé à </a:t>
+            </a:r>
+            <a:r>
+              <a:rPr lang="fr-FR" sz="2900" b="1" dirty="0"/>
+              <a:t>toute organisation</a:t>
+            </a:r>
+            <a:r>
+              <a:rPr lang="fr-FR" sz="2900" dirty="0"/>
+              <a:t> (entreprise, administration, association) qui traite des </a:t>
+            </a:r>
+            <a:r>
+              <a:rPr lang="fr-FR" sz="2900" b="1" dirty="0"/>
+              <a:t>données personnelles</a:t>
+            </a:r>
+            <a:r>
+              <a:rPr lang="fr-FR" sz="2900" dirty="0"/>
+              <a:t> de résidents européens</a:t>
+            </a:r>
+            <a:r>
+              <a:rPr lang="fr-FR" sz="3200" dirty="0"/>
+              <a:t>.</a:t>
+            </a:r>
           </a:p>
         </p:txBody>
       </p:sp>
       <p:sp>
         <p:nvSpPr>
-          <p:cNvPr id="18" name="TextBox 13">
+          <p:cNvPr id="2" name="Rectangle 1">
             <a:extLst>
               <a:ext uri="{FF2B5EF4-FFF2-40B4-BE49-F238E27FC236}">
-                <a16:creationId xmlns:a16="http://schemas.microsoft.com/office/drawing/2014/main" id="{000508D9-88D4-48A3-AEDD-703DB8ABC733}"/>
+                <a16:creationId xmlns:a16="http://schemas.microsoft.com/office/drawing/2014/main" id="{7060035D-81E0-4878-A983-76A545D5C757}"/>
               </a:ext>
             </a:extLst>
           </p:cNvPr>
-          <p:cNvSpPr txBox="1"/>
+          <p:cNvSpPr/>
           <p:nvPr/>
         </p:nvSpPr>
         <p:spPr>
           <a:xfrm>
-            <a:off x="12820712" y="6202834"/>
-            <a:ext cx="5410200" cy="694036"/>
+            <a:off x="1785848" y="5822306"/>
+            <a:ext cx="15511552" cy="3662541"/>
           </a:xfrm>
           <a:prstGeom prst="rect">
             <a:avLst/>
           </a:prstGeom>
         </p:spPr>
         <p:txBody>
-          <a:bodyPr wrap="square" lIns="0" tIns="0" rIns="0" bIns="0" rtlCol="0" anchor="t">
+          <a:bodyPr wrap="square">
             <a:spAutoFit/>
           </a:bodyPr>
           <a:lstStyle/>
           <a:p>
-            <a:pPr algn="ctr">
-              <a:lnSpc>
-                <a:spcPts val="5199"/>
-              </a:lnSpc>
+            <a:r>
+              <a:rPr lang="fr-FR" sz="2900" dirty="0"/>
+              <a:t>Le RGPD est crucial car si une entreprise stocke les données de ses employés.</a:t>
+            </a:r>
+            <a:br>
+              <a:rPr lang="fr-FR" sz="2900" dirty="0"/>
+            </a:br>
+            <a:r>
+              <a:rPr lang="fr-FR" sz="2900" dirty="0"/>
+              <a:t>L’administrateur réseau doit :</a:t>
+            </a:r>
+          </a:p>
+          <a:p>
+            <a:pPr>
+              <a:buFont typeface="Arial" panose="020B0604020202020204" pitchFamily="34" charset="0"/>
+              <a:buChar char="•"/>
             </a:pPr>
             <a:r>
-              <a:rPr lang="en-US" sz="5400" dirty="0">
-                <a:solidFill>
-                  <a:schemeClr val="tx2">
-                    <a:lumMod val="75000"/>
-                  </a:schemeClr>
-                </a:solidFill>
-              </a:rPr>
-              <a:t>Alerts</a:t>
-            </a:r>
-          </a:p>
-        </p:txBody>
-      </p:sp>
-      <p:sp>
-        <p:nvSpPr>
-          <p:cNvPr id="12" name="TextBox 8">
-            <a:extLst>
-              <a:ext uri="{FF2B5EF4-FFF2-40B4-BE49-F238E27FC236}">
-                <a16:creationId xmlns:a16="http://schemas.microsoft.com/office/drawing/2014/main" id="{FB80B077-82AA-453D-B139-DDEB54E1D6F5}"/>
-              </a:ext>
-            </a:extLst>
-          </p:cNvPr>
-          <p:cNvSpPr txBox="1"/>
-          <p:nvPr/>
-        </p:nvSpPr>
-        <p:spPr>
-          <a:xfrm>
-            <a:off x="609601" y="5317487"/>
-            <a:ext cx="7421392" cy="2601481"/>
-          </a:xfrm>
-          <a:prstGeom prst="rect">
-            <a:avLst/>
-          </a:prstGeom>
-        </p:spPr>
-        <p:txBody>
-          <a:bodyPr wrap="square" lIns="0" tIns="0" rIns="0" bIns="0" rtlCol="0" anchor="t">
-            <a:spAutoFit/>
-          </a:bodyPr>
-          <a:lstStyle/>
-          <a:p>
-            <a:pPr algn="ctr">
-              <a:lnSpc>
-                <a:spcPts val="4057"/>
-              </a:lnSpc>
-              <a:spcBef>
-                <a:spcPct val="0"/>
-              </a:spcBef>
+              <a:rPr lang="fr-FR" sz="2900" dirty="0"/>
+              <a:t>sécuriser les accès </a:t>
+            </a:r>
+          </a:p>
+          <a:p>
+            <a:pPr>
+              <a:buFont typeface="Arial" panose="020B0604020202020204" pitchFamily="34" charset="0"/>
+              <a:buChar char="•"/>
             </a:pPr>
             <a:r>
-              <a:rPr lang="fr-FR" sz="2897" dirty="0">
-                <a:solidFill>
-                  <a:srgbClr val="3D05AD"/>
-                </a:solidFill>
-              </a:rPr>
-              <a:t>La veille technologique consiste à s'informer de façon systématique sur les techniques les plus récentes et surtout sur leur mise à disposition commerciale</a:t>
+              <a:rPr lang="fr-FR" sz="2900" dirty="0"/>
+              <a:t>mettre des mots de passe forts </a:t>
+            </a:r>
+          </a:p>
+          <a:p>
+            <a:pPr>
+              <a:buFont typeface="Arial" panose="020B0604020202020204" pitchFamily="34" charset="0"/>
+              <a:buChar char="•"/>
+            </a:pPr>
+            <a:r>
+              <a:rPr lang="fr-FR" sz="2900" dirty="0"/>
+              <a:t>limiter les permissions NTFS </a:t>
+            </a:r>
+          </a:p>
+          <a:p>
+            <a:pPr>
+              <a:buFont typeface="Arial" panose="020B0604020202020204" pitchFamily="34" charset="0"/>
+              <a:buChar char="•"/>
+            </a:pPr>
+            <a:r>
+              <a:rPr lang="fr-FR" sz="2900" dirty="0"/>
+              <a:t>faire des sauvegardes </a:t>
+            </a:r>
+          </a:p>
+          <a:p>
+            <a:pPr>
+              <a:buFont typeface="Arial" panose="020B0604020202020204" pitchFamily="34" charset="0"/>
+              <a:buChar char="•"/>
+            </a:pPr>
+            <a:r>
+              <a:rPr lang="fr-FR" sz="2900" dirty="0"/>
+              <a:t>protéger contre les cyberattaques</a:t>
+            </a:r>
+          </a:p>
+          <a:p>
+            <a:pPr>
+              <a:buFont typeface="Arial" panose="020B0604020202020204" pitchFamily="34" charset="0"/>
+              <a:buChar char="•"/>
+            </a:pPr>
+            <a:r>
+              <a:rPr lang="fr-FR" sz="2900" dirty="0"/>
+              <a:t>Stocker que les données nécessaires</a:t>
             </a:r>
           </a:p>
         </p:txBody>
@@ -9173,43 +9077,50 @@
           <a:chExt cx="0" cy="0"/>
         </a:xfrm>
       </p:grpSpPr>
-      <p:pic>
-        <p:nvPicPr>
-          <p:cNvPr id="5" name="Image 4">
-            <a:hlinkClick r:id="rId2"/>
-            <a:extLst>
-              <a:ext uri="{FF2B5EF4-FFF2-40B4-BE49-F238E27FC236}">
-                <a16:creationId xmlns:a16="http://schemas.microsoft.com/office/drawing/2014/main" id="{800B7E58-E429-45B1-B4B8-265DC0F39927}"/>
-              </a:ext>
-            </a:extLst>
-          </p:cNvPr>
-          <p:cNvPicPr>
-            <a:picLocks noChangeAspect="1"/>
-          </p:cNvPicPr>
+      <p:sp>
+        <p:nvSpPr>
+          <p:cNvPr id="6" name="TextBox 6"/>
+          <p:cNvSpPr txBox="1"/>
           <p:nvPr/>
-        </p:nvPicPr>
-        <p:blipFill>
-          <a:blip r:embed="rId3"/>
-          <a:stretch>
-            <a:fillRect/>
-          </a:stretch>
-        </p:blipFill>
+        </p:nvSpPr>
         <p:spPr>
           <a:xfrm>
-            <a:off x="5029200" y="2133736"/>
-            <a:ext cx="7962900" cy="8126148"/>
+            <a:off x="2831473" y="31474"/>
+            <a:ext cx="12625043" cy="1285875"/>
           </a:xfrm>
           <a:prstGeom prst="rect">
             <a:avLst/>
           </a:prstGeom>
         </p:spPr>
-      </p:pic>
+        <p:txBody>
+          <a:bodyPr lIns="0" tIns="0" rIns="0" bIns="0" rtlCol="0" anchor="t">
+            <a:spAutoFit/>
+          </a:bodyPr>
+          <a:lstStyle/>
+          <a:p>
+            <a:pPr algn="ctr">
+              <a:lnSpc>
+                <a:spcPts val="9900"/>
+              </a:lnSpc>
+            </a:pPr>
+            <a:r>
+              <a:rPr lang="en-US" sz="9000" dirty="0">
+                <a:solidFill>
+                  <a:srgbClr val="3D05AD"/>
+                </a:solidFill>
+                <a:latin typeface="+mj-lt"/>
+              </a:rPr>
+              <a:t>06. VEILLE SUR RGPD </a:t>
+            </a:r>
+          </a:p>
+        </p:txBody>
+      </p:sp>
       <p:sp>
         <p:nvSpPr>
-          <p:cNvPr id="7" name="TextBox 7">
+          <p:cNvPr id="15" name="TextBox 8">
             <a:extLst>
               <a:ext uri="{FF2B5EF4-FFF2-40B4-BE49-F238E27FC236}">
-                <a16:creationId xmlns:a16="http://schemas.microsoft.com/office/drawing/2014/main" id="{551AACC9-9600-42E3-A948-60E3BFC565AD}"/>
+                <a16:creationId xmlns:a16="http://schemas.microsoft.com/office/drawing/2014/main" id="{09B0D6DA-D12D-4550-B571-00C433B0B308}"/>
               </a:ext>
             </a:extLst>
           </p:cNvPr>
@@ -9218,8 +9129,8 @@
         </p:nvSpPr>
         <p:spPr>
           <a:xfrm>
-            <a:off x="4472834" y="571500"/>
-            <a:ext cx="9342332" cy="1359988"/>
+            <a:off x="2209800" y="2933700"/>
+            <a:ext cx="14935200" cy="2862322"/>
           </a:xfrm>
           <a:prstGeom prst="rect">
             <a:avLst/>
@@ -9231,62 +9142,50 @@
           </a:bodyPr>
           <a:lstStyle/>
           <a:p>
-            <a:pPr algn="ctr">
-              <a:lnSpc>
-                <a:spcPts val="5117"/>
-              </a:lnSpc>
-            </a:pPr>
-            <a:r>
-              <a:rPr lang="fr-FR" sz="6000" dirty="0">
-                <a:solidFill>
-                  <a:srgbClr val="3D05AD"/>
-                </a:solidFill>
+            <a:r>
+              <a:rPr lang="fr-FR" sz="2900" dirty="0"/>
+              <a:t>Voici les sites utilisés pour me renseigner sur l’activité du RGPD :</a:t>
+            </a:r>
+          </a:p>
+          <a:p>
+            <a:endParaRPr lang="fr-FR" sz="2900" dirty="0"/>
+          </a:p>
+          <a:p>
+            <a:r>
+              <a:rPr lang="fr-FR" sz="3200" dirty="0">
+                <a:hlinkClick r:id="rId2"/>
               </a:rPr>
-              <a:t>Veille avec Google Alertes</a:t>
-            </a:r>
+              <a:t>TPE-PME | CNIL</a:t>
+            </a:r>
+            <a:endParaRPr lang="fr-FR" sz="2900" dirty="0"/>
+          </a:p>
+          <a:p>
+            <a:r>
+              <a:rPr lang="en-US" sz="3200" dirty="0">
+                <a:hlinkClick r:id="rId3"/>
+              </a:rPr>
+              <a:t>What is GDPR, the EU’s new data protection law? - GDPR.eu</a:t>
+            </a:r>
+            <a:endParaRPr lang="en-US" sz="3200" dirty="0"/>
+          </a:p>
+          <a:p>
+            <a:r>
+              <a:rPr lang="en-US" sz="3200" dirty="0" err="1">
+                <a:hlinkClick r:id="rId4"/>
+              </a:rPr>
+              <a:t>lemagit</a:t>
+            </a:r>
+            <a:endParaRPr lang="en-US" sz="3200" dirty="0"/>
+          </a:p>
+          <a:p>
+            <a:endParaRPr lang="fr-FR" sz="3200" dirty="0"/>
           </a:p>
         </p:txBody>
       </p:sp>
-      <p:pic>
-        <p:nvPicPr>
-          <p:cNvPr id="8" name="Image 7">
-            <a:extLst>
-              <a:ext uri="{FF2B5EF4-FFF2-40B4-BE49-F238E27FC236}">
-                <a16:creationId xmlns:a16="http://schemas.microsoft.com/office/drawing/2014/main" id="{B8716A60-0DA5-42AE-A80F-C0181D578990}"/>
-              </a:ext>
-            </a:extLst>
-          </p:cNvPr>
-          <p:cNvPicPr>
-            <a:picLocks noChangeAspect="1"/>
-          </p:cNvPicPr>
-          <p:nvPr/>
-        </p:nvPicPr>
-        <p:blipFill>
-          <a:blip r:embed="rId4" cstate="print">
-            <a:extLst>
-              <a:ext uri="{28A0092B-C50C-407E-A947-70E740481C1C}">
-                <a14:useLocalDpi xmlns:a14="http://schemas.microsoft.com/office/drawing/2010/main" val="0"/>
-              </a:ext>
-            </a:extLst>
-          </a:blip>
-          <a:stretch>
-            <a:fillRect/>
-          </a:stretch>
-        </p:blipFill>
-        <p:spPr>
-          <a:xfrm>
-            <a:off x="304800" y="190500"/>
-            <a:ext cx="1519731" cy="1519731"/>
-          </a:xfrm>
-          <a:prstGeom prst="rect">
-            <a:avLst/>
-          </a:prstGeom>
-        </p:spPr>
-      </p:pic>
     </p:spTree>
     <p:extLst>
       <p:ext uri="{BB962C8B-B14F-4D97-AF65-F5344CB8AC3E}">
-        <p14:creationId xmlns:p14="http://schemas.microsoft.com/office/powerpoint/2010/main" val="2107050232"/>
+        <p14:creationId xmlns:p14="http://schemas.microsoft.com/office/powerpoint/2010/main" val="46854592"/>
       </p:ext>
     </p:extLst>
   </p:cSld>
@@ -9467,13 +9366,13 @@
           <p:nvPr/>
         </p:nvPicPr>
         <p:blipFill>
-          <a:blip>
+          <a:blip r:embed="rId2">
             <a:extLst>
               <a:ext uri="{28A0092B-C50C-407E-A947-70E740481C1C}">
                 <a14:useLocalDpi xmlns:a14="http://schemas.microsoft.com/office/drawing/2010/main" val="0"/>
               </a:ext>
               <a:ext uri="{96DAC541-7B7A-43D3-8B79-37D633B846F1}">
-                <asvg:svgBlip xmlns:asvg="http://schemas.microsoft.com/office/drawing/2016/SVG/main" r:embed="rId2"/>
+                <asvg:svgBlip xmlns:asvg="http://schemas.microsoft.com/office/drawing/2016/SVG/main" r:embed="rId3"/>
               </a:ext>
             </a:extLst>
           </a:blip>
@@ -9569,7 +9468,7 @@
               </a:lnSpc>
             </a:pPr>
             <a:r>
-              <a:rPr lang="fr-FR" sz="3700">
+              <a:rPr lang="fr-FR" sz="3700" dirty="0">
                 <a:solidFill>
                   <a:srgbClr val="000000"/>
                 </a:solidFill>
@@ -9602,7 +9501,7 @@
               </a:lnSpc>
             </a:pPr>
             <a:r>
-              <a:rPr lang="fr-FR" sz="3700">
+              <a:rPr lang="fr-FR" sz="3700" dirty="0">
                 <a:solidFill>
                   <a:srgbClr val="000000"/>
                 </a:solidFill>
@@ -9626,22 +9525,14 @@
               <a:t>et d'un </a:t>
             </a:r>
             <a:r>
-              <a:rPr lang="fr-FR" sz="3700" b="1">
+              <a:rPr lang="fr-FR" sz="3700" b="1" dirty="0">
                 <a:solidFill>
                   <a:srgbClr val="000000"/>
                 </a:solidFill>
               </a:rPr>
-              <a:t>savoir-faire</a:t>
-            </a:r>
-            <a:r>
-              <a:rPr lang="fr-FR" sz="3700" b="1" dirty="0">
-                <a:solidFill>
-                  <a:srgbClr val="000000"/>
-                </a:solidFill>
-              </a:rPr>
-              <a:t> professionnel</a:t>
-            </a:r>
-            <a:endParaRPr lang="fr-FR"/>
+              <a:t>savoir-faire professionnel</a:t>
+            </a:r>
+            <a:endParaRPr lang="fr-FR" dirty="0"/>
           </a:p>
           <a:p>
             <a:pPr algn="ctr">
@@ -14433,7 +14324,7 @@
                 <a:rPr lang="fr-FR" sz="2800" dirty="0">
                   <a:latin typeface="+mj-lt"/>
                 </a:rPr>
-                <a:t>06. Veille</a:t>
+                <a:t>06. Veille sur RGPD</a:t>
               </a:r>
             </a:p>
           </p:txBody>
@@ -15340,13 +15231,13 @@
           <p:nvPr/>
         </p:nvPicPr>
         <p:blipFill>
-          <a:blip>
+          <a:blip r:embed="rId2">
             <a:extLst>
               <a:ext uri="{28A0092B-C50C-407E-A947-70E740481C1C}">
                 <a14:useLocalDpi xmlns:a14="http://schemas.microsoft.com/office/drawing/2010/main" val="0"/>
               </a:ext>
               <a:ext uri="{96DAC541-7B7A-43D3-8B79-37D633B846F1}">
-                <asvg:svgBlip xmlns:asvg="http://schemas.microsoft.com/office/drawing/2016/SVG/main" r:embed="rId2"/>
+                <asvg:svgBlip xmlns:asvg="http://schemas.microsoft.com/office/drawing/2016/SVG/main" r:embed="rId3"/>
               </a:ext>
             </a:extLst>
           </a:blip>
@@ -15379,13 +15270,13 @@
           <p:nvPr/>
         </p:nvPicPr>
         <p:blipFill>
-          <a:blip>
+          <a:blip r:embed="rId2">
             <a:extLst>
               <a:ext uri="{28A0092B-C50C-407E-A947-70E740481C1C}">
                 <a14:useLocalDpi xmlns:a14="http://schemas.microsoft.com/office/drawing/2010/main" val="0"/>
               </a:ext>
               <a:ext uri="{96DAC541-7B7A-43D3-8B79-37D633B846F1}">
-                <asvg:svgBlip xmlns:asvg="http://schemas.microsoft.com/office/drawing/2016/SVG/main" r:embed="rId2"/>
+                <asvg:svgBlip xmlns:asvg="http://schemas.microsoft.com/office/drawing/2016/SVG/main" r:embed="rId3"/>
               </a:ext>
             </a:extLst>
           </a:blip>
@@ -15418,7 +15309,7 @@
           <p:nvPr/>
         </p:nvPicPr>
         <p:blipFill>
-          <a:blip r:embed="rId3"/>
+          <a:blip r:embed="rId4"/>
           <a:stretch>
             <a:fillRect/>
           </a:stretch>
@@ -15448,7 +15339,7 @@
           <p:nvPr/>
         </p:nvPicPr>
         <p:blipFill>
-          <a:blip r:embed="rId4"/>
+          <a:blip r:embed="rId5"/>
           <a:stretch>
             <a:fillRect/>
           </a:stretch>
@@ -15604,13 +15495,13 @@
           <p:nvPr/>
         </p:nvPicPr>
         <p:blipFill>
-          <a:blip>
+          <a:blip r:embed="rId2">
             <a:extLst>
               <a:ext uri="{28A0092B-C50C-407E-A947-70E740481C1C}">
                 <a14:useLocalDpi xmlns:a14="http://schemas.microsoft.com/office/drawing/2010/main" val="0"/>
               </a:ext>
               <a:ext uri="{96DAC541-7B7A-43D3-8B79-37D633B846F1}">
-                <asvg:svgBlip xmlns:asvg="http://schemas.microsoft.com/office/drawing/2016/SVG/main" r:embed="rId2"/>
+                <asvg:svgBlip xmlns:asvg="http://schemas.microsoft.com/office/drawing/2016/SVG/main" r:embed="rId3"/>
               </a:ext>
             </a:extLst>
           </a:blip>
@@ -15912,13 +15803,13 @@
           <p:nvPr/>
         </p:nvPicPr>
         <p:blipFill>
-          <a:blip cstate="print">
+          <a:blip r:embed="rId2" cstate="print">
             <a:extLst>
               <a:ext uri="{28A0092B-C50C-407E-A947-70E740481C1C}">
                 <a14:useLocalDpi xmlns:a14="http://schemas.microsoft.com/office/drawing/2010/main" val="0"/>
               </a:ext>
               <a:ext uri="{96DAC541-7B7A-43D3-8B79-37D633B846F1}">
-                <asvg:svgBlip xmlns:asvg="http://schemas.microsoft.com/office/drawing/2016/SVG/main" r:embed="rId2"/>
+                <asvg:svgBlip xmlns:asvg="http://schemas.microsoft.com/office/drawing/2016/SVG/main" r:embed="rId3"/>
               </a:ext>
             </a:extLst>
           </a:blip>
@@ -15946,13 +15837,13 @@
           <p:nvPr/>
         </p:nvPicPr>
         <p:blipFill>
-          <a:blip cstate="print">
+          <a:blip r:embed="rId4" cstate="print">
             <a:extLst>
               <a:ext uri="{28A0092B-C50C-407E-A947-70E740481C1C}">
                 <a14:useLocalDpi xmlns:a14="http://schemas.microsoft.com/office/drawing/2010/main" val="0"/>
               </a:ext>
               <a:ext uri="{96DAC541-7B7A-43D3-8B79-37D633B846F1}">
-                <asvg:svgBlip xmlns:asvg="http://schemas.microsoft.com/office/drawing/2016/SVG/main" r:embed="rId3"/>
+                <asvg:svgBlip xmlns:asvg="http://schemas.microsoft.com/office/drawing/2016/SVG/main" r:embed="rId5"/>
               </a:ext>
             </a:extLst>
           </a:blip>
@@ -16694,7 +16585,7 @@
         </p:nvSpPr>
         <p:spPr>
           <a:xfrm>
-            <a:off x="3027317" y="3711388"/>
+            <a:off x="3033758" y="3619500"/>
             <a:ext cx="12220483" cy="3849644"/>
           </a:xfrm>
           <a:prstGeom prst="rect">
@@ -16713,7 +16604,7 @@
               </a:lnSpc>
             </a:pPr>
             <a:r>
-              <a:rPr lang="fr-FR" sz="3550">
+              <a:rPr lang="fr-FR" sz="3550" dirty="0">
                 <a:solidFill>
                   <a:srgbClr val="3D05AD"/>
                 </a:solidFill>
@@ -16722,7 +16613,7 @@
               </a:rPr>
               <a:t>C'est une collectivité territoriale qui gère les services publics de la capitale françaises Paris.</a:t>
             </a:r>
-            <a:endParaRPr lang="en-US" sz="3550">
+            <a:endParaRPr lang="en-US" sz="3550" dirty="0">
               <a:solidFill>
                 <a:srgbClr val="000000"/>
               </a:solidFill>
@@ -16746,7 +16637,7 @@
               </a:rPr>
             </a:br>
             <a:r>
-              <a:rPr lang="fr-FR" sz="3550">
+              <a:rPr lang="fr-FR" sz="3550" dirty="0">
                 <a:solidFill>
                   <a:srgbClr val="3D05AD"/>
                 </a:solidFill>
@@ -16763,7 +16654,7 @@
                 <a:ea typeface="+mn-lt"/>
                 <a:cs typeface="+mn-lt"/>
               </a:rPr>
-              <a:t>infrastructure informatique très importante</a:t>
+              <a:t>infrastructure informatique croissante très importante</a:t>
             </a:r>
             <a:r>
               <a:rPr lang="fr-FR" sz="3550" dirty="0">
@@ -16775,7 +16666,7 @@
               </a:rPr>
               <a:t> pour assurer ses missions et les services fourni à des millions d'utilisateurs en France.</a:t>
             </a:r>
-            <a:endParaRPr lang="en-US" sz="3550">
+            <a:endParaRPr lang="en-US" sz="3550" dirty="0">
               <a:ea typeface="+mn-lt"/>
               <a:cs typeface="+mn-lt"/>
             </a:endParaRPr>
@@ -17211,8 +17102,8 @@
         </p:nvSpPr>
         <p:spPr>
           <a:xfrm>
-            <a:off x="1749468" y="-7306"/>
-            <a:ext cx="15350424" cy="1621598"/>
+            <a:off x="3581400" y="-259087"/>
+            <a:ext cx="10061532" cy="1621598"/>
           </a:xfrm>
           <a:prstGeom prst="rect">
             <a:avLst/>
@@ -17238,143 +17129,6 @@
               </a:rPr>
               <a:t>Le parc informatique</a:t>
             </a:r>
-          </a:p>
-        </p:txBody>
-      </p:sp>
-      <p:sp>
-        <p:nvSpPr>
-          <p:cNvPr id="2" name="TextBox 6">
-            <a:extLst>
-              <a:ext uri="{FF2B5EF4-FFF2-40B4-BE49-F238E27FC236}">
-                <a16:creationId xmlns:a16="http://schemas.microsoft.com/office/drawing/2014/main" id="{EB745768-2A81-AB76-1E89-C064E539C130}"/>
-              </a:ext>
-            </a:extLst>
-          </p:cNvPr>
-          <p:cNvSpPr txBox="1"/>
-          <p:nvPr/>
-        </p:nvSpPr>
-        <p:spPr>
-          <a:xfrm>
-            <a:off x="653440" y="1605419"/>
-            <a:ext cx="17542479" cy="1406154"/>
-          </a:xfrm>
-          <a:prstGeom prst="rect">
-            <a:avLst/>
-          </a:prstGeom>
-        </p:spPr>
-        <p:txBody>
-          <a:bodyPr wrap="square" lIns="0" tIns="0" rIns="0" bIns="0" rtlCol="0" anchor="t">
-            <a:spAutoFit/>
-          </a:bodyPr>
-          <a:lstStyle/>
-          <a:p>
-            <a:pPr>
-              <a:lnSpc>
-                <a:spcPts val="13500"/>
-              </a:lnSpc>
-            </a:pPr>
-            <a:r>
-              <a:rPr lang="en-US" sz="3000" dirty="0">
-                <a:solidFill>
-                  <a:srgbClr val="3D05AD"/>
-                </a:solidFill>
-                <a:latin typeface="+mj-lt"/>
-              </a:rPr>
-              <a:t>Il y a plus de 20 </a:t>
-            </a:r>
-            <a:r>
-              <a:rPr lang="en-US" sz="3000" dirty="0" err="1">
-                <a:solidFill>
-                  <a:srgbClr val="3D05AD"/>
-                </a:solidFill>
-                <a:latin typeface="+mj-lt"/>
-              </a:rPr>
-              <a:t>mille</a:t>
-            </a:r>
-            <a:r>
-              <a:rPr lang="en-US" sz="3000" dirty="0">
-                <a:solidFill>
-                  <a:srgbClr val="3D05AD"/>
-                </a:solidFill>
-                <a:latin typeface="+mj-lt"/>
-              </a:rPr>
-              <a:t> machines </a:t>
-            </a:r>
-            <a:r>
-              <a:rPr lang="en-US" sz="3000" dirty="0" err="1">
-                <a:solidFill>
-                  <a:srgbClr val="3D05AD"/>
-                </a:solidFill>
-                <a:latin typeface="+mj-lt"/>
-              </a:rPr>
-              <a:t>supervisées</a:t>
-            </a:r>
-            <a:r>
-              <a:rPr lang="en-US" sz="3000" dirty="0">
-                <a:solidFill>
-                  <a:srgbClr val="3D05AD"/>
-                </a:solidFill>
-                <a:latin typeface="+mj-lt"/>
-              </a:rPr>
-              <a:t> dans le central et </a:t>
-            </a:r>
-            <a:r>
-              <a:rPr lang="en-US" sz="3000" dirty="0" err="1">
-                <a:solidFill>
-                  <a:srgbClr val="3D05AD"/>
-                </a:solidFill>
-                <a:latin typeface="+mj-lt"/>
-              </a:rPr>
-              <a:t>en</a:t>
-            </a:r>
-            <a:r>
-              <a:rPr lang="en-US" sz="3000" dirty="0">
-                <a:solidFill>
-                  <a:srgbClr val="3D05AD"/>
-                </a:solidFill>
-                <a:latin typeface="+mj-lt"/>
-              </a:rPr>
-              <a:t> </a:t>
-            </a:r>
-            <a:r>
-              <a:rPr lang="en-US" sz="3000" dirty="0" err="1">
-                <a:solidFill>
-                  <a:srgbClr val="3D05AD"/>
-                </a:solidFill>
-                <a:latin typeface="+mj-lt"/>
-              </a:rPr>
-              <a:t>exécution</a:t>
-            </a:r>
-            <a:r>
-              <a:rPr lang="en-US" sz="3000" dirty="0">
-                <a:solidFill>
-                  <a:srgbClr val="3D05AD"/>
-                </a:solidFill>
-                <a:latin typeface="+mj-lt"/>
-              </a:rPr>
-              <a:t> dans la </a:t>
-            </a:r>
-            <a:r>
-              <a:rPr lang="en-US" sz="3000" dirty="0" err="1">
-                <a:solidFill>
-                  <a:srgbClr val="3D05AD"/>
-                </a:solidFill>
-                <a:latin typeface="+mj-lt"/>
-              </a:rPr>
-              <a:t>ville</a:t>
-            </a:r>
-            <a:r>
-              <a:rPr lang="en-US" sz="3000" dirty="0">
-                <a:solidFill>
-                  <a:srgbClr val="3D05AD"/>
-                </a:solidFill>
-                <a:latin typeface="+mj-lt"/>
-              </a:rPr>
-              <a:t>.</a:t>
-            </a:r>
-            <a:endParaRPr lang="en-US" sz="3000" dirty="0">
-              <a:cs typeface="Poppins"/>
-            </a:endParaRPr>
           </a:p>
         </p:txBody>
       </p:sp>
@@ -17400,7 +17154,7 @@
         </p:blipFill>
         <p:spPr>
           <a:xfrm>
-            <a:off x="2276541" y="3541801"/>
+            <a:off x="2812774" y="3717882"/>
             <a:ext cx="12263110" cy="6350565"/>
           </a:xfrm>
           <a:prstGeom prst="rect">
@@ -17408,6 +17162,67 @@
           </a:prstGeom>
         </p:spPr>
       </p:pic>
+      <p:sp>
+        <p:nvSpPr>
+          <p:cNvPr id="5" name="Rectangle 4">
+            <a:extLst>
+              <a:ext uri="{FF2B5EF4-FFF2-40B4-BE49-F238E27FC236}">
+                <a16:creationId xmlns:a16="http://schemas.microsoft.com/office/drawing/2014/main" id="{433E61CA-9F6A-42EF-98AD-BA653FE50A64}"/>
+              </a:ext>
+            </a:extLst>
+          </p:cNvPr>
+          <p:cNvSpPr/>
+          <p:nvPr/>
+        </p:nvSpPr>
+        <p:spPr>
+          <a:xfrm>
+            <a:off x="2812774" y="1362511"/>
+            <a:ext cx="12567910" cy="2308324"/>
+          </a:xfrm>
+          <a:prstGeom prst="rect">
+            <a:avLst/>
+          </a:prstGeom>
+        </p:spPr>
+        <p:txBody>
+          <a:bodyPr wrap="square">
+            <a:spAutoFit/>
+          </a:bodyPr>
+          <a:lstStyle/>
+          <a:p>
+            <a:r>
+              <a:rPr lang="fr-FR" dirty="0"/>
+              <a:t>Il y a environ 20 mille machines supervisées et en exécution dans la ville. </a:t>
+            </a:r>
+          </a:p>
+          <a:p>
+            <a:r>
+              <a:rPr lang="fr-FR" dirty="0"/>
+              <a:t>-Dont 6 785 machines virtuelles sous 144 hôtes physiques VMware (22 clusters)</a:t>
+            </a:r>
+          </a:p>
+          <a:p>
+            <a:r>
+              <a:rPr lang="fr-FR" dirty="0"/>
+              <a:t>-Et 1 152 machines virtuelles sous 78 hôtes physiques Nutanix (11 clusters)</a:t>
+            </a:r>
+          </a:p>
+          <a:p>
+            <a:r>
+              <a:rPr lang="fr-FR" dirty="0"/>
+              <a:t>Tout le reste ce sont des machines extérieures à la ville, des climatiseurs, des baie de stockage ou des équipement réseaux (répéteur, routeur, switch etc…) ou autre.</a:t>
+            </a:r>
+          </a:p>
+          <a:p>
+            <a:endParaRPr lang="fr-FR" dirty="0"/>
+          </a:p>
+          <a:p>
+            <a:r>
+              <a:rPr lang="fr-FR" dirty="0"/>
+              <a:t>(Ce sont les chiffre de Janvier 2026, le nombre d’hôte physique et virtuel a grandement augmenté depuis ce qui nous rapproche des 20K actuellement)</a:t>
+            </a:r>
+          </a:p>
+        </p:txBody>
+      </p:sp>
     </p:spTree>
     <p:extLst>
       <p:ext uri="{BB962C8B-B14F-4D97-AF65-F5344CB8AC3E}">
@@ -17454,8 +17269,8 @@
         </p:nvSpPr>
         <p:spPr>
           <a:xfrm>
-            <a:off x="4573552" y="-6722"/>
-            <a:ext cx="10005218" cy="1621598"/>
+            <a:off x="2819400" y="35773"/>
+            <a:ext cx="9142448" cy="1621598"/>
           </a:xfrm>
           <a:prstGeom prst="rect">
             <a:avLst/>
@@ -17522,8 +17337,8 @@
         </p:nvSpPr>
         <p:spPr>
           <a:xfrm>
-            <a:off x="-176494" y="3854753"/>
-            <a:ext cx="5768745" cy="1124795"/>
+            <a:off x="-228599" y="3673170"/>
+            <a:ext cx="5181600" cy="1124795"/>
           </a:xfrm>
           <a:prstGeom prst="rect">
             <a:avLst/>
@@ -17541,14 +17356,14 @@
               </a:lnSpc>
             </a:pPr>
             <a:r>
-              <a:rPr lang="fr-FR" sz="3200">
+              <a:rPr lang="fr-FR" sz="3200" dirty="0">
                 <a:solidFill>
                   <a:srgbClr val="000000"/>
                 </a:solidFill>
               </a:rPr>
               <a:t>Pour superviser les 20k machines</a:t>
             </a:r>
-            <a:endParaRPr lang="en-US"/>
+            <a:endParaRPr lang="en-US" dirty="0"/>
           </a:p>
         </p:txBody>
       </p:sp>
@@ -17566,7 +17381,7 @@
         </p:nvSpPr>
         <p:spPr>
           <a:xfrm>
-            <a:off x="5743530" y="8759634"/>
+            <a:off x="4863331" y="8708335"/>
             <a:ext cx="7315200" cy="1124795"/>
           </a:xfrm>
           <a:prstGeom prst="rect">
@@ -17590,23 +17405,7 @@
                   <a:srgbClr val="000000"/>
                 </a:solidFill>
               </a:rPr>
-              <a:t>pour se connecter </a:t>
-            </a:r>
-            <a:r>
-              <a:rPr lang="fr-FR" sz="3200">
-                <a:solidFill>
-                  <a:srgbClr val="000000"/>
-                </a:solidFill>
-              </a:rPr>
-              <a:t>aux serveurs virtuels</a:t>
-            </a:r>
-            <a:r>
-              <a:rPr lang="fr-FR" sz="3200" dirty="0">
-                <a:solidFill>
-                  <a:srgbClr val="000000"/>
-                </a:solidFill>
-              </a:rPr>
-              <a:t> et à distances en SSH</a:t>
+              <a:t>pour se connecter aux serveurs virtuels et à distances en SSH</a:t>
             </a:r>
             <a:endParaRPr lang="fr-FR" sz="3200" dirty="0">
               <a:solidFill>
@@ -17631,7 +17430,7 @@
         </p:nvSpPr>
         <p:spPr>
           <a:xfrm>
-            <a:off x="5265263" y="4576701"/>
+            <a:off x="4191000" y="4510669"/>
             <a:ext cx="8659863" cy="1124795"/>
           </a:xfrm>
           <a:prstGeom prst="rect">
@@ -17704,7 +17503,7 @@
         </p:blipFill>
         <p:spPr>
           <a:xfrm>
-            <a:off x="6738936" y="1810030"/>
+            <a:off x="5460762" y="1667088"/>
             <a:ext cx="5801848" cy="2464734"/>
           </a:xfrm>
           <a:prstGeom prst="rect">
@@ -17734,7 +17533,7 @@
         </p:blipFill>
         <p:spPr>
           <a:xfrm>
-            <a:off x="7300632" y="6580374"/>
+            <a:off x="6172200" y="6486311"/>
             <a:ext cx="4191000" cy="1933575"/>
           </a:xfrm>
           <a:prstGeom prst="rect">
@@ -17764,7 +17563,7 @@
         </p:blipFill>
         <p:spPr>
           <a:xfrm>
-            <a:off x="1082489" y="2131946"/>
+            <a:off x="533400" y="2047317"/>
             <a:ext cx="2743198" cy="1417489"/>
           </a:xfrm>
           <a:prstGeom prst="rect">
@@ -17772,6 +17571,102 @@
           </a:prstGeom>
         </p:spPr>
       </p:pic>
+      <p:pic>
+        <p:nvPicPr>
+          <p:cNvPr id="1026" name="Picture 2" descr="Pack Office Version Complète _ Microsoft Office Famille et Étudiant ...">
+            <a:extLst>
+              <a:ext uri="{FF2B5EF4-FFF2-40B4-BE49-F238E27FC236}">
+                <a16:creationId xmlns:a16="http://schemas.microsoft.com/office/drawing/2014/main" id="{05AC9CC1-E642-4015-9C16-C591E892D85D}"/>
+              </a:ext>
+            </a:extLst>
+          </p:cNvPr>
+          <p:cNvPicPr>
+            <a:picLocks noChangeAspect="1" noChangeArrowheads="1"/>
+          </p:cNvPicPr>
+          <p:nvPr/>
+        </p:nvPicPr>
+        <p:blipFill>
+          <a:blip r:embed="rId5" cstate="print">
+            <a:extLst>
+              <a:ext uri="{28A0092B-C50C-407E-A947-70E740481C1C}">
+                <a14:useLocalDpi xmlns:a14="http://schemas.microsoft.com/office/drawing/2010/main" val="0"/>
+              </a:ext>
+            </a:extLst>
+          </a:blip>
+          <a:srcRect/>
+          <a:stretch>
+            <a:fillRect/>
+          </a:stretch>
+        </p:blipFill>
+        <p:spPr bwMode="auto">
+          <a:xfrm>
+            <a:off x="13030200" y="2767144"/>
+            <a:ext cx="5059174" cy="2936845"/>
+          </a:xfrm>
+          <a:prstGeom prst="rect">
+            <a:avLst/>
+          </a:prstGeom>
+          <a:noFill/>
+          <a:extLst>
+            <a:ext uri="{909E8E84-426E-40DD-AFC4-6F175D3DCCD1}">
+              <a14:hiddenFill xmlns:a14="http://schemas.microsoft.com/office/drawing/2010/main">
+                <a:solidFill>
+                  <a:srgbClr val="FFFFFF"/>
+                </a:solidFill>
+              </a14:hiddenFill>
+            </a:ext>
+          </a:extLst>
+        </p:spPr>
+      </p:pic>
+      <p:sp>
+        <p:nvSpPr>
+          <p:cNvPr id="3" name="Rectangle 2">
+            <a:extLst>
+              <a:ext uri="{FF2B5EF4-FFF2-40B4-BE49-F238E27FC236}">
+                <a16:creationId xmlns:a16="http://schemas.microsoft.com/office/drawing/2014/main" id="{666BE595-47DC-4B9D-BB23-7588FE7EA444}"/>
+              </a:ext>
+            </a:extLst>
+          </p:cNvPr>
+          <p:cNvSpPr/>
+          <p:nvPr/>
+        </p:nvSpPr>
+        <p:spPr>
+          <a:xfrm>
+            <a:off x="13792200" y="5722211"/>
+            <a:ext cx="3200400" cy="1217128"/>
+          </a:xfrm>
+          <a:prstGeom prst="rect">
+            <a:avLst/>
+          </a:prstGeom>
+        </p:spPr>
+        <p:txBody>
+          <a:bodyPr wrap="square">
+            <a:spAutoFit/>
+          </a:bodyPr>
+          <a:lstStyle/>
+          <a:p>
+            <a:pPr algn="ctr">
+              <a:lnSpc>
+                <a:spcPts val="4517"/>
+              </a:lnSpc>
+            </a:pPr>
+            <a:r>
+              <a:rPr lang="fr-FR" sz="3200" dirty="0">
+                <a:solidFill>
+                  <a:srgbClr val="000000"/>
+                </a:solidFill>
+              </a:rPr>
+              <a:t>Évidemment le pack office</a:t>
+            </a:r>
+            <a:endParaRPr lang="fr-FR" sz="3200" dirty="0">
+              <a:solidFill>
+                <a:srgbClr val="000000"/>
+              </a:solidFill>
+              <a:cs typeface="Poppins"/>
+            </a:endParaRPr>
+          </a:p>
+        </p:txBody>
+      </p:sp>
     </p:spTree>
     <p:extLst>
       <p:ext uri="{BB962C8B-B14F-4D97-AF65-F5344CB8AC3E}">

--- a/Parcours_de_professionnalisation_E5_diapo.pptx
+++ b/Parcours_de_professionnalisation_E5_diapo.pptx
@@ -27,23 +27,20 @@
   <p:notesSz cx="6858000" cy="9144000"/>
   <p:embeddedFontLst>
     <p:embeddedFont>
-      <p:font typeface="Calibri" panose="020F0502020204030204" pitchFamily="34" charset="0"/>
+      <p:font typeface="Poppins" panose="00000500000000000000" pitchFamily="2" charset="0"/>
       <p:regular r:id="rId19"/>
       <p:bold r:id="rId20"/>
       <p:italic r:id="rId21"/>
       <p:boldItalic r:id="rId22"/>
     </p:embeddedFont>
     <p:embeddedFont>
-      <p:font typeface="Poppins" panose="020B0604020202020204" charset="0"/>
-      <p:regular r:id="rId23"/>
-      <p:bold r:id="rId24"/>
-      <p:italic r:id="rId25"/>
-      <p:boldItalic r:id="rId26"/>
+      <p:font typeface="Poppins ExtraBold" panose="00000900000000000000" pitchFamily="2" charset="0"/>
+      <p:bold r:id="rId23"/>
+      <p:boldItalic r:id="rId24"/>
     </p:embeddedFont>
     <p:embeddedFont>
-      <p:font typeface="Poppins ExtraBold" panose="020B0604020202020204" charset="0"/>
-      <p:bold r:id="rId27"/>
-      <p:boldItalic r:id="rId28"/>
+      <p:font typeface="Poppins Medium" panose="00000600000000000000" pitchFamily="2" charset="0"/>
+      <p:regular r:id="rId25"/>
     </p:embeddedFont>
   </p:embeddedFontLst>
   <p:defaultTextStyle>
@@ -372,7 +369,7 @@
             <a:fld id="{1D8BD707-D9CF-40AE-B4C6-C98DA3205C09}" type="datetimeFigureOut">
               <a:rPr lang="en-US" smtClean="0"/>
               <a:pPr/>
-              <a:t>5/20/2026</a:t>
+              <a:t>5/21/2026</a:t>
             </a:fld>
             <a:endParaRPr lang="en-US"/>
           </a:p>
@@ -537,7 +534,7 @@
             <a:fld id="{1D8BD707-D9CF-40AE-B4C6-C98DA3205C09}" type="datetimeFigureOut">
               <a:rPr lang="en-US" smtClean="0"/>
               <a:pPr/>
-              <a:t>5/20/2026</a:t>
+              <a:t>5/21/2026</a:t>
             </a:fld>
             <a:endParaRPr lang="en-US"/>
           </a:p>
@@ -712,7 +709,7 @@
             <a:fld id="{1D8BD707-D9CF-40AE-B4C6-C98DA3205C09}" type="datetimeFigureOut">
               <a:rPr lang="en-US" smtClean="0"/>
               <a:pPr/>
-              <a:t>5/20/2026</a:t>
+              <a:t>5/21/2026</a:t>
             </a:fld>
             <a:endParaRPr lang="en-US"/>
           </a:p>
@@ -804,7 +801,7 @@
             <a:fld id="{1D8BD707-D9CF-40AE-B4C6-C98DA3205C09}" type="datetimeFigureOut">
               <a:rPr lang="en-US" smtClean="0"/>
               <a:pPr/>
-              <a:t>5/20/2026</a:t>
+              <a:t>5/21/2026</a:t>
             </a:fld>
             <a:endParaRPr lang="en-US"/>
           </a:p>
@@ -969,7 +966,7 @@
             <a:fld id="{1D8BD707-D9CF-40AE-B4C6-C98DA3205C09}" type="datetimeFigureOut">
               <a:rPr lang="en-US" smtClean="0"/>
               <a:pPr/>
-              <a:t>5/20/2026</a:t>
+              <a:t>5/21/2026</a:t>
             </a:fld>
             <a:endParaRPr lang="en-US"/>
           </a:p>
@@ -1211,7 +1208,7 @@
             <a:fld id="{1D8BD707-D9CF-40AE-B4C6-C98DA3205C09}" type="datetimeFigureOut">
               <a:rPr lang="en-US" smtClean="0"/>
               <a:pPr/>
-              <a:t>5/20/2026</a:t>
+              <a:t>5/21/2026</a:t>
             </a:fld>
             <a:endParaRPr lang="en-US"/>
           </a:p>
@@ -1493,7 +1490,7 @@
             <a:fld id="{1D8BD707-D9CF-40AE-B4C6-C98DA3205C09}" type="datetimeFigureOut">
               <a:rPr lang="en-US" smtClean="0"/>
               <a:pPr/>
-              <a:t>5/20/2026</a:t>
+              <a:t>5/21/2026</a:t>
             </a:fld>
             <a:endParaRPr lang="en-US"/>
           </a:p>
@@ -1909,7 +1906,7 @@
             <a:fld id="{1D8BD707-D9CF-40AE-B4C6-C98DA3205C09}" type="datetimeFigureOut">
               <a:rPr lang="en-US" smtClean="0"/>
               <a:pPr/>
-              <a:t>5/20/2026</a:t>
+              <a:t>5/21/2026</a:t>
             </a:fld>
             <a:endParaRPr lang="en-US"/>
           </a:p>
@@ -2023,7 +2020,7 @@
             <a:fld id="{1D8BD707-D9CF-40AE-B4C6-C98DA3205C09}" type="datetimeFigureOut">
               <a:rPr lang="en-US" smtClean="0"/>
               <a:pPr/>
-              <a:t>5/20/2026</a:t>
+              <a:t>5/21/2026</a:t>
             </a:fld>
             <a:endParaRPr lang="en-US"/>
           </a:p>
@@ -2115,7 +2112,7 @@
             <a:fld id="{1D8BD707-D9CF-40AE-B4C6-C98DA3205C09}" type="datetimeFigureOut">
               <a:rPr lang="en-US" smtClean="0"/>
               <a:pPr/>
-              <a:t>5/20/2026</a:t>
+              <a:t>5/21/2026</a:t>
             </a:fld>
             <a:endParaRPr lang="en-US"/>
           </a:p>
@@ -2387,7 +2384,7 @@
             <a:fld id="{1D8BD707-D9CF-40AE-B4C6-C98DA3205C09}" type="datetimeFigureOut">
               <a:rPr lang="en-US" smtClean="0"/>
               <a:pPr/>
-              <a:t>5/20/2026</a:t>
+              <a:t>5/21/2026</a:t>
             </a:fld>
             <a:endParaRPr lang="en-US"/>
           </a:p>
@@ -2636,7 +2633,7 @@
             <a:fld id="{1D8BD707-D9CF-40AE-B4C6-C98DA3205C09}" type="datetimeFigureOut">
               <a:rPr lang="en-US" smtClean="0"/>
               <a:pPr/>
-              <a:t>5/20/2026</a:t>
+              <a:t>5/21/2026</a:t>
             </a:fld>
             <a:endParaRPr lang="en-US"/>
           </a:p>
@@ -2844,7 +2841,7 @@
             <a:fld id="{1D8BD707-D9CF-40AE-B4C6-C98DA3205C09}" type="datetimeFigureOut">
               <a:rPr lang="en-US" smtClean="0"/>
               <a:pPr/>
-              <a:t>5/20/2026</a:t>
+              <a:t>5/21/2026</a:t>
             </a:fld>
             <a:endParaRPr lang="en-US"/>
           </a:p>
@@ -3349,7 +3346,7 @@
             <a:fld id="{1D8BD707-D9CF-40AE-B4C6-C98DA3205C09}" type="datetimeFigureOut">
               <a:rPr lang="en-US" smtClean="0"/>
               <a:pPr/>
-              <a:t>5/20/2026</a:t>
+              <a:t>5/21/2026</a:t>
             </a:fld>
             <a:endParaRPr lang="en-US"/>
           </a:p>
@@ -8774,15 +8771,15 @@
         </p:nvSpPr>
         <p:spPr>
           <a:xfrm>
-            <a:off x="2831473" y="31474"/>
-            <a:ext cx="12625043" cy="1285875"/>
+            <a:off x="533400" y="114300"/>
+            <a:ext cx="16154400" cy="1131720"/>
           </a:xfrm>
           <a:prstGeom prst="rect">
             <a:avLst/>
           </a:prstGeom>
         </p:spPr>
         <p:txBody>
-          <a:bodyPr lIns="0" tIns="0" rIns="0" bIns="0" rtlCol="0" anchor="t">
+          <a:bodyPr wrap="square" lIns="0" tIns="0" rIns="0" bIns="0" rtlCol="0" anchor="t">
             <a:spAutoFit/>
           </a:bodyPr>
           <a:lstStyle/>
@@ -8793,13 +8790,13 @@
               </a:lnSpc>
             </a:pPr>
             <a:r>
-              <a:rPr lang="en-US" sz="9000" dirty="0">
+              <a:rPr lang="en-US" sz="5000" dirty="0">
                 <a:solidFill>
                   <a:srgbClr val="3D05AD"/>
                 </a:solidFill>
                 <a:latin typeface="+mj-lt"/>
               </a:rPr>
-              <a:t>06. VEILLE SUR RGPD </a:t>
+              <a:t>06. VEILLE SUR LA SUPERVISION INFORMATIQUE </a:t>
             </a:r>
           </a:p>
         </p:txBody>
@@ -8812,7 +8809,7 @@
         </p:nvSpPr>
         <p:spPr>
           <a:xfrm>
-            <a:off x="1590130" y="1439990"/>
+            <a:off x="1219200" y="1246020"/>
             <a:ext cx="15107727" cy="1024127"/>
           </a:xfrm>
           <a:prstGeom prst="rect">
@@ -8840,206 +8837,6 @@
                 </a:solidFill>
               </a:rPr>
               <a:t>La veille technologique consiste à s'informer de façon systématique sur les techniques et informations les plus récentes concernant un domaine</a:t>
-            </a:r>
-          </a:p>
-        </p:txBody>
-      </p:sp>
-      <p:sp>
-        <p:nvSpPr>
-          <p:cNvPr id="13" name="TextBox 8">
-            <a:extLst>
-              <a:ext uri="{FF2B5EF4-FFF2-40B4-BE49-F238E27FC236}">
-                <a16:creationId xmlns:a16="http://schemas.microsoft.com/office/drawing/2014/main" id="{5076A4CD-2D20-4105-803D-6CA53A8BAF8C}"/>
-              </a:ext>
-            </a:extLst>
-          </p:cNvPr>
-          <p:cNvSpPr txBox="1"/>
-          <p:nvPr/>
-        </p:nvSpPr>
-        <p:spPr>
-          <a:xfrm>
-            <a:off x="1795787" y="2781300"/>
-            <a:ext cx="14935200" cy="2723823"/>
-          </a:xfrm>
-          <a:prstGeom prst="rect">
-            <a:avLst/>
-          </a:prstGeom>
-        </p:spPr>
-        <p:txBody>
-          <a:bodyPr wrap="square" lIns="0" tIns="0" rIns="0" bIns="0" rtlCol="0" anchor="t">
-            <a:spAutoFit/>
-          </a:bodyPr>
-          <a:lstStyle/>
-          <a:p>
-            <a:r>
-              <a:rPr lang="fr-FR" sz="2900" dirty="0"/>
-              <a:t>Le </a:t>
-            </a:r>
-            <a:r>
-              <a:rPr lang="fr-FR" sz="2900" b="1" dirty="0"/>
-              <a:t>RGPD (Règlement Général sur la Protection des Données)</a:t>
-            </a:r>
-            <a:r>
-              <a:rPr lang="fr-FR" sz="2900" dirty="0"/>
-              <a:t> est un règlement européen entré en vigueur le </a:t>
-            </a:r>
-            <a:r>
-              <a:rPr lang="fr-FR" sz="2900" b="1" dirty="0"/>
-              <a:t>25 mai 2018</a:t>
-            </a:r>
-            <a:r>
-              <a:rPr lang="fr-FR" sz="2900" dirty="0"/>
-              <a:t>.</a:t>
-            </a:r>
-            <a:br>
-              <a:rPr lang="fr-FR" sz="2900" dirty="0"/>
-            </a:br>
-            <a:r>
-              <a:rPr lang="fr-FR" sz="2900" dirty="0"/>
-              <a:t>Son objectif est de </a:t>
-            </a:r>
-            <a:r>
-              <a:rPr lang="fr-FR" sz="2900" b="1" dirty="0"/>
-              <a:t>protéger les données personnelles des citoyens</a:t>
-            </a:r>
-            <a:r>
-              <a:rPr lang="fr-FR" sz="2900" dirty="0"/>
-              <a:t> et d’</a:t>
-            </a:r>
-            <a:r>
-              <a:rPr lang="fr-FR" sz="2900" b="1" dirty="0"/>
-              <a:t>harmoniser les règles</a:t>
-            </a:r>
-            <a:r>
-              <a:rPr lang="fr-FR" sz="2900" dirty="0"/>
-              <a:t> dans toute l’Union européenne.</a:t>
-            </a:r>
-          </a:p>
-          <a:p>
-            <a:r>
-              <a:rPr lang="fr-FR" sz="2900" dirty="0"/>
-              <a:t>Il s’applique et est imposé à </a:t>
-            </a:r>
-            <a:r>
-              <a:rPr lang="fr-FR" sz="2900" b="1" dirty="0"/>
-              <a:t>toute organisation</a:t>
-            </a:r>
-            <a:r>
-              <a:rPr lang="fr-FR" sz="2900" dirty="0"/>
-              <a:t> (entreprise, administration, association) qui traite des </a:t>
-            </a:r>
-            <a:r>
-              <a:rPr lang="fr-FR" sz="2900" b="1" dirty="0"/>
-              <a:t>données personnelles</a:t>
-            </a:r>
-            <a:r>
-              <a:rPr lang="fr-FR" sz="2900" dirty="0"/>
-              <a:t> de résidents européens</a:t>
-            </a:r>
-            <a:r>
-              <a:rPr lang="fr-FR" sz="3200" dirty="0"/>
-              <a:t>.</a:t>
-            </a:r>
-          </a:p>
-        </p:txBody>
-      </p:sp>
-      <p:sp>
-        <p:nvSpPr>
-          <p:cNvPr id="2" name="Rectangle 1">
-            <a:extLst>
-              <a:ext uri="{FF2B5EF4-FFF2-40B4-BE49-F238E27FC236}">
-                <a16:creationId xmlns:a16="http://schemas.microsoft.com/office/drawing/2014/main" id="{7060035D-81E0-4878-A983-76A545D5C757}"/>
-              </a:ext>
-            </a:extLst>
-          </p:cNvPr>
-          <p:cNvSpPr/>
-          <p:nvPr/>
-        </p:nvSpPr>
-        <p:spPr>
-          <a:xfrm>
-            <a:off x="1785848" y="5822306"/>
-            <a:ext cx="15511552" cy="3662541"/>
-          </a:xfrm>
-          <a:prstGeom prst="rect">
-            <a:avLst/>
-          </a:prstGeom>
-        </p:spPr>
-        <p:txBody>
-          <a:bodyPr wrap="square">
-            <a:spAutoFit/>
-          </a:bodyPr>
-          <a:lstStyle/>
-          <a:p>
-            <a:r>
-              <a:rPr lang="fr-FR" sz="2900" dirty="0"/>
-              <a:t>Le RGPD est crucial car si une entreprise stocke les données de ses employés.</a:t>
-            </a:r>
-            <a:br>
-              <a:rPr lang="fr-FR" sz="2900" dirty="0"/>
-            </a:br>
-            <a:r>
-              <a:rPr lang="fr-FR" sz="2900" dirty="0"/>
-              <a:t>L’administrateur réseau doit :</a:t>
-            </a:r>
-          </a:p>
-          <a:p>
-            <a:pPr>
-              <a:buFont typeface="Arial" panose="020B0604020202020204" pitchFamily="34" charset="0"/>
-              <a:buChar char="•"/>
-            </a:pPr>
-            <a:r>
-              <a:rPr lang="fr-FR" sz="2900" dirty="0"/>
-              <a:t>sécuriser les accès </a:t>
-            </a:r>
-          </a:p>
-          <a:p>
-            <a:pPr>
-              <a:buFont typeface="Arial" panose="020B0604020202020204" pitchFamily="34" charset="0"/>
-              <a:buChar char="•"/>
-            </a:pPr>
-            <a:r>
-              <a:rPr lang="fr-FR" sz="2900" dirty="0"/>
-              <a:t>mettre des mots de passe forts </a:t>
-            </a:r>
-          </a:p>
-          <a:p>
-            <a:pPr>
-              <a:buFont typeface="Arial" panose="020B0604020202020204" pitchFamily="34" charset="0"/>
-              <a:buChar char="•"/>
-            </a:pPr>
-            <a:r>
-              <a:rPr lang="fr-FR" sz="2900" dirty="0"/>
-              <a:t>limiter les permissions NTFS </a:t>
-            </a:r>
-          </a:p>
-          <a:p>
-            <a:pPr>
-              <a:buFont typeface="Arial" panose="020B0604020202020204" pitchFamily="34" charset="0"/>
-              <a:buChar char="•"/>
-            </a:pPr>
-            <a:r>
-              <a:rPr lang="fr-FR" sz="2900" dirty="0"/>
-              <a:t>faire des sauvegardes </a:t>
-            </a:r>
-          </a:p>
-          <a:p>
-            <a:pPr>
-              <a:buFont typeface="Arial" panose="020B0604020202020204" pitchFamily="34" charset="0"/>
-              <a:buChar char="•"/>
-            </a:pPr>
-            <a:r>
-              <a:rPr lang="fr-FR" sz="2900" dirty="0"/>
-              <a:t>protéger contre les cyberattaques</a:t>
-            </a:r>
-          </a:p>
-          <a:p>
-            <a:pPr>
-              <a:buFont typeface="Arial" panose="020B0604020202020204" pitchFamily="34" charset="0"/>
-              <a:buChar char="•"/>
-            </a:pPr>
-            <a:r>
-              <a:rPr lang="fr-FR" sz="2900" dirty="0"/>
-              <a:t>Stocker que les données nécessaires</a:t>
             </a:r>
           </a:p>
         </p:txBody>
@@ -9085,52 +8882,8 @@
         </p:nvSpPr>
         <p:spPr>
           <a:xfrm>
-            <a:off x="2831473" y="31474"/>
-            <a:ext cx="12625043" cy="1285875"/>
-          </a:xfrm>
-          <a:prstGeom prst="rect">
-            <a:avLst/>
-          </a:prstGeom>
-        </p:spPr>
-        <p:txBody>
-          <a:bodyPr lIns="0" tIns="0" rIns="0" bIns="0" rtlCol="0" anchor="t">
-            <a:spAutoFit/>
-          </a:bodyPr>
-          <a:lstStyle/>
-          <a:p>
-            <a:pPr algn="ctr">
-              <a:lnSpc>
-                <a:spcPts val="9900"/>
-              </a:lnSpc>
-            </a:pPr>
-            <a:r>
-              <a:rPr lang="en-US" sz="9000" dirty="0">
-                <a:solidFill>
-                  <a:srgbClr val="3D05AD"/>
-                </a:solidFill>
-                <a:latin typeface="+mj-lt"/>
-              </a:rPr>
-              <a:t>06. VEILLE SUR RGPD </a:t>
-            </a:r>
-          </a:p>
-        </p:txBody>
-      </p:sp>
-      <p:sp>
-        <p:nvSpPr>
-          <p:cNvPr id="15" name="TextBox 8">
-            <a:extLst>
-              <a:ext uri="{FF2B5EF4-FFF2-40B4-BE49-F238E27FC236}">
-                <a16:creationId xmlns:a16="http://schemas.microsoft.com/office/drawing/2014/main" id="{09B0D6DA-D12D-4550-B571-00C433B0B308}"/>
-              </a:ext>
-            </a:extLst>
-          </p:cNvPr>
-          <p:cNvSpPr txBox="1"/>
-          <p:nvPr/>
-        </p:nvSpPr>
-        <p:spPr>
-          <a:xfrm>
-            <a:off x="2209800" y="2933700"/>
-            <a:ext cx="14935200" cy="2862322"/>
+            <a:off x="1447800" y="190500"/>
+            <a:ext cx="14999327" cy="1131720"/>
           </a:xfrm>
           <a:prstGeom prst="rect">
             <a:avLst/>
@@ -9142,43 +8895,141 @@
           </a:bodyPr>
           <a:lstStyle/>
           <a:p>
-            <a:r>
-              <a:rPr lang="fr-FR" sz="2900" dirty="0"/>
-              <a:t>Voici les sites utilisés pour me renseigner sur l’activité du RGPD :</a:t>
-            </a:r>
-          </a:p>
-          <a:p>
-            <a:endParaRPr lang="fr-FR" sz="2900" dirty="0"/>
-          </a:p>
-          <a:p>
-            <a:r>
-              <a:rPr lang="fr-FR" sz="3200" dirty="0">
-                <a:hlinkClick r:id="rId2"/>
+            <a:pPr algn="ctr">
+              <a:lnSpc>
+                <a:spcPts val="9900"/>
+              </a:lnSpc>
+            </a:pPr>
+            <a:r>
+              <a:rPr lang="en-US" sz="5000" dirty="0">
+                <a:solidFill>
+                  <a:srgbClr val="3D05AD"/>
+                </a:solidFill>
               </a:rPr>
-              <a:t>TPE-PME | CNIL</a:t>
-            </a:r>
-            <a:endParaRPr lang="fr-FR" sz="2900" dirty="0"/>
-          </a:p>
-          <a:p>
-            <a:r>
-              <a:rPr lang="en-US" sz="3200" dirty="0">
-                <a:hlinkClick r:id="rId3"/>
+              <a:t>06. VEILLE SUR LA SUPERVISION INFORMATIQUE </a:t>
+            </a:r>
+          </a:p>
+        </p:txBody>
+      </p:sp>
+      <p:sp>
+        <p:nvSpPr>
+          <p:cNvPr id="3" name="ZoneTexte 2">
+            <a:extLst>
+              <a:ext uri="{FF2B5EF4-FFF2-40B4-BE49-F238E27FC236}">
+                <a16:creationId xmlns:a16="http://schemas.microsoft.com/office/drawing/2014/main" id="{6E3F001A-4D57-76F9-D97A-7DAED6B8A058}"/>
+              </a:ext>
+            </a:extLst>
+          </p:cNvPr>
+          <p:cNvSpPr txBox="1"/>
+          <p:nvPr/>
+        </p:nvSpPr>
+        <p:spPr>
+          <a:xfrm>
+            <a:off x="3962400" y="2095500"/>
+            <a:ext cx="9144000" cy="3005951"/>
+          </a:xfrm>
+          <a:prstGeom prst="rect">
+            <a:avLst/>
+          </a:prstGeom>
+          <a:noFill/>
+        </p:spPr>
+        <p:txBody>
+          <a:bodyPr wrap="square">
+            <a:spAutoFit/>
+          </a:bodyPr>
+          <a:lstStyle/>
+          <a:p>
+            <a:pPr algn="l" rtl="0" latinLnBrk="0">
+              <a:lnSpc>
+                <a:spcPts val="3600"/>
+              </a:lnSpc>
+              <a:buNone/>
+            </a:pPr>
+            <a:r>
+              <a:rPr lang="fr-FR" sz="2500" b="1" i="0" cap="all" dirty="0">
+                <a:effectLst/>
+                <a:latin typeface="YAFdJsjyMsM_0"/>
               </a:rPr>
-              <a:t>What is GDPR, the EU’s new data protection law? - GDPR.eu</a:t>
-            </a:r>
-            <a:endParaRPr lang="en-US" sz="3200" dirty="0"/>
-          </a:p>
-          <a:p>
-            <a:r>
-              <a:rPr lang="en-US" sz="3200" dirty="0" err="1">
-                <a:hlinkClick r:id="rId4"/>
+              <a:t>Outils de veille </a:t>
+            </a:r>
+            <a:endParaRPr lang="fr-FR" sz="2500" b="0" i="0" cap="all" dirty="0">
+              <a:effectLst/>
+              <a:latin typeface="YAFdJsjyMsM_0"/>
+            </a:endParaRPr>
+          </a:p>
+          <a:p>
+            <a:pPr algn="l" rtl="0" latinLnBrk="0">
+              <a:lnSpc>
+                <a:spcPts val="3675"/>
+              </a:lnSpc>
+              <a:buFont typeface="Arial" panose="020B0604020202020204" pitchFamily="34" charset="0"/>
+              <a:buChar char="•"/>
+            </a:pPr>
+            <a:r>
+              <a:rPr lang="fr-FR" sz="2500" b="0" i="0" dirty="0">
+                <a:effectLst/>
+                <a:latin typeface="YAFdJsjyMsM_0"/>
               </a:rPr>
-              <a:t>lemagit</a:t>
-            </a:r>
-            <a:endParaRPr lang="en-US" sz="3200" dirty="0"/>
-          </a:p>
-          <a:p>
-            <a:endParaRPr lang="fr-FR" sz="3200" dirty="0"/>
+              <a:t>Google </a:t>
+            </a:r>
+          </a:p>
+          <a:p>
+            <a:pPr algn="l" rtl="0" latinLnBrk="0">
+              <a:lnSpc>
+                <a:spcPts val="3675"/>
+              </a:lnSpc>
+              <a:buFont typeface="Arial" panose="020B0604020202020204" pitchFamily="34" charset="0"/>
+              <a:buChar char="•"/>
+            </a:pPr>
+            <a:r>
+              <a:rPr lang="fr-FR" sz="2500" b="0" i="0" dirty="0">
+                <a:effectLst/>
+                <a:latin typeface="YAFdJsjyMsM_0"/>
+              </a:rPr>
+              <a:t>X</a:t>
+            </a:r>
+          </a:p>
+          <a:p>
+            <a:pPr>
+              <a:lnSpc>
+                <a:spcPts val="3675"/>
+              </a:lnSpc>
+              <a:buFont typeface="Arial" panose="020B0604020202020204" pitchFamily="34" charset="0"/>
+              <a:buChar char="•"/>
+            </a:pPr>
+            <a:r>
+              <a:rPr lang="fr-FR" sz="2500" dirty="0"/>
+              <a:t>cnil.fr</a:t>
+            </a:r>
+          </a:p>
+          <a:p>
+            <a:pPr>
+              <a:lnSpc>
+                <a:spcPts val="3675"/>
+              </a:lnSpc>
+              <a:buFont typeface="Arial" panose="020B0604020202020204" pitchFamily="34" charset="0"/>
+              <a:buChar char="•"/>
+            </a:pPr>
+            <a:r>
+              <a:rPr lang="fr-FR" sz="2500" b="0" i="0" dirty="0" err="1">
+                <a:effectLst/>
+                <a:latin typeface="YAFdJsjyMsM_0"/>
+              </a:rPr>
+              <a:t>Feedly</a:t>
+            </a:r>
+            <a:endParaRPr lang="fr-FR" sz="2500" b="0" i="0" dirty="0">
+              <a:effectLst/>
+              <a:latin typeface="YAFdJsjyMsM_0"/>
+            </a:endParaRPr>
+          </a:p>
+          <a:p>
+            <a:pPr>
+              <a:buNone/>
+            </a:pPr>
+            <a:br>
+              <a:rPr lang="fr-FR" dirty="0"/>
+            </a:br>
+            <a:endParaRPr lang="fr-FR" dirty="0"/>
           </a:p>
         </p:txBody>
       </p:sp>
@@ -9366,13 +9217,13 @@
           <p:nvPr/>
         </p:nvPicPr>
         <p:blipFill>
-          <a:blip r:embed="rId2">
+          <a:blip>
             <a:extLst>
               <a:ext uri="{28A0092B-C50C-407E-A947-70E740481C1C}">
                 <a14:useLocalDpi xmlns:a14="http://schemas.microsoft.com/office/drawing/2010/main" val="0"/>
               </a:ext>
               <a:ext uri="{96DAC541-7B7A-43D3-8B79-37D633B846F1}">
-                <asvg:svgBlip xmlns:asvg="http://schemas.microsoft.com/office/drawing/2016/SVG/main" r:embed="rId3"/>
+                <asvg:svgBlip xmlns:asvg="http://schemas.microsoft.com/office/drawing/2016/SVG/main" r:embed="rId2"/>
               </a:ext>
             </a:extLst>
           </a:blip>
@@ -14324,7 +14175,7 @@
                 <a:rPr lang="fr-FR" sz="2800" dirty="0">
                   <a:latin typeface="+mj-lt"/>
                 </a:rPr>
-                <a:t>06. Veille sur RGPD</a:t>
+                <a:t>06. Veille sur la supervision informatique</a:t>
               </a:r>
             </a:p>
           </p:txBody>
@@ -15231,13 +15082,13 @@
           <p:nvPr/>
         </p:nvPicPr>
         <p:blipFill>
-          <a:blip r:embed="rId2">
+          <a:blip>
             <a:extLst>
               <a:ext uri="{28A0092B-C50C-407E-A947-70E740481C1C}">
                 <a14:useLocalDpi xmlns:a14="http://schemas.microsoft.com/office/drawing/2010/main" val="0"/>
               </a:ext>
               <a:ext uri="{96DAC541-7B7A-43D3-8B79-37D633B846F1}">
-                <asvg:svgBlip xmlns:asvg="http://schemas.microsoft.com/office/drawing/2016/SVG/main" r:embed="rId3"/>
+                <asvg:svgBlip xmlns:asvg="http://schemas.microsoft.com/office/drawing/2016/SVG/main" r:embed="rId2"/>
               </a:ext>
             </a:extLst>
           </a:blip>
@@ -15270,13 +15121,13 @@
           <p:nvPr/>
         </p:nvPicPr>
         <p:blipFill>
-          <a:blip r:embed="rId2">
+          <a:blip>
             <a:extLst>
               <a:ext uri="{28A0092B-C50C-407E-A947-70E740481C1C}">
                 <a14:useLocalDpi xmlns:a14="http://schemas.microsoft.com/office/drawing/2010/main" val="0"/>
               </a:ext>
               <a:ext uri="{96DAC541-7B7A-43D3-8B79-37D633B846F1}">
-                <asvg:svgBlip xmlns:asvg="http://schemas.microsoft.com/office/drawing/2016/SVG/main" r:embed="rId3"/>
+                <asvg:svgBlip xmlns:asvg="http://schemas.microsoft.com/office/drawing/2016/SVG/main" r:embed="rId2"/>
               </a:ext>
             </a:extLst>
           </a:blip>
@@ -15309,7 +15160,7 @@
           <p:nvPr/>
         </p:nvPicPr>
         <p:blipFill>
-          <a:blip r:embed="rId4"/>
+          <a:blip r:embed="rId3"/>
           <a:stretch>
             <a:fillRect/>
           </a:stretch>
@@ -15339,7 +15190,7 @@
           <p:nvPr/>
         </p:nvPicPr>
         <p:blipFill>
-          <a:blip r:embed="rId5"/>
+          <a:blip r:embed="rId4"/>
           <a:stretch>
             <a:fillRect/>
           </a:stretch>
@@ -15495,13 +15346,13 @@
           <p:nvPr/>
         </p:nvPicPr>
         <p:blipFill>
-          <a:blip r:embed="rId2">
+          <a:blip>
             <a:extLst>
               <a:ext uri="{28A0092B-C50C-407E-A947-70E740481C1C}">
                 <a14:useLocalDpi xmlns:a14="http://schemas.microsoft.com/office/drawing/2010/main" val="0"/>
               </a:ext>
               <a:ext uri="{96DAC541-7B7A-43D3-8B79-37D633B846F1}">
-                <asvg:svgBlip xmlns:asvg="http://schemas.microsoft.com/office/drawing/2016/SVG/main" r:embed="rId3"/>
+                <asvg:svgBlip xmlns:asvg="http://schemas.microsoft.com/office/drawing/2016/SVG/main" r:embed="rId2"/>
               </a:ext>
             </a:extLst>
           </a:blip>
@@ -15803,13 +15654,13 @@
           <p:nvPr/>
         </p:nvPicPr>
         <p:blipFill>
-          <a:blip r:embed="rId2" cstate="print">
+          <a:blip cstate="print">
             <a:extLst>
               <a:ext uri="{28A0092B-C50C-407E-A947-70E740481C1C}">
                 <a14:useLocalDpi xmlns:a14="http://schemas.microsoft.com/office/drawing/2010/main" val="0"/>
               </a:ext>
               <a:ext uri="{96DAC541-7B7A-43D3-8B79-37D633B846F1}">
-                <asvg:svgBlip xmlns:asvg="http://schemas.microsoft.com/office/drawing/2016/SVG/main" r:embed="rId3"/>
+                <asvg:svgBlip xmlns:asvg="http://schemas.microsoft.com/office/drawing/2016/SVG/main" r:embed="rId2"/>
               </a:ext>
             </a:extLst>
           </a:blip>
@@ -15837,13 +15688,13 @@
           <p:nvPr/>
         </p:nvPicPr>
         <p:blipFill>
-          <a:blip r:embed="rId4" cstate="print">
+          <a:blip cstate="print">
             <a:extLst>
               <a:ext uri="{28A0092B-C50C-407E-A947-70E740481C1C}">
                 <a14:useLocalDpi xmlns:a14="http://schemas.microsoft.com/office/drawing/2010/main" val="0"/>
               </a:ext>
               <a:ext uri="{96DAC541-7B7A-43D3-8B79-37D633B846F1}">
-                <asvg:svgBlip xmlns:asvg="http://schemas.microsoft.com/office/drawing/2016/SVG/main" r:embed="rId5"/>
+                <asvg:svgBlip xmlns:asvg="http://schemas.microsoft.com/office/drawing/2016/SVG/main" r:embed="rId3"/>
               </a:ext>
             </a:extLst>
           </a:blip>
@@ -16787,24 +16638,14 @@
               </a:lnSpc>
             </a:pPr>
             <a:r>
-              <a:rPr lang="en-US" sz="3450">
+              <a:rPr lang="en-US" sz="3450" dirty="0">
                 <a:solidFill>
                   <a:srgbClr val="3D05AD"/>
                 </a:solidFill>
                 <a:ea typeface="+mn-lt"/>
                 <a:cs typeface="+mn-lt"/>
               </a:rPr>
-              <a:t>227 Rue de Bercy, </a:t>
-            </a:r>
-            <a:r>
-              <a:rPr lang="en-US" sz="3450" dirty="0">
-                <a:solidFill>
-                  <a:srgbClr val="3D05AD"/>
-                </a:solidFill>
-                <a:ea typeface="+mn-lt"/>
-                <a:cs typeface="+mn-lt"/>
-              </a:rPr>
-              <a:t>75012 Paris</a:t>
+              <a:t>227 Rue de Bercy, 75012 Paris</a:t>
             </a:r>
             <a:endParaRPr lang="en-US" dirty="0">
               <a:ea typeface="+mn-lt"/>
@@ -16828,7 +16669,7 @@
         <p:spPr>
           <a:xfrm>
             <a:off x="487455" y="3395383"/>
-            <a:ext cx="16489453" cy="3023905"/>
+            <a:ext cx="16489453" cy="4616648"/>
           </a:xfrm>
           <a:prstGeom prst="rect">
             <a:avLst/>
@@ -16963,7 +16804,7 @@
               <a:t>Infrastructures Production et Sécurité</a:t>
             </a:r>
             <a:r>
-              <a:rPr lang="en-US" sz="3450">
+              <a:rPr lang="en-US" sz="3450" dirty="0">
                 <a:solidFill>
                   <a:srgbClr val="3D05AD"/>
                 </a:solidFill>
@@ -16972,7 +16813,7 @@
               </a:rPr>
               <a:t>). </a:t>
             </a:r>
-            <a:endParaRPr lang="en-US" sz="3450">
+            <a:endParaRPr lang="en-US" sz="3450" dirty="0">
               <a:solidFill>
                 <a:srgbClr val="000000"/>
               </a:solidFill>
@@ -17049,7 +16890,185 @@
                 <a:latin typeface="Poppins"/>
                 <a:cs typeface="Poppins"/>
               </a:rPr>
-              <a:t>).</a:t>
+              <a:t>). Dans le service Supervision </a:t>
+            </a:r>
+            <a:r>
+              <a:rPr lang="en-US" sz="3450" dirty="0" err="1">
+                <a:solidFill>
+                  <a:srgbClr val="3D05AD"/>
+                </a:solidFill>
+                <a:latin typeface="Poppins"/>
+                <a:cs typeface="Poppins"/>
+              </a:rPr>
+              <a:t>informatique</a:t>
+            </a:r>
+            <a:endParaRPr lang="en-US" sz="3450" dirty="0">
+              <a:solidFill>
+                <a:srgbClr val="3D05AD"/>
+              </a:solidFill>
+              <a:latin typeface="Poppins"/>
+              <a:cs typeface="Poppins"/>
+            </a:endParaRPr>
+          </a:p>
+          <a:p>
+            <a:endParaRPr lang="en-US" sz="3450" dirty="0">
+              <a:solidFill>
+                <a:srgbClr val="3D05AD"/>
+              </a:solidFill>
+              <a:latin typeface="Poppins"/>
+              <a:cs typeface="Poppins"/>
+            </a:endParaRPr>
+          </a:p>
+          <a:p>
+            <a:r>
+              <a:rPr lang="en-US" sz="3450" dirty="0">
+                <a:solidFill>
+                  <a:srgbClr val="3D05AD"/>
+                </a:solidFill>
+                <a:latin typeface="Poppins"/>
+                <a:cs typeface="Poppins"/>
+              </a:rPr>
+              <a:t>Nous </a:t>
+            </a:r>
+            <a:r>
+              <a:rPr lang="en-US" sz="3450" dirty="0" err="1">
+                <a:solidFill>
+                  <a:srgbClr val="3D05AD"/>
+                </a:solidFill>
+                <a:latin typeface="Poppins"/>
+                <a:cs typeface="Poppins"/>
+              </a:rPr>
+              <a:t>travaillons</a:t>
+            </a:r>
+            <a:r>
+              <a:rPr lang="en-US" sz="3450" dirty="0">
+                <a:solidFill>
+                  <a:srgbClr val="3D05AD"/>
+                </a:solidFill>
+                <a:latin typeface="Poppins"/>
+                <a:cs typeface="Poppins"/>
+              </a:rPr>
+              <a:t> de concert avec les </a:t>
+            </a:r>
+            <a:r>
+              <a:rPr lang="en-US" sz="3450" dirty="0" err="1">
+                <a:solidFill>
+                  <a:srgbClr val="3D05AD"/>
+                </a:solidFill>
+                <a:latin typeface="Poppins"/>
+                <a:cs typeface="Poppins"/>
+              </a:rPr>
+              <a:t>autres</a:t>
+            </a:r>
+            <a:r>
+              <a:rPr lang="en-US" sz="3450" dirty="0">
+                <a:solidFill>
+                  <a:srgbClr val="3D05AD"/>
+                </a:solidFill>
+                <a:latin typeface="Poppins"/>
+                <a:cs typeface="Poppins"/>
+              </a:rPr>
+              <a:t> service du </a:t>
+            </a:r>
+            <a:r>
+              <a:rPr lang="en-US" sz="3450" dirty="0" err="1">
+                <a:solidFill>
+                  <a:srgbClr val="3D05AD"/>
+                </a:solidFill>
+                <a:latin typeface="Poppins"/>
+                <a:cs typeface="Poppins"/>
+              </a:rPr>
+              <a:t>batiment</a:t>
+            </a:r>
+            <a:r>
+              <a:rPr lang="en-US" sz="3450" dirty="0">
+                <a:solidFill>
+                  <a:srgbClr val="3D05AD"/>
+                </a:solidFill>
+                <a:latin typeface="Poppins"/>
+                <a:cs typeface="Poppins"/>
+              </a:rPr>
+              <a:t> </a:t>
+            </a:r>
+            <a:r>
+              <a:rPr lang="en-US" sz="3450" dirty="0" err="1">
+                <a:solidFill>
+                  <a:srgbClr val="3D05AD"/>
+                </a:solidFill>
+                <a:latin typeface="Poppins"/>
+                <a:cs typeface="Poppins"/>
+              </a:rPr>
+              <a:t>comme</a:t>
+            </a:r>
+            <a:r>
+              <a:rPr lang="en-US" sz="3450" dirty="0">
+                <a:solidFill>
+                  <a:srgbClr val="3D05AD"/>
+                </a:solidFill>
+                <a:latin typeface="Poppins"/>
+                <a:cs typeface="Poppins"/>
+              </a:rPr>
+              <a:t> la </a:t>
+            </a:r>
+            <a:r>
+              <a:rPr lang="en-US" sz="3450" dirty="0" err="1">
+                <a:solidFill>
+                  <a:srgbClr val="3D05AD"/>
+                </a:solidFill>
+                <a:latin typeface="Poppins"/>
+                <a:cs typeface="Poppins"/>
+              </a:rPr>
+              <a:t>Virtualisation</a:t>
+            </a:r>
+            <a:r>
+              <a:rPr lang="en-US" sz="3450" dirty="0">
+                <a:solidFill>
+                  <a:srgbClr val="3D05AD"/>
+                </a:solidFill>
+                <a:latin typeface="Poppins"/>
+                <a:cs typeface="Poppins"/>
+              </a:rPr>
+              <a:t> et la MGIS (Mission et gestion </a:t>
+            </a:r>
+            <a:r>
+              <a:rPr lang="en-US" sz="3450" dirty="0" err="1">
+                <a:solidFill>
+                  <a:srgbClr val="3D05AD"/>
+                </a:solidFill>
+                <a:latin typeface="Poppins"/>
+                <a:cs typeface="Poppins"/>
+              </a:rPr>
+              <a:t>d’identité</a:t>
+            </a:r>
+            <a:r>
+              <a:rPr lang="en-US" sz="3450" dirty="0">
+                <a:solidFill>
+                  <a:srgbClr val="3D05AD"/>
+                </a:solidFill>
+                <a:latin typeface="Poppins"/>
+                <a:cs typeface="Poppins"/>
+              </a:rPr>
+              <a:t> et </a:t>
+            </a:r>
+            <a:r>
+              <a:rPr lang="en-US" sz="3450" dirty="0" err="1">
+                <a:solidFill>
+                  <a:srgbClr val="3D05AD"/>
+                </a:solidFill>
+                <a:latin typeface="Poppins"/>
+                <a:cs typeface="Poppins"/>
+              </a:rPr>
+              <a:t>securité</a:t>
+            </a:r>
+            <a:r>
+              <a:rPr lang="en-US" sz="3450" dirty="0">
+                <a:solidFill>
+                  <a:srgbClr val="3D05AD"/>
+                </a:solidFill>
+                <a:latin typeface="Poppins"/>
+                <a:cs typeface="Poppins"/>
+              </a:rPr>
+              <a:t>)</a:t>
             </a:r>
             <a:endParaRPr lang="en-US" sz="3450" dirty="0">
               <a:cs typeface="Poppins"/>
@@ -17057,7 +17076,7 @@
           </a:p>
           <a:p>
             <a:pPr algn="ctr"/>
-            <a:endParaRPr lang="en-US"/>
+            <a:endParaRPr lang="en-US" dirty="0"/>
           </a:p>
         </p:txBody>
       </p:sp>
@@ -17102,8 +17121,8 @@
         </p:nvSpPr>
         <p:spPr>
           <a:xfrm>
-            <a:off x="3581400" y="-259087"/>
-            <a:ext cx="10061532" cy="1621598"/>
+            <a:off x="3048000" y="-114169"/>
+            <a:ext cx="12567910" cy="1621598"/>
           </a:xfrm>
           <a:prstGeom prst="rect">
             <a:avLst/>
@@ -17154,7 +17173,7 @@
         </p:blipFill>
         <p:spPr>
           <a:xfrm>
-            <a:off x="2812774" y="3717882"/>
+            <a:off x="2812774" y="3936435"/>
             <a:ext cx="12263110" cy="6350565"/>
           </a:xfrm>
           <a:prstGeom prst="rect">
@@ -17176,7 +17195,7 @@
         </p:nvSpPr>
         <p:spPr>
           <a:xfrm>
-            <a:off x="2812774" y="1362511"/>
+            <a:off x="2860045" y="1507429"/>
             <a:ext cx="12567910" cy="2308324"/>
           </a:xfrm>
           <a:prstGeom prst="rect">
@@ -17197,19 +17216,47 @@
           <a:p>
             <a:r>
               <a:rPr lang="fr-FR" dirty="0"/>
-              <a:t>-Dont 6 785 machines virtuelles sous 144 hôtes physiques VMware (22 clusters)</a:t>
-            </a:r>
-          </a:p>
-          <a:p>
+              <a:t>-Dont 6 785 machines virtuelles (linux et </a:t>
+            </a:r>
+            <a:r>
+              <a:rPr lang="fr-FR" dirty="0" err="1"/>
+              <a:t>windows</a:t>
+            </a:r>
             <a:r>
               <a:rPr lang="fr-FR" dirty="0"/>
-              <a:t>-Et 1 152 machines virtuelles sous 78 hôtes physiques Nutanix (11 clusters)</a:t>
-            </a:r>
-          </a:p>
-          <a:p>
+              <a:t>) sous 144 hôtes physiques </a:t>
+            </a:r>
+            <a:r>
+              <a:rPr lang="fr-FR" dirty="0" err="1"/>
+              <a:t>Vmware</a:t>
+            </a:r>
+            <a:r>
+              <a:rPr lang="fr-FR"/>
+              <a:t>/ESX </a:t>
+            </a:r>
             <a:r>
               <a:rPr lang="fr-FR" dirty="0"/>
-              <a:t>Tout le reste ce sont des machines extérieures à la ville, des climatiseurs, des baie de stockage ou des équipement réseaux (répéteur, routeur, switch etc…) ou autre.</a:t>
+              <a:t>(22 clusters)</a:t>
+            </a:r>
+          </a:p>
+          <a:p>
+            <a:r>
+              <a:rPr lang="fr-FR" dirty="0"/>
+              <a:t>-Et 1 152 machines virtuelles (linux et </a:t>
+            </a:r>
+            <a:r>
+              <a:rPr lang="fr-FR" dirty="0" err="1"/>
+              <a:t>windows</a:t>
+            </a:r>
+            <a:r>
+              <a:rPr lang="fr-FR" dirty="0"/>
+              <a:t>) sous 78 hôtes physiques Nutanix/AHV (11 clusters)</a:t>
+            </a:r>
+          </a:p>
+          <a:p>
+            <a:r>
+              <a:rPr lang="fr-FR" dirty="0"/>
+              <a:t>Tout le reste ce sont des machines extérieures à la ville, des climatiseurs, des baies de stockage ou des équipement réseaux (répéteur, routeur, switch etc…) ou autre.</a:t>
             </a:r>
           </a:p>
           <a:p>
@@ -17218,7 +17265,7 @@
           <a:p>
             <a:r>
               <a:rPr lang="fr-FR" dirty="0"/>
-              <a:t>(Ce sont les chiffre de Janvier 2026, le nombre d’hôte physique et virtuel a grandement augmenté depuis ce qui nous rapproche des 20K actuellement)</a:t>
+              <a:t>(Ce sont les chiffres de Janvier 2026, le nombre d’hôte physique et virtuel a grandement augmenté depuis ce qui nous rapproche des 20K actuellement)</a:t>
             </a:r>
           </a:p>
         </p:txBody>
@@ -17270,7 +17317,7 @@
         <p:spPr>
           <a:xfrm>
             <a:off x="2819400" y="35773"/>
-            <a:ext cx="9142448" cy="1621598"/>
+            <a:ext cx="11963400" cy="1621598"/>
           </a:xfrm>
           <a:prstGeom prst="rect">
             <a:avLst/>
@@ -17503,7 +17550,7 @@
         </p:blipFill>
         <p:spPr>
           <a:xfrm>
-            <a:off x="5460762" y="1667088"/>
+            <a:off x="5366776" y="1903155"/>
             <a:ext cx="5801848" cy="2464734"/>
           </a:xfrm>
           <a:prstGeom prst="rect">

--- a/Parcours_de_professionnalisation_E5_diapo.pptx
+++ b/Parcours_de_professionnalisation_E5_diapo.pptx
@@ -18,29 +18,17 @@
     <p:sldId id="267" r:id="rId12"/>
     <p:sldId id="268" r:id="rId13"/>
     <p:sldId id="269" r:id="rId14"/>
-    <p:sldId id="275" r:id="rId15"/>
-    <p:sldId id="270" r:id="rId16"/>
-    <p:sldId id="271" r:id="rId17"/>
-    <p:sldId id="272" r:id="rId18"/>
+    <p:sldId id="270" r:id="rId15"/>
+    <p:sldId id="271" r:id="rId16"/>
+    <p:sldId id="272" r:id="rId17"/>
   </p:sldIdLst>
   <p:sldSz cx="18288000" cy="10287000"/>
   <p:notesSz cx="6858000" cy="9144000"/>
   <p:embeddedFontLst>
     <p:embeddedFont>
-      <p:font typeface="Poppins" panose="00000500000000000000" pitchFamily="2" charset="0"/>
-      <p:regular r:id="rId19"/>
-      <p:bold r:id="rId20"/>
-      <p:italic r:id="rId21"/>
-      <p:boldItalic r:id="rId22"/>
-    </p:embeddedFont>
-    <p:embeddedFont>
-      <p:font typeface="Poppins ExtraBold" panose="00000900000000000000" pitchFamily="2" charset="0"/>
-      <p:bold r:id="rId23"/>
-      <p:boldItalic r:id="rId24"/>
-    </p:embeddedFont>
-    <p:embeddedFont>
-      <p:font typeface="Poppins Medium" panose="00000600000000000000" pitchFamily="2" charset="0"/>
-      <p:regular r:id="rId25"/>
+      <p:font typeface="Abadi" panose="020B0604020104020204" pitchFamily="34" charset="0"/>
+      <p:regular r:id="rId18"/>
+      <p:bold r:id="rId19"/>
     </p:embeddedFont>
   </p:embeddedFontLst>
   <p:defaultTextStyle>
@@ -155,7 +143,6 @@
             <p14:sldId id="267"/>
             <p14:sldId id="268"/>
             <p14:sldId id="269"/>
-            <p14:sldId id="275"/>
             <p14:sldId id="270"/>
             <p14:sldId id="271"/>
             <p14:sldId id="272"/>
@@ -369,7 +356,7 @@
             <a:fld id="{1D8BD707-D9CF-40AE-B4C6-C98DA3205C09}" type="datetimeFigureOut">
               <a:rPr lang="en-US" smtClean="0"/>
               <a:pPr/>
-              <a:t>5/21/2026</a:t>
+              <a:t>7/23/2026</a:t>
             </a:fld>
             <a:endParaRPr lang="en-US"/>
           </a:p>
@@ -534,7 +521,7 @@
             <a:fld id="{1D8BD707-D9CF-40AE-B4C6-C98DA3205C09}" type="datetimeFigureOut">
               <a:rPr lang="en-US" smtClean="0"/>
               <a:pPr/>
-              <a:t>5/21/2026</a:t>
+              <a:t>7/23/2026</a:t>
             </a:fld>
             <a:endParaRPr lang="en-US"/>
           </a:p>
@@ -709,7 +696,7 @@
             <a:fld id="{1D8BD707-D9CF-40AE-B4C6-C98DA3205C09}" type="datetimeFigureOut">
               <a:rPr lang="en-US" smtClean="0"/>
               <a:pPr/>
-              <a:t>5/21/2026</a:t>
+              <a:t>7/23/2026</a:t>
             </a:fld>
             <a:endParaRPr lang="en-US"/>
           </a:p>
@@ -801,7 +788,7 @@
             <a:fld id="{1D8BD707-D9CF-40AE-B4C6-C98DA3205C09}" type="datetimeFigureOut">
               <a:rPr lang="en-US" smtClean="0"/>
               <a:pPr/>
-              <a:t>5/21/2026</a:t>
+              <a:t>7/23/2026</a:t>
             </a:fld>
             <a:endParaRPr lang="en-US"/>
           </a:p>
@@ -966,7 +953,7 @@
             <a:fld id="{1D8BD707-D9CF-40AE-B4C6-C98DA3205C09}" type="datetimeFigureOut">
               <a:rPr lang="en-US" smtClean="0"/>
               <a:pPr/>
-              <a:t>5/21/2026</a:t>
+              <a:t>7/23/2026</a:t>
             </a:fld>
             <a:endParaRPr lang="en-US"/>
           </a:p>
@@ -1208,7 +1195,7 @@
             <a:fld id="{1D8BD707-D9CF-40AE-B4C6-C98DA3205C09}" type="datetimeFigureOut">
               <a:rPr lang="en-US" smtClean="0"/>
               <a:pPr/>
-              <a:t>5/21/2026</a:t>
+              <a:t>7/23/2026</a:t>
             </a:fld>
             <a:endParaRPr lang="en-US"/>
           </a:p>
@@ -1490,7 +1477,7 @@
             <a:fld id="{1D8BD707-D9CF-40AE-B4C6-C98DA3205C09}" type="datetimeFigureOut">
               <a:rPr lang="en-US" smtClean="0"/>
               <a:pPr/>
-              <a:t>5/21/2026</a:t>
+              <a:t>7/23/2026</a:t>
             </a:fld>
             <a:endParaRPr lang="en-US"/>
           </a:p>
@@ -1906,7 +1893,7 @@
             <a:fld id="{1D8BD707-D9CF-40AE-B4C6-C98DA3205C09}" type="datetimeFigureOut">
               <a:rPr lang="en-US" smtClean="0"/>
               <a:pPr/>
-              <a:t>5/21/2026</a:t>
+              <a:t>7/23/2026</a:t>
             </a:fld>
             <a:endParaRPr lang="en-US"/>
           </a:p>
@@ -2020,7 +2007,7 @@
             <a:fld id="{1D8BD707-D9CF-40AE-B4C6-C98DA3205C09}" type="datetimeFigureOut">
               <a:rPr lang="en-US" smtClean="0"/>
               <a:pPr/>
-              <a:t>5/21/2026</a:t>
+              <a:t>7/23/2026</a:t>
             </a:fld>
             <a:endParaRPr lang="en-US"/>
           </a:p>
@@ -2112,7 +2099,7 @@
             <a:fld id="{1D8BD707-D9CF-40AE-B4C6-C98DA3205C09}" type="datetimeFigureOut">
               <a:rPr lang="en-US" smtClean="0"/>
               <a:pPr/>
-              <a:t>5/21/2026</a:t>
+              <a:t>7/23/2026</a:t>
             </a:fld>
             <a:endParaRPr lang="en-US"/>
           </a:p>
@@ -2384,7 +2371,7 @@
             <a:fld id="{1D8BD707-D9CF-40AE-B4C6-C98DA3205C09}" type="datetimeFigureOut">
               <a:rPr lang="en-US" smtClean="0"/>
               <a:pPr/>
-              <a:t>5/21/2026</a:t>
+              <a:t>7/23/2026</a:t>
             </a:fld>
             <a:endParaRPr lang="en-US"/>
           </a:p>
@@ -2633,7 +2620,7 @@
             <a:fld id="{1D8BD707-D9CF-40AE-B4C6-C98DA3205C09}" type="datetimeFigureOut">
               <a:rPr lang="en-US" smtClean="0"/>
               <a:pPr/>
-              <a:t>5/21/2026</a:t>
+              <a:t>7/23/2026</a:t>
             </a:fld>
             <a:endParaRPr lang="en-US"/>
           </a:p>
@@ -2738,7 +2725,7 @@
           <a:lstStyle/>
           <a:p>
             <a:r>
-              <a:rPr lang="en-US"/>
+              <a:rPr lang="en-US" dirty="0"/>
               <a:t>Click to edit Master title style</a:t>
             </a:r>
           </a:p>
@@ -2771,35 +2758,35 @@
           <a:p>
             <a:pPr lvl="0"/>
             <a:r>
-              <a:rPr lang="en-US"/>
+              <a:rPr lang="en-US" dirty="0"/>
               <a:t>Click to edit Master text styles</a:t>
             </a:r>
           </a:p>
           <a:p>
             <a:pPr lvl="1"/>
             <a:r>
-              <a:rPr lang="en-US"/>
+              <a:rPr lang="en-US" dirty="0"/>
               <a:t>Second level</a:t>
             </a:r>
           </a:p>
           <a:p>
             <a:pPr lvl="2"/>
             <a:r>
-              <a:rPr lang="en-US"/>
+              <a:rPr lang="en-US" dirty="0"/>
               <a:t>Third level</a:t>
             </a:r>
           </a:p>
           <a:p>
             <a:pPr lvl="3"/>
             <a:r>
-              <a:rPr lang="en-US"/>
+              <a:rPr lang="en-US" dirty="0"/>
               <a:t>Fourth level</a:t>
             </a:r>
           </a:p>
           <a:p>
             <a:pPr lvl="4"/>
             <a:r>
-              <a:rPr lang="en-US"/>
+              <a:rPr lang="en-US" dirty="0"/>
               <a:t>Fifth level</a:t>
             </a:r>
           </a:p>
@@ -2834,6 +2821,7 @@
                     <a:tint val="75000"/>
                   </a:schemeClr>
                 </a:solidFill>
+                <a:latin typeface="Abadi" panose="020B0604020104020204" pitchFamily="34" charset="0"/>
               </a:defRPr>
             </a:lvl1pPr>
           </a:lstStyle>
@@ -2841,9 +2829,9 @@
             <a:fld id="{1D8BD707-D9CF-40AE-B4C6-C98DA3205C09}" type="datetimeFigureOut">
               <a:rPr lang="en-US" smtClean="0"/>
               <a:pPr/>
-              <a:t>5/21/2026</a:t>
+              <a:t>7/23/2026</a:t>
             </a:fld>
-            <a:endParaRPr lang="en-US"/>
+            <a:endParaRPr lang="en-US" dirty="0"/>
           </a:p>
         </p:txBody>
       </p:sp>
@@ -2876,11 +2864,12 @@
                     <a:tint val="75000"/>
                   </a:schemeClr>
                 </a:solidFill>
+                <a:latin typeface="Abadi" panose="020B0604020104020204" pitchFamily="34" charset="0"/>
               </a:defRPr>
             </a:lvl1pPr>
           </a:lstStyle>
           <a:p>
-            <a:endParaRPr lang="en-US"/>
+            <a:endParaRPr lang="en-US" dirty="0"/>
           </a:p>
         </p:txBody>
       </p:sp>
@@ -2913,6 +2902,7 @@
                     <a:tint val="75000"/>
                   </a:schemeClr>
                 </a:solidFill>
+                <a:latin typeface="Abadi" panose="020B0604020104020204" pitchFamily="34" charset="0"/>
               </a:defRPr>
             </a:lvl1pPr>
           </a:lstStyle>
@@ -2922,7 +2912,7 @@
               <a:pPr/>
               <a:t>‹N°›</a:t>
             </a:fld>
-            <a:endParaRPr lang="en-US"/>
+            <a:endParaRPr lang="en-US" dirty="0"/>
           </a:p>
         </p:txBody>
       </p:sp>
@@ -2953,7 +2943,7 @@
           <a:solidFill>
             <a:schemeClr val="tx1"/>
           </a:solidFill>
-          <a:latin typeface="+mj-lt"/>
+          <a:latin typeface="Abadi" panose="020B0604020104020204" pitchFamily="34" charset="0"/>
           <a:ea typeface="+mj-ea"/>
           <a:cs typeface="+mj-cs"/>
         </a:defRPr>
@@ -2970,7 +2960,7 @@
           <a:solidFill>
             <a:schemeClr val="tx1"/>
           </a:solidFill>
-          <a:latin typeface="+mn-lt"/>
+          <a:latin typeface="Abadi" panose="020B0604020104020204" pitchFamily="34" charset="0"/>
           <a:ea typeface="+mn-ea"/>
           <a:cs typeface="+mn-cs"/>
         </a:defRPr>
@@ -2985,7 +2975,7 @@
           <a:solidFill>
             <a:schemeClr val="tx1"/>
           </a:solidFill>
-          <a:latin typeface="+mn-lt"/>
+          <a:latin typeface="Abadi" panose="020B0604020104020204" pitchFamily="34" charset="0"/>
           <a:ea typeface="+mn-ea"/>
           <a:cs typeface="+mn-cs"/>
         </a:defRPr>
@@ -3000,7 +2990,7 @@
           <a:solidFill>
             <a:schemeClr val="tx1"/>
           </a:solidFill>
-          <a:latin typeface="+mn-lt"/>
+          <a:latin typeface="Abadi" panose="020B0604020104020204" pitchFamily="34" charset="0"/>
           <a:ea typeface="+mn-ea"/>
           <a:cs typeface="+mn-cs"/>
         </a:defRPr>
@@ -3015,7 +3005,7 @@
           <a:solidFill>
             <a:schemeClr val="tx1"/>
           </a:solidFill>
-          <a:latin typeface="+mn-lt"/>
+          <a:latin typeface="Abadi" panose="020B0604020104020204" pitchFamily="34" charset="0"/>
           <a:ea typeface="+mn-ea"/>
           <a:cs typeface="+mn-cs"/>
         </a:defRPr>
@@ -3030,7 +3020,7 @@
           <a:solidFill>
             <a:schemeClr val="tx1"/>
           </a:solidFill>
-          <a:latin typeface="+mn-lt"/>
+          <a:latin typeface="Abadi" panose="020B0604020104020204" pitchFamily="34" charset="0"/>
           <a:ea typeface="+mn-ea"/>
           <a:cs typeface="+mn-cs"/>
         </a:defRPr>
@@ -3243,7 +3233,7 @@
           <a:lstStyle/>
           <a:p>
             <a:r>
-              <a:rPr lang="en-US"/>
+              <a:rPr lang="en-US" dirty="0"/>
               <a:t>Click to edit Master title style</a:t>
             </a:r>
           </a:p>
@@ -3276,35 +3266,35 @@
           <a:p>
             <a:pPr lvl="0"/>
             <a:r>
-              <a:rPr lang="en-US"/>
+              <a:rPr lang="en-US" dirty="0"/>
               <a:t>Click to edit Master text styles</a:t>
             </a:r>
           </a:p>
           <a:p>
             <a:pPr lvl="1"/>
             <a:r>
-              <a:rPr lang="en-US"/>
+              <a:rPr lang="en-US" dirty="0"/>
               <a:t>Second level</a:t>
             </a:r>
           </a:p>
           <a:p>
             <a:pPr lvl="2"/>
             <a:r>
-              <a:rPr lang="en-US"/>
+              <a:rPr lang="en-US" dirty="0"/>
               <a:t>Third level</a:t>
             </a:r>
           </a:p>
           <a:p>
             <a:pPr lvl="3"/>
             <a:r>
-              <a:rPr lang="en-US"/>
+              <a:rPr lang="en-US" dirty="0"/>
               <a:t>Fourth level</a:t>
             </a:r>
           </a:p>
           <a:p>
             <a:pPr lvl="4"/>
             <a:r>
-              <a:rPr lang="en-US"/>
+              <a:rPr lang="en-US" dirty="0"/>
               <a:t>Fifth level</a:t>
             </a:r>
           </a:p>
@@ -3339,6 +3329,7 @@
                     <a:tint val="75000"/>
                   </a:schemeClr>
                 </a:solidFill>
+                <a:latin typeface="Abadi" panose="020B0604020104020204" pitchFamily="34" charset="0"/>
               </a:defRPr>
             </a:lvl1pPr>
           </a:lstStyle>
@@ -3346,9 +3337,9 @@
             <a:fld id="{1D8BD707-D9CF-40AE-B4C6-C98DA3205C09}" type="datetimeFigureOut">
               <a:rPr lang="en-US" smtClean="0"/>
               <a:pPr/>
-              <a:t>5/21/2026</a:t>
+              <a:t>7/23/2026</a:t>
             </a:fld>
-            <a:endParaRPr lang="en-US"/>
+            <a:endParaRPr lang="en-US" dirty="0"/>
           </a:p>
         </p:txBody>
       </p:sp>
@@ -3381,11 +3372,12 @@
                     <a:tint val="75000"/>
                   </a:schemeClr>
                 </a:solidFill>
+                <a:latin typeface="Abadi" panose="020B0604020104020204" pitchFamily="34" charset="0"/>
               </a:defRPr>
             </a:lvl1pPr>
           </a:lstStyle>
           <a:p>
-            <a:endParaRPr lang="en-US"/>
+            <a:endParaRPr lang="en-US" dirty="0"/>
           </a:p>
         </p:txBody>
       </p:sp>
@@ -3418,6 +3410,7 @@
                     <a:tint val="75000"/>
                   </a:schemeClr>
                 </a:solidFill>
+                <a:latin typeface="Abadi" panose="020B0604020104020204" pitchFamily="34" charset="0"/>
               </a:defRPr>
             </a:lvl1pPr>
           </a:lstStyle>
@@ -3427,7 +3420,7 @@
               <a:pPr/>
               <a:t>‹N°›</a:t>
             </a:fld>
-            <a:endParaRPr lang="en-US"/>
+            <a:endParaRPr lang="en-US" dirty="0"/>
           </a:p>
         </p:txBody>
       </p:sp>
@@ -3448,7 +3441,7 @@
           <a:solidFill>
             <a:schemeClr val="tx1"/>
           </a:solidFill>
-          <a:latin typeface="+mj-lt"/>
+          <a:latin typeface="Abadi" panose="020B0604020104020204" pitchFamily="34" charset="0"/>
           <a:ea typeface="+mj-ea"/>
           <a:cs typeface="+mj-cs"/>
         </a:defRPr>
@@ -3465,7 +3458,7 @@
           <a:solidFill>
             <a:schemeClr val="tx1"/>
           </a:solidFill>
-          <a:latin typeface="+mn-lt"/>
+          <a:latin typeface="Abadi" panose="020B0604020104020204" pitchFamily="34" charset="0"/>
           <a:ea typeface="+mn-ea"/>
           <a:cs typeface="+mn-cs"/>
         </a:defRPr>
@@ -3480,7 +3473,7 @@
           <a:solidFill>
             <a:schemeClr val="tx1"/>
           </a:solidFill>
-          <a:latin typeface="+mn-lt"/>
+          <a:latin typeface="Abadi" panose="020B0604020104020204" pitchFamily="34" charset="0"/>
           <a:ea typeface="+mn-ea"/>
           <a:cs typeface="+mn-cs"/>
         </a:defRPr>
@@ -3495,7 +3488,7 @@
           <a:solidFill>
             <a:schemeClr val="tx1"/>
           </a:solidFill>
-          <a:latin typeface="+mn-lt"/>
+          <a:latin typeface="Abadi" panose="020B0604020104020204" pitchFamily="34" charset="0"/>
           <a:ea typeface="+mn-ea"/>
           <a:cs typeface="+mn-cs"/>
         </a:defRPr>
@@ -3510,7 +3503,7 @@
           <a:solidFill>
             <a:schemeClr val="tx1"/>
           </a:solidFill>
-          <a:latin typeface="+mn-lt"/>
+          <a:latin typeface="Abadi" panose="020B0604020104020204" pitchFamily="34" charset="0"/>
           <a:ea typeface="+mn-ea"/>
           <a:cs typeface="+mn-cs"/>
         </a:defRPr>
@@ -3525,7 +3518,7 @@
           <a:solidFill>
             <a:schemeClr val="tx1"/>
           </a:solidFill>
-          <a:latin typeface="+mn-lt"/>
+          <a:latin typeface="Abadi" panose="020B0604020104020204" pitchFamily="34" charset="0"/>
           <a:ea typeface="+mn-ea"/>
           <a:cs typeface="+mn-cs"/>
         </a:defRPr>
@@ -3737,7 +3730,9 @@
           <a:bodyPr/>
           <a:lstStyle/>
           <a:p>
-            <a:endParaRPr lang="fr-FR" dirty="0"/>
+            <a:endParaRPr lang="fr-FR" dirty="0">
+              <a:latin typeface="Abadi" panose="020B0604020104020204" pitchFamily="34" charset="0"/>
+            </a:endParaRPr>
           </a:p>
         </p:txBody>
       </p:sp>
@@ -3786,7 +3781,7 @@
                   <a:solidFill>
                     <a:srgbClr val="3D05AD"/>
                   </a:solidFill>
-                  <a:latin typeface="Poppins ExtraBold" panose="00000900000000000000" pitchFamily="2" charset="0"/>
+                  <a:latin typeface="Abadi" panose="020B0604020104020204" pitchFamily="34" charset="0"/>
                   <a:cs typeface="Poppins ExtraBold" panose="00000900000000000000" pitchFamily="2" charset="0"/>
                 </a:rPr>
                 <a:t>Epreuve E5</a:t>
@@ -3803,7 +3798,7 @@
                   <a:solidFill>
                     <a:srgbClr val="3D05AD"/>
                   </a:solidFill>
-                  <a:latin typeface="+mj-lt"/>
+                  <a:latin typeface="Abadi" panose="020B0604020104020204" pitchFamily="34" charset="0"/>
                   <a:cs typeface="Poppins" panose="00000500000000000000" pitchFamily="2" charset="0"/>
                 </a:rPr>
                 <a:t>Parcours</a:t>
@@ -3813,7 +3808,7 @@
                   <a:solidFill>
                     <a:srgbClr val="3D05AD"/>
                   </a:solidFill>
-                  <a:latin typeface="+mj-lt"/>
+                  <a:latin typeface="Abadi" panose="020B0604020104020204" pitchFamily="34" charset="0"/>
                   <a:cs typeface="Poppins" panose="00000500000000000000" pitchFamily="2" charset="0"/>
                 </a:rPr>
                 <a:t> de </a:t>
@@ -3823,7 +3818,7 @@
                   <a:solidFill>
                     <a:srgbClr val="3D05AD"/>
                   </a:solidFill>
-                  <a:latin typeface="+mj-lt"/>
+                  <a:latin typeface="Abadi" panose="020B0604020104020204" pitchFamily="34" charset="0"/>
                   <a:cs typeface="Poppins" panose="00000500000000000000" pitchFamily="2" charset="0"/>
                 </a:rPr>
                 <a:t>professionnalisation</a:t>
@@ -3832,7 +3827,7 @@
                 <a:solidFill>
                   <a:srgbClr val="3D05AD"/>
                 </a:solidFill>
-                <a:latin typeface="+mj-lt"/>
+                <a:latin typeface="Abadi" panose="020B0604020104020204" pitchFamily="34" charset="0"/>
                 <a:cs typeface="Poppins" panose="00000500000000000000" pitchFamily="2" charset="0"/>
               </a:endParaRPr>
             </a:p>
@@ -3871,7 +3866,7 @@
                 <a:solidFill>
                   <a:srgbClr val="3D05AD"/>
                 </a:solidFill>
-                <a:latin typeface="Poppins ExtraBold" panose="00000900000000000000" pitchFamily="2" charset="0"/>
+                <a:latin typeface="Abadi" panose="020B0604020104020204" pitchFamily="34" charset="0"/>
                 <a:cs typeface="Poppins ExtraBold" panose="00000900000000000000" pitchFamily="2" charset="0"/>
               </a:endParaRPr>
             </a:p>
@@ -3888,7 +3883,7 @@
                 <a:solidFill>
                   <a:srgbClr val="3D05AD"/>
                 </a:solidFill>
-                <a:latin typeface="Poppins ExtraBold" panose="00000900000000000000" pitchFamily="2" charset="0"/>
+                <a:latin typeface="Abadi" panose="020B0604020104020204" pitchFamily="34" charset="0"/>
                 <a:cs typeface="Poppins ExtraBold" panose="00000900000000000000" pitchFamily="2" charset="0"/>
               </a:endParaRPr>
             </a:p>
@@ -3905,7 +3900,7 @@
                 <a:solidFill>
                   <a:srgbClr val="3D05AD"/>
                 </a:solidFill>
-                <a:latin typeface="Poppins ExtraBold" panose="00000900000000000000" pitchFamily="2" charset="0"/>
+                <a:latin typeface="Abadi" panose="020B0604020104020204" pitchFamily="34" charset="0"/>
                 <a:cs typeface="Poppins ExtraBold" panose="00000900000000000000" pitchFamily="2" charset="0"/>
               </a:endParaRPr>
             </a:p>
@@ -3922,7 +3917,7 @@
                 <a:solidFill>
                   <a:srgbClr val="3D05AD"/>
                 </a:solidFill>
-                <a:latin typeface="Poppins ExtraBold" panose="00000900000000000000" pitchFamily="2" charset="0"/>
+                <a:latin typeface="Abadi" panose="020B0604020104020204" pitchFamily="34" charset="0"/>
                 <a:cs typeface="Poppins ExtraBold" panose="00000900000000000000" pitchFamily="2" charset="0"/>
               </a:endParaRPr>
             </a:p>
@@ -3940,7 +3935,7 @@
                   <a:solidFill>
                     <a:srgbClr val="3D05AD"/>
                   </a:solidFill>
-                  <a:latin typeface="Poppins ExtraBold"/>
+                  <a:latin typeface="Abadi" panose="020B0604020104020204" pitchFamily="34" charset="0"/>
                   <a:cs typeface="Poppins ExtraBold"/>
                 </a:rPr>
                 <a:t>REFFAD Adam- </a:t>
@@ -3950,7 +3945,7 @@
                   <a:solidFill>
                     <a:srgbClr val="3D05AD"/>
                   </a:solidFill>
-                  <a:latin typeface="Poppins ExtraBold"/>
+                  <a:latin typeface="Abadi" panose="020B0604020104020204" pitchFamily="34" charset="0"/>
                   <a:cs typeface="Poppins ExtraBold"/>
                 </a:rPr>
                 <a:t>Bts</a:t>
@@ -3960,7 +3955,7 @@
                   <a:solidFill>
                     <a:srgbClr val="3D05AD"/>
                   </a:solidFill>
-                  <a:latin typeface="Poppins ExtraBold"/>
+                  <a:latin typeface="Abadi" panose="020B0604020104020204" pitchFamily="34" charset="0"/>
                   <a:cs typeface="Poppins ExtraBold"/>
                 </a:rPr>
                 <a:t> </a:t>
@@ -3970,7 +3965,7 @@
                   <a:solidFill>
                     <a:srgbClr val="3D05AD"/>
                   </a:solidFill>
-                  <a:latin typeface="Poppins ExtraBold"/>
+                  <a:latin typeface="Abadi" panose="020B0604020104020204" pitchFamily="34" charset="0"/>
                   <a:cs typeface="Poppins ExtraBold"/>
                 </a:rPr>
                 <a:t>Sio</a:t>
@@ -3980,7 +3975,7 @@
                   <a:solidFill>
                     <a:srgbClr val="3D05AD"/>
                   </a:solidFill>
-                  <a:latin typeface="Poppins ExtraBold"/>
+                  <a:latin typeface="Abadi" panose="020B0604020104020204" pitchFamily="34" charset="0"/>
                   <a:cs typeface="Poppins ExtraBold"/>
                 </a:rPr>
                 <a:t> option </a:t>
@@ -3990,7 +3985,7 @@
                   <a:solidFill>
                     <a:srgbClr val="3D05AD"/>
                   </a:solidFill>
-                  <a:latin typeface="Poppins ExtraBold"/>
+                  <a:latin typeface="Abadi" panose="020B0604020104020204" pitchFamily="34" charset="0"/>
                   <a:cs typeface="Poppins ExtraBold"/>
                 </a:rPr>
                 <a:t>Sisr</a:t>
@@ -4000,7 +3995,7 @@
                   <a:solidFill>
                     <a:srgbClr val="3D05AD"/>
                   </a:solidFill>
-                  <a:latin typeface="Poppins ExtraBold"/>
+                  <a:latin typeface="Abadi" panose="020B0604020104020204" pitchFamily="34" charset="0"/>
                   <a:cs typeface="Poppins ExtraBold"/>
                 </a:rPr>
                 <a:t> - Session 2027</a:t>
@@ -4069,19 +4064,19 @@
               </a:lnSpc>
             </a:pPr>
             <a:r>
-              <a:rPr lang="en-US" sz="9000">
+              <a:rPr lang="en-US" sz="9000" dirty="0">
                 <a:solidFill>
                   <a:srgbClr val="3D05AD"/>
                 </a:solidFill>
-                <a:latin typeface="+mj-lt"/>
+                <a:latin typeface="Abadi" panose="020B0604020104020204" pitchFamily="34" charset="0"/>
               </a:rPr>
-              <a:t>05. MISSIONS REALISEES FORMATION</a:t>
-            </a:r>
-            <a:endParaRPr lang="en-US" sz="9000">
+              <a:t>05. MISSIONS REALISÉES FORMATION</a:t>
+            </a:r>
+            <a:endParaRPr lang="en-US" sz="9000" dirty="0">
               <a:solidFill>
                 <a:srgbClr val="3D05AD"/>
               </a:solidFill>
-              <a:latin typeface="+mj-lt"/>
+              <a:latin typeface="Abadi" panose="020B0604020104020204" pitchFamily="34" charset="0"/>
               <a:cs typeface="Poppins Medium"/>
             </a:endParaRPr>
           </a:p>
@@ -4372,14 +4367,17 @@
             <a:p>
               <a:pPr algn="ctr"/>
               <a:r>
-                <a:rPr lang="fr-FR" sz="2800">
+                <a:rPr lang="fr-FR" sz="2800" dirty="0">
                   <a:solidFill>
                     <a:schemeClr val="bg1"/>
                   </a:solidFill>
+                  <a:latin typeface="Abadi" panose="020B0604020104020204" pitchFamily="34" charset="0"/>
                 </a:rPr>
                 <a:t>Installer une machine virtuelle Windows 10 à l'aide de VirtualBox.</a:t>
               </a:r>
-              <a:endParaRPr lang="en-US"/>
+              <a:endParaRPr lang="en-US" dirty="0">
+                <a:latin typeface="Abadi" panose="020B0604020104020204" pitchFamily="34" charset="0"/>
+              </a:endParaRPr>
             </a:p>
           </p:txBody>
         </p:sp>
@@ -4648,17 +4646,19 @@
             <a:p>
               <a:pPr algn="ctr"/>
               <a:r>
-                <a:rPr lang="fr-FR" sz="2800">
+                <a:rPr lang="fr-FR" sz="2800" dirty="0">
                   <a:solidFill>
                     <a:schemeClr val="bg1"/>
                   </a:solidFill>
+                  <a:latin typeface="Abadi" panose="020B0604020104020204" pitchFamily="34" charset="0"/>
                 </a:rPr>
                 <a:t>Remplacer une prise (connecteur) RJ45</a:t>
               </a:r>
-              <a:endParaRPr lang="en-US">
+              <a:endParaRPr lang="en-US" dirty="0">
                 <a:solidFill>
                   <a:schemeClr val="bg1"/>
                 </a:solidFill>
+                <a:latin typeface="Abadi" panose="020B0604020104020204" pitchFamily="34" charset="0"/>
               </a:endParaRPr>
             </a:p>
           </p:txBody>
@@ -4932,29 +4932,15 @@
                   <a:solidFill>
                     <a:schemeClr val="bg1"/>
                   </a:solidFill>
+                  <a:latin typeface="Abadi" panose="020B0604020104020204" pitchFamily="34" charset="0"/>
                 </a:rPr>
-                <a:t>Créer un agent de récupération EFS sur une machine </a:t>
-              </a:r>
-              <a:r>
-                <a:rPr lang="fr-FR" sz="2800">
-                  <a:solidFill>
-                    <a:schemeClr val="bg1"/>
-                  </a:solidFill>
-                </a:rPr>
-                <a:t>Windows</a:t>
-              </a:r>
-              <a:r>
-                <a:rPr lang="fr-FR" sz="2800" dirty="0">
-                  <a:solidFill>
-                    <a:schemeClr val="bg1"/>
-                  </a:solidFill>
-                </a:rPr>
-                <a:t> server 2022</a:t>
+                <a:t>Créer un agent de récupération EFS sur une machine Windows server 2022</a:t>
               </a:r>
               <a:endParaRPr lang="en-US" dirty="0">
                 <a:solidFill>
                   <a:schemeClr val="bg1"/>
                 </a:solidFill>
+                <a:latin typeface="Abadi" panose="020B0604020104020204" pitchFamily="34" charset="0"/>
               </a:endParaRPr>
             </a:p>
           </p:txBody>
@@ -5224,14 +5210,17 @@
             <a:p>
               <a:pPr algn="ctr"/>
               <a:r>
-                <a:rPr lang="fr-FR" sz="2800">
+                <a:rPr lang="fr-FR" sz="2800" dirty="0">
                   <a:solidFill>
                     <a:schemeClr val="bg1"/>
                   </a:solidFill>
+                  <a:latin typeface="Abadi" panose="020B0604020104020204" pitchFamily="34" charset="0"/>
                 </a:rPr>
                 <a:t>Installer et configurer un serveur web Debian 11</a:t>
               </a:r>
-              <a:endParaRPr lang="en-US"/>
+              <a:endParaRPr lang="en-US" dirty="0">
+                <a:latin typeface="Abadi" panose="020B0604020104020204" pitchFamily="34" charset="0"/>
+              </a:endParaRPr>
             </a:p>
           </p:txBody>
         </p:sp>
@@ -5521,14 +5510,17 @@
             <a:p>
               <a:pPr algn="ctr"/>
               <a:r>
-                <a:rPr lang="fr-FR" sz="2800">
+                <a:rPr lang="fr-FR" sz="2800" dirty="0">
                   <a:solidFill>
                     <a:schemeClr val="bg1"/>
                   </a:solidFill>
+                  <a:latin typeface="Abadi" panose="020B0604020104020204" pitchFamily="34" charset="0"/>
                 </a:rPr>
                 <a:t>Réparer un RAID5 défectueux sur Windows server 2022</a:t>
               </a:r>
-              <a:endParaRPr lang="en-US"/>
+              <a:endParaRPr lang="en-US" dirty="0">
+                <a:latin typeface="Abadi" panose="020B0604020104020204" pitchFamily="34" charset="0"/>
+              </a:endParaRPr>
             </a:p>
           </p:txBody>
         </p:sp>
@@ -5797,38 +5789,32 @@
             <a:p>
               <a:pPr algn="ctr"/>
               <a:r>
-                <a:rPr lang="fr-FR" sz="2800">
+                <a:rPr lang="fr-FR" sz="2800" dirty="0">
                   <a:solidFill>
                     <a:schemeClr val="bg1"/>
                   </a:solidFill>
-                  <a:latin typeface="+mn-lt"/>
+                  <a:latin typeface="Abadi" panose="020B0604020104020204" pitchFamily="34" charset="0"/>
                 </a:rPr>
                 <a:t>Mise en place de "</a:t>
               </a:r>
               <a:r>
-                <a:rPr lang="fr-FR" sz="2800" err="1">
+                <a:rPr lang="fr-FR" sz="2800" dirty="0" err="1">
                   <a:solidFill>
                     <a:schemeClr val="bg1"/>
                   </a:solidFill>
-                  <a:latin typeface="+mn-lt"/>
+                  <a:latin typeface="Abadi" panose="020B0604020104020204" pitchFamily="34" charset="0"/>
                 </a:rPr>
                 <a:t>OpenMediaVault</a:t>
               </a:r>
               <a:r>
-                <a:rPr lang="fr-FR" sz="2800">
+                <a:rPr lang="fr-FR" sz="2800" dirty="0">
                   <a:solidFill>
                     <a:schemeClr val="bg1"/>
                   </a:solidFill>
-                  <a:latin typeface="+mn-lt"/>
+                  <a:latin typeface="Abadi" panose="020B0604020104020204" pitchFamily="34" charset="0"/>
                 </a:rPr>
                 <a:t>" sur une machine Linux Debian 12</a:t>
               </a:r>
-              <a:endParaRPr lang="fr-FR" sz="2800" dirty="0">
-                <a:solidFill>
-                  <a:schemeClr val="bg1"/>
-                </a:solidFill>
-                <a:latin typeface="+mn-lt"/>
-              </a:endParaRPr>
             </a:p>
           </p:txBody>
         </p:sp>
@@ -6101,7 +6087,7 @@
                   <a:solidFill>
                     <a:schemeClr val="bg1"/>
                   </a:solidFill>
-                  <a:latin typeface="+mn-lt"/>
+                  <a:latin typeface="Abadi" panose="020B0604020104020204" pitchFamily="34" charset="0"/>
                 </a:rPr>
                 <a:t> </a:t>
               </a:r>
@@ -6377,7 +6363,7 @@
                   <a:solidFill>
                     <a:schemeClr val="bg1"/>
                   </a:solidFill>
-                  <a:latin typeface="+mn-lt"/>
+                  <a:latin typeface="Abadi" panose="020B0604020104020204" pitchFamily="34" charset="0"/>
                 </a:rPr>
                 <a:t> </a:t>
               </a:r>
@@ -6427,7 +6413,7 @@
         <p:spPr>
           <a:xfrm>
             <a:off x="76200" y="492373"/>
-            <a:ext cx="18211800" cy="1225079"/>
+            <a:ext cx="18211800" cy="1215717"/>
           </a:xfrm>
           <a:prstGeom prst="rect">
             <a:avLst/>
@@ -6445,13 +6431,31 @@
               </a:lnSpc>
             </a:pPr>
             <a:r>
-              <a:rPr lang="en-US" sz="7600">
+              <a:rPr lang="en-US" sz="7600" dirty="0">
                 <a:solidFill>
                   <a:srgbClr val="3D05AD"/>
                 </a:solidFill>
-                <a:latin typeface="+mj-lt"/>
+                <a:latin typeface="Abadi" panose="020B0604020104020204" pitchFamily="34" charset="0"/>
               </a:rPr>
-              <a:t>MISSIONS REALISEES EN ENTREPRISE</a:t>
+              <a:t>MISSIONS REALIS</a:t>
+            </a:r>
+            <a:r>
+              <a:rPr lang="en-US" sz="8000" dirty="0">
+                <a:solidFill>
+                  <a:srgbClr val="3D05AD"/>
+                </a:solidFill>
+                <a:latin typeface="Abadi" panose="020B0604020104020204" pitchFamily="34" charset="0"/>
+              </a:rPr>
+              <a:t>É</a:t>
+            </a:r>
+            <a:r>
+              <a:rPr lang="en-US" sz="7600" dirty="0">
+                <a:solidFill>
+                  <a:srgbClr val="3D05AD"/>
+                </a:solidFill>
+                <a:latin typeface="Abadi" panose="020B0604020104020204" pitchFamily="34" charset="0"/>
+              </a:rPr>
+              <a:t>ES EN ENTREPRISE</a:t>
             </a:r>
           </a:p>
         </p:txBody>
@@ -6741,14 +6745,17 @@
             <a:p>
               <a:pPr algn="ctr"/>
               <a:r>
-                <a:rPr lang="fr-FR" sz="2800">
+                <a:rPr lang="fr-FR" sz="2800" dirty="0">
                   <a:solidFill>
                     <a:schemeClr val="bg1"/>
                   </a:solidFill>
+                  <a:latin typeface="Abadi" panose="020B0604020104020204" pitchFamily="34" charset="0"/>
                 </a:rPr>
                 <a:t>Intégration de nouveaux hôtes dans la plateforme de supervision Centreon</a:t>
               </a:r>
-              <a:endParaRPr lang="en-US"/>
+              <a:endParaRPr lang="en-US" dirty="0">
+                <a:latin typeface="Abadi" panose="020B0604020104020204" pitchFamily="34" charset="0"/>
+              </a:endParaRPr>
             </a:p>
           </p:txBody>
         </p:sp>
@@ -7017,17 +7024,19 @@
             <a:p>
               <a:pPr algn="ctr"/>
               <a:r>
-                <a:rPr lang="fr-FR" sz="2800">
+                <a:rPr lang="fr-FR" sz="2800" dirty="0">
                   <a:solidFill>
                     <a:schemeClr val="bg1"/>
                   </a:solidFill>
+                  <a:latin typeface="Abadi" panose="020B0604020104020204" pitchFamily="34" charset="0"/>
                 </a:rPr>
                 <a:t>Configuration d’un service de supervision associé à un hôte dans Centreon</a:t>
               </a:r>
-              <a:endParaRPr lang="en-US">
+              <a:endParaRPr lang="en-US" dirty="0">
                 <a:solidFill>
                   <a:schemeClr val="bg1"/>
                 </a:solidFill>
+                <a:latin typeface="Abadi" panose="020B0604020104020204" pitchFamily="34" charset="0"/>
               </a:endParaRPr>
             </a:p>
           </p:txBody>
@@ -7301,6 +7310,7 @@
                   <a:solidFill>
                     <a:schemeClr val="bg1"/>
                   </a:solidFill>
+                  <a:latin typeface="Abadi" panose="020B0604020104020204" pitchFamily="34" charset="0"/>
                 </a:rPr>
                 <a:t>Création et exécution de scénarios </a:t>
               </a:r>
@@ -7309,6 +7319,7 @@
                   <a:solidFill>
                     <a:schemeClr val="bg1"/>
                   </a:solidFill>
+                  <a:latin typeface="Abadi" panose="020B0604020104020204" pitchFamily="34" charset="0"/>
                 </a:rPr>
                 <a:t>JMeter</a:t>
               </a:r>
@@ -7317,6 +7328,7 @@
                   <a:solidFill>
                     <a:schemeClr val="bg1"/>
                   </a:solidFill>
+                  <a:latin typeface="Abadi" panose="020B0604020104020204" pitchFamily="34" charset="0"/>
                 </a:rPr>
                 <a:t> pour la supervision d’URL simple ou complexe</a:t>
               </a:r>
@@ -7324,6 +7336,7 @@
                 <a:solidFill>
                   <a:schemeClr val="bg1"/>
                 </a:solidFill>
+                <a:latin typeface="Abadi" panose="020B0604020104020204" pitchFamily="34" charset="0"/>
               </a:endParaRPr>
             </a:p>
           </p:txBody>
@@ -7593,14 +7606,17 @@
             <a:p>
               <a:pPr algn="ctr"/>
               <a:r>
-                <a:rPr lang="fr-FR" sz="2800">
+                <a:rPr lang="fr-FR" sz="2800" dirty="0">
                   <a:solidFill>
                     <a:schemeClr val="bg1"/>
                   </a:solidFill>
+                  <a:latin typeface="Abadi" panose="020B0604020104020204" pitchFamily="34" charset="0"/>
                 </a:rPr>
                 <a:t>Mise en place d’une représentation graphique de l’infrastructure via Centreon MAP</a:t>
               </a:r>
-              <a:endParaRPr lang="en-US"/>
+              <a:endParaRPr lang="en-US" dirty="0">
+                <a:latin typeface="Abadi" panose="020B0604020104020204" pitchFamily="34" charset="0"/>
+              </a:endParaRPr>
             </a:p>
           </p:txBody>
         </p:sp>
@@ -7890,14 +7906,17 @@
             <a:p>
               <a:pPr algn="ctr"/>
               <a:r>
-                <a:rPr lang="fr-FR" sz="2800">
+                <a:rPr lang="fr-FR" sz="2800" dirty="0">
                   <a:solidFill>
                     <a:schemeClr val="bg1"/>
                   </a:solidFill>
+                  <a:latin typeface="Abadi" panose="020B0604020104020204" pitchFamily="34" charset="0"/>
                 </a:rPr>
                 <a:t>Mise en supervision de climatiseurs INROW sur Centreon</a:t>
               </a:r>
-              <a:endParaRPr lang="en-US"/>
+              <a:endParaRPr lang="en-US" dirty="0">
+                <a:latin typeface="Abadi" panose="020B0604020104020204" pitchFamily="34" charset="0"/>
+              </a:endParaRPr>
             </a:p>
           </p:txBody>
         </p:sp>
@@ -8166,14 +8185,17 @@
             <a:p>
               <a:pPr algn="ctr"/>
               <a:r>
-                <a:rPr lang="fr-FR" sz="2800">
+                <a:rPr lang="fr-FR" sz="2800" dirty="0">
                   <a:solidFill>
                     <a:schemeClr val="bg1"/>
                   </a:solidFill>
+                  <a:latin typeface="Abadi" panose="020B0604020104020204" pitchFamily="34" charset="0"/>
                 </a:rPr>
                 <a:t>Mis à jour de l’application Centreon elle même </a:t>
               </a:r>
-              <a:endParaRPr lang="en-US"/>
+              <a:endParaRPr lang="en-US" dirty="0">
+                <a:latin typeface="Abadi" panose="020B0604020104020204" pitchFamily="34" charset="0"/>
+              </a:endParaRPr>
             </a:p>
           </p:txBody>
         </p:sp>
@@ -8442,14 +8464,17 @@
             <a:p>
               <a:pPr algn="ctr"/>
               <a:r>
-                <a:rPr lang="fr-FR" sz="2800">
+                <a:rPr lang="fr-FR" sz="2800" dirty="0">
                   <a:solidFill>
                     <a:schemeClr val="bg1"/>
                   </a:solidFill>
+                  <a:latin typeface="Abadi" panose="020B0604020104020204" pitchFamily="34" charset="0"/>
                 </a:rPr>
                 <a:t>Importation en supervision dans Centreon d’une liste d’hôtes écrit sous format CSV (automatisé via un script BASH.) </a:t>
               </a:r>
-              <a:endParaRPr lang="en-US"/>
+              <a:endParaRPr lang="en-US" dirty="0">
+                <a:latin typeface="Abadi" panose="020B0604020104020204" pitchFamily="34" charset="0"/>
+              </a:endParaRPr>
             </a:p>
           </p:txBody>
         </p:sp>
@@ -8718,14 +8743,17 @@
             <a:p>
               <a:pPr algn="ctr"/>
               <a:r>
-                <a:rPr lang="fr-FR" sz="2800">
+                <a:rPr lang="fr-FR" sz="2800" dirty="0">
                   <a:solidFill>
                     <a:schemeClr val="bg1"/>
                   </a:solidFill>
+                  <a:latin typeface="Abadi" panose="020B0604020104020204" pitchFamily="34" charset="0"/>
                 </a:rPr>
                 <a:t>Mise en place et déploiement d’un poste de travail préconfiguré pour qu’il soit opérationnel.</a:t>
               </a:r>
-              <a:endParaRPr lang="en-US"/>
+              <a:endParaRPr lang="en-US" dirty="0">
+                <a:latin typeface="Abadi" panose="020B0604020104020204" pitchFamily="34" charset="0"/>
+              </a:endParaRPr>
             </a:p>
           </p:txBody>
         </p:sp>
@@ -8794,7 +8822,7 @@
                 <a:solidFill>
                   <a:srgbClr val="3D05AD"/>
                 </a:solidFill>
-                <a:latin typeface="+mj-lt"/>
+                <a:latin typeface="Abadi" panose="020B0604020104020204" pitchFamily="34" charset="0"/>
               </a:rPr>
               <a:t>06. VEILLE SUR LA SUPERVISION INFORMATIQUE </a:t>
             </a:r>
@@ -8835,8 +8863,166 @@
                 <a:solidFill>
                   <a:srgbClr val="3D05AD"/>
                 </a:solidFill>
+                <a:latin typeface="Abadi" panose="020B0604020104020204" pitchFamily="34" charset="0"/>
               </a:rPr>
               <a:t>La veille technologique consiste à s'informer de façon systématique sur les techniques et informations les plus récentes concernant un domaine</a:t>
+            </a:r>
+          </a:p>
+        </p:txBody>
+      </p:sp>
+      <p:sp>
+        <p:nvSpPr>
+          <p:cNvPr id="3" name="Rectangle 2">
+            <a:extLst>
+              <a:ext uri="{FF2B5EF4-FFF2-40B4-BE49-F238E27FC236}">
+                <a16:creationId xmlns:a16="http://schemas.microsoft.com/office/drawing/2014/main" id="{879D4E56-37F2-4D75-9A21-B5CBD4538330}"/>
+              </a:ext>
+            </a:extLst>
+          </p:cNvPr>
+          <p:cNvSpPr/>
+          <p:nvPr/>
+        </p:nvSpPr>
+        <p:spPr>
+          <a:xfrm>
+            <a:off x="1495963" y="2617037"/>
+            <a:ext cx="14554200" cy="1569660"/>
+          </a:xfrm>
+          <a:prstGeom prst="rect">
+            <a:avLst/>
+          </a:prstGeom>
+        </p:spPr>
+        <p:txBody>
+          <a:bodyPr wrap="square">
+            <a:spAutoFit/>
+          </a:bodyPr>
+          <a:lstStyle/>
+          <a:p>
+            <a:r>
+              <a:rPr lang="fr-FR" sz="3200" b="1" dirty="0">
+                <a:solidFill>
+                  <a:srgbClr val="4810B0"/>
+                </a:solidFill>
+                <a:latin typeface="Abadi" panose="020B0604020104020204" pitchFamily="34" charset="0"/>
+              </a:rPr>
+              <a:t>Définition : </a:t>
+            </a:r>
+            <a:r>
+              <a:rPr lang="fr-FR" sz="3200" dirty="0">
+                <a:solidFill>
+                  <a:srgbClr val="4810B0"/>
+                </a:solidFill>
+                <a:latin typeface="Abadi" panose="020B0604020104020204" pitchFamily="34" charset="0"/>
+              </a:rPr>
+              <a:t>Ensemble des outils et méthodes permettant de surveiller et afficher en temps réel l'état d'un système informatique (serveurs, réseau, applications...) afin de détecter les anomalies avant qu'elles n'impactent les utilisateurs</a:t>
+            </a:r>
+          </a:p>
+        </p:txBody>
+      </p:sp>
+      <p:sp>
+        <p:nvSpPr>
+          <p:cNvPr id="4" name="Rectangle 3">
+            <a:extLst>
+              <a:ext uri="{FF2B5EF4-FFF2-40B4-BE49-F238E27FC236}">
+                <a16:creationId xmlns:a16="http://schemas.microsoft.com/office/drawing/2014/main" id="{3BBDE259-384D-41D7-B8B8-7A5EAB481B98}"/>
+              </a:ext>
+            </a:extLst>
+          </p:cNvPr>
+          <p:cNvSpPr/>
+          <p:nvPr/>
+        </p:nvSpPr>
+        <p:spPr>
+          <a:xfrm>
+            <a:off x="1472772" y="4559636"/>
+            <a:ext cx="16502021" cy="1569660"/>
+          </a:xfrm>
+          <a:prstGeom prst="rect">
+            <a:avLst/>
+          </a:prstGeom>
+        </p:spPr>
+        <p:txBody>
+          <a:bodyPr wrap="square">
+            <a:spAutoFit/>
+          </a:bodyPr>
+          <a:lstStyle/>
+          <a:p>
+            <a:r>
+              <a:rPr lang="fr-FR" sz="3200" b="1" dirty="0">
+                <a:solidFill>
+                  <a:srgbClr val="4810B0"/>
+                </a:solidFill>
+                <a:latin typeface="Abadi" panose="020B0604020104020204" pitchFamily="34" charset="0"/>
+              </a:rPr>
+              <a:t>Rôle en entreprise : </a:t>
+            </a:r>
+            <a:r>
+              <a:rPr lang="fr-FR" sz="3200" dirty="0">
+                <a:solidFill>
+                  <a:srgbClr val="4810B0"/>
+                </a:solidFill>
+                <a:latin typeface="Abadi" panose="020B0604020104020204" pitchFamily="34" charset="0"/>
+              </a:rPr>
+              <a:t>Garantir la continuité de service, réduire les temps de panne, permettre une posture proactive plutôt que réactive et avoir une vue d'ensemble générale sur l'infrastructure.</a:t>
+            </a:r>
+          </a:p>
+        </p:txBody>
+      </p:sp>
+      <p:sp>
+        <p:nvSpPr>
+          <p:cNvPr id="5" name="Rectangle 4">
+            <a:extLst>
+              <a:ext uri="{FF2B5EF4-FFF2-40B4-BE49-F238E27FC236}">
+                <a16:creationId xmlns:a16="http://schemas.microsoft.com/office/drawing/2014/main" id="{795C60A6-C1C5-41C5-9FE1-B0177F85AAF4}"/>
+              </a:ext>
+            </a:extLst>
+          </p:cNvPr>
+          <p:cNvSpPr/>
+          <p:nvPr/>
+        </p:nvSpPr>
+        <p:spPr>
+          <a:xfrm>
+            <a:off x="1462833" y="6502235"/>
+            <a:ext cx="16154400" cy="1569660"/>
+          </a:xfrm>
+          <a:prstGeom prst="rect">
+            <a:avLst/>
+          </a:prstGeom>
+        </p:spPr>
+        <p:txBody>
+          <a:bodyPr wrap="square">
+            <a:spAutoFit/>
+          </a:bodyPr>
+          <a:lstStyle/>
+          <a:p>
+            <a:r>
+              <a:rPr lang="fr-FR" sz="3200" dirty="0">
+                <a:solidFill>
+                  <a:srgbClr val="4810B0"/>
+                </a:solidFill>
+                <a:latin typeface="Abadi" panose="020B0604020104020204" pitchFamily="34" charset="0"/>
+              </a:rPr>
+              <a:t>L’outil de veille est RSS 2 HTML qui centralise les flux de :</a:t>
+            </a:r>
+          </a:p>
+          <a:p>
+            <a:r>
+              <a:rPr lang="fr-FR" sz="3200" dirty="0">
+                <a:solidFill>
+                  <a:srgbClr val="4810B0"/>
+                </a:solidFill>
+                <a:latin typeface="Abadi" panose="020B0604020104020204" pitchFamily="34" charset="0"/>
+              </a:rPr>
+              <a:t>-centreon.com</a:t>
+            </a:r>
+          </a:p>
+          <a:p>
+            <a:r>
+              <a:rPr lang="fr-FR" sz="3200" dirty="0">
+                <a:solidFill>
+                  <a:srgbClr val="4810B0"/>
+                </a:solidFill>
+                <a:latin typeface="Abadi" panose="020B0604020104020204" pitchFamily="34" charset="0"/>
+              </a:rPr>
+              <a:t>-blog.zabbix.com</a:t>
             </a:r>
           </a:p>
         </p:txBody>
@@ -8850,203 +9036,6 @@
 </file>
 
 <file path=ppt/slides/slide13.xml><?xml version="1.0" encoding="utf-8"?>
-<p:sld xmlns:a="http://schemas.openxmlformats.org/drawingml/2006/main" xmlns:r="http://schemas.openxmlformats.org/officeDocument/2006/relationships" xmlns:p="http://schemas.openxmlformats.org/presentationml/2006/main">
-  <p:cSld>
-    <p:bg>
-      <p:bgPr>
-        <a:solidFill>
-          <a:srgbClr val="D9C0FF"/>
-        </a:solidFill>
-        <a:effectLst/>
-      </p:bgPr>
-    </p:bg>
-    <p:spTree>
-      <p:nvGrpSpPr>
-        <p:cNvPr id="1" name=""/>
-        <p:cNvGrpSpPr/>
-        <p:nvPr/>
-      </p:nvGrpSpPr>
-      <p:grpSpPr>
-        <a:xfrm>
-          <a:off x="0" y="0"/>
-          <a:ext cx="0" cy="0"/>
-          <a:chOff x="0" y="0"/>
-          <a:chExt cx="0" cy="0"/>
-        </a:xfrm>
-      </p:grpSpPr>
-      <p:sp>
-        <p:nvSpPr>
-          <p:cNvPr id="6" name="TextBox 6"/>
-          <p:cNvSpPr txBox="1"/>
-          <p:nvPr/>
-        </p:nvSpPr>
-        <p:spPr>
-          <a:xfrm>
-            <a:off x="1447800" y="190500"/>
-            <a:ext cx="14999327" cy="1131720"/>
-          </a:xfrm>
-          <a:prstGeom prst="rect">
-            <a:avLst/>
-          </a:prstGeom>
-        </p:spPr>
-        <p:txBody>
-          <a:bodyPr wrap="square" lIns="0" tIns="0" rIns="0" bIns="0" rtlCol="0" anchor="t">
-            <a:spAutoFit/>
-          </a:bodyPr>
-          <a:lstStyle/>
-          <a:p>
-            <a:pPr algn="ctr">
-              <a:lnSpc>
-                <a:spcPts val="9900"/>
-              </a:lnSpc>
-            </a:pPr>
-            <a:r>
-              <a:rPr lang="en-US" sz="5000" dirty="0">
-                <a:solidFill>
-                  <a:srgbClr val="3D05AD"/>
-                </a:solidFill>
-              </a:rPr>
-              <a:t>06. VEILLE SUR LA SUPERVISION INFORMATIQUE </a:t>
-            </a:r>
-          </a:p>
-        </p:txBody>
-      </p:sp>
-      <p:sp>
-        <p:nvSpPr>
-          <p:cNvPr id="3" name="ZoneTexte 2">
-            <a:extLst>
-              <a:ext uri="{FF2B5EF4-FFF2-40B4-BE49-F238E27FC236}">
-                <a16:creationId xmlns:a16="http://schemas.microsoft.com/office/drawing/2014/main" id="{6E3F001A-4D57-76F9-D97A-7DAED6B8A058}"/>
-              </a:ext>
-            </a:extLst>
-          </p:cNvPr>
-          <p:cNvSpPr txBox="1"/>
-          <p:nvPr/>
-        </p:nvSpPr>
-        <p:spPr>
-          <a:xfrm>
-            <a:off x="3962400" y="2095500"/>
-            <a:ext cx="9144000" cy="3005951"/>
-          </a:xfrm>
-          <a:prstGeom prst="rect">
-            <a:avLst/>
-          </a:prstGeom>
-          <a:noFill/>
-        </p:spPr>
-        <p:txBody>
-          <a:bodyPr wrap="square">
-            <a:spAutoFit/>
-          </a:bodyPr>
-          <a:lstStyle/>
-          <a:p>
-            <a:pPr algn="l" rtl="0" latinLnBrk="0">
-              <a:lnSpc>
-                <a:spcPts val="3600"/>
-              </a:lnSpc>
-              <a:buNone/>
-            </a:pPr>
-            <a:r>
-              <a:rPr lang="fr-FR" sz="2500" b="1" i="0" cap="all" dirty="0">
-                <a:effectLst/>
-                <a:latin typeface="YAFdJsjyMsM_0"/>
-              </a:rPr>
-              <a:t>Outils de veille </a:t>
-            </a:r>
-            <a:endParaRPr lang="fr-FR" sz="2500" b="0" i="0" cap="all" dirty="0">
-              <a:effectLst/>
-              <a:latin typeface="YAFdJsjyMsM_0"/>
-            </a:endParaRPr>
-          </a:p>
-          <a:p>
-            <a:pPr algn="l" rtl="0" latinLnBrk="0">
-              <a:lnSpc>
-                <a:spcPts val="3675"/>
-              </a:lnSpc>
-              <a:buFont typeface="Arial" panose="020B0604020202020204" pitchFamily="34" charset="0"/>
-              <a:buChar char="•"/>
-            </a:pPr>
-            <a:r>
-              <a:rPr lang="fr-FR" sz="2500" b="0" i="0" dirty="0">
-                <a:effectLst/>
-                <a:latin typeface="YAFdJsjyMsM_0"/>
-              </a:rPr>
-              <a:t>Google </a:t>
-            </a:r>
-          </a:p>
-          <a:p>
-            <a:pPr algn="l" rtl="0" latinLnBrk="0">
-              <a:lnSpc>
-                <a:spcPts val="3675"/>
-              </a:lnSpc>
-              <a:buFont typeface="Arial" panose="020B0604020202020204" pitchFamily="34" charset="0"/>
-              <a:buChar char="•"/>
-            </a:pPr>
-            <a:r>
-              <a:rPr lang="fr-FR" sz="2500" b="0" i="0" dirty="0">
-                <a:effectLst/>
-                <a:latin typeface="YAFdJsjyMsM_0"/>
-              </a:rPr>
-              <a:t>X</a:t>
-            </a:r>
-          </a:p>
-          <a:p>
-            <a:pPr>
-              <a:lnSpc>
-                <a:spcPts val="3675"/>
-              </a:lnSpc>
-              <a:buFont typeface="Arial" panose="020B0604020202020204" pitchFamily="34" charset="0"/>
-              <a:buChar char="•"/>
-            </a:pPr>
-            <a:r>
-              <a:rPr lang="fr-FR" sz="2500" dirty="0"/>
-              <a:t>cnil.fr</a:t>
-            </a:r>
-          </a:p>
-          <a:p>
-            <a:pPr>
-              <a:lnSpc>
-                <a:spcPts val="3675"/>
-              </a:lnSpc>
-              <a:buFont typeface="Arial" panose="020B0604020202020204" pitchFamily="34" charset="0"/>
-              <a:buChar char="•"/>
-            </a:pPr>
-            <a:r>
-              <a:rPr lang="fr-FR" sz="2500" b="0" i="0" dirty="0" err="1">
-                <a:effectLst/>
-                <a:latin typeface="YAFdJsjyMsM_0"/>
-              </a:rPr>
-              <a:t>Feedly</a:t>
-            </a:r>
-            <a:endParaRPr lang="fr-FR" sz="2500" b="0" i="0" dirty="0">
-              <a:effectLst/>
-              <a:latin typeface="YAFdJsjyMsM_0"/>
-            </a:endParaRPr>
-          </a:p>
-          <a:p>
-            <a:pPr>
-              <a:buNone/>
-            </a:pPr>
-            <a:br>
-              <a:rPr lang="fr-FR" dirty="0"/>
-            </a:br>
-            <a:endParaRPr lang="fr-FR" dirty="0"/>
-          </a:p>
-        </p:txBody>
-      </p:sp>
-    </p:spTree>
-    <p:extLst>
-      <p:ext uri="{BB962C8B-B14F-4D97-AF65-F5344CB8AC3E}">
-        <p14:creationId xmlns:p14="http://schemas.microsoft.com/office/powerpoint/2010/main" val="46854592"/>
-      </p:ext>
-    </p:extLst>
-  </p:cSld>
-  <p:clrMapOvr>
-    <a:masterClrMapping/>
-  </p:clrMapOvr>
-</p:sld>
-</file>
-
-<file path=ppt/slides/slide14.xml><?xml version="1.0" encoding="utf-8"?>
 <p:sld xmlns:a="http://schemas.openxmlformats.org/drawingml/2006/main" xmlns:r="http://schemas.openxmlformats.org/officeDocument/2006/relationships" xmlns:p="http://schemas.openxmlformats.org/presentationml/2006/main">
   <p:cSld>
     <p:bg>
@@ -9098,11 +9087,11 @@
               </a:lnSpc>
             </a:pPr>
             <a:r>
-              <a:rPr lang="en-US" sz="9000">
+              <a:rPr lang="en-US" sz="9000" dirty="0">
                 <a:solidFill>
                   <a:srgbClr val="3D05AD"/>
                 </a:solidFill>
-                <a:latin typeface="+mj-lt"/>
+                <a:latin typeface="Abadi" panose="020B0604020104020204" pitchFamily="34" charset="0"/>
               </a:rPr>
               <a:t>07. PORTFOLIO</a:t>
             </a:r>
@@ -9140,6 +9129,7 @@
                 <a:solidFill>
                   <a:srgbClr val="3D05AD"/>
                 </a:solidFill>
+                <a:latin typeface="Abadi" panose="020B0604020104020204" pitchFamily="34" charset="0"/>
                 <a:ea typeface="+mn-lt"/>
                 <a:cs typeface="+mn-lt"/>
                 <a:hlinkClick r:id="rId2"/>
@@ -9151,6 +9141,7 @@
                 <a:solidFill>
                   <a:srgbClr val="3D05AD"/>
                 </a:solidFill>
+                <a:latin typeface="Abadi" panose="020B0604020104020204" pitchFamily="34" charset="0"/>
                 <a:ea typeface="+mn-lt"/>
                 <a:cs typeface="+mn-lt"/>
                 <a:hlinkClick r:id="rId2">
@@ -9163,7 +9154,8 @@
               </a:rPr>
               <a:t>://adamopendel.github.io/portfolio/</a:t>
             </a:r>
-            <a:endParaRPr lang="en-US" sz="4100">
+            <a:endParaRPr lang="en-US" sz="4100" dirty="0">
+              <a:latin typeface="Abadi" panose="020B0604020104020204" pitchFamily="34" charset="0"/>
               <a:hlinkClick r:id="rId2">
                 <a:extLst>
                   <a:ext uri="{A12FA001-AC4F-418D-AE19-62706E023703}">
@@ -9183,7 +9175,7 @@
 </p:sld>
 </file>
 
-<file path=ppt/slides/slide15.xml><?xml version="1.0" encoding="utf-8"?>
+<file path=ppt/slides/slide14.xml><?xml version="1.0" encoding="utf-8"?>
 <p:sld xmlns:a="http://schemas.openxmlformats.org/drawingml/2006/main" xmlns:r="http://schemas.openxmlformats.org/officeDocument/2006/relationships" xmlns:p="http://schemas.openxmlformats.org/presentationml/2006/main">
   <p:cSld>
     <p:bg>
@@ -9217,13 +9209,13 @@
           <p:nvPr/>
         </p:nvPicPr>
         <p:blipFill>
-          <a:blip>
+          <a:blip r:embed="rId2">
             <a:extLst>
               <a:ext uri="{28A0092B-C50C-407E-A947-70E740481C1C}">
                 <a14:useLocalDpi xmlns:a14="http://schemas.microsoft.com/office/drawing/2010/main" val="0"/>
               </a:ext>
               <a:ext uri="{96DAC541-7B7A-43D3-8B79-37D633B846F1}">
-                <asvg:svgBlip xmlns:asvg="http://schemas.microsoft.com/office/drawing/2016/SVG/main" r:embed="rId2"/>
+                <asvg:svgBlip xmlns:asvg="http://schemas.microsoft.com/office/drawing/2016/SVG/main" r:embed="rId3"/>
               </a:ext>
             </a:extLst>
           </a:blip>
@@ -9269,11 +9261,11 @@
               </a:lnSpc>
             </a:pPr>
             <a:r>
-              <a:rPr lang="en-US" sz="9000">
+              <a:rPr lang="en-US" sz="9000" dirty="0">
                 <a:solidFill>
                   <a:srgbClr val="3D05AD"/>
                 </a:solidFill>
-                <a:latin typeface="+mj-lt"/>
+                <a:latin typeface="Abadi" panose="020B0604020104020204" pitchFamily="34" charset="0"/>
               </a:rPr>
               <a:t>08. CONCLUSION</a:t>
             </a:r>
@@ -9289,7 +9281,7 @@
         <p:spPr>
           <a:xfrm>
             <a:off x="425400" y="2563722"/>
-            <a:ext cx="17437200" cy="5699509"/>
+            <a:ext cx="17437200" cy="4981364"/>
           </a:xfrm>
           <a:prstGeom prst="rect">
             <a:avLst/>
@@ -9310,6 +9302,7 @@
               <a:solidFill>
                 <a:srgbClr val="000000"/>
               </a:solidFill>
+              <a:latin typeface="Abadi" panose="020B0604020104020204" pitchFamily="34" charset="0"/>
             </a:endParaRPr>
           </a:p>
           <a:p>
@@ -9323,6 +9316,7 @@
                 <a:solidFill>
                   <a:srgbClr val="000000"/>
                 </a:solidFill>
+                <a:latin typeface="Abadi" panose="020B0604020104020204" pitchFamily="34" charset="0"/>
                 <a:cs typeface="Poppins"/>
               </a:rPr>
               <a:t>Ça m'a permis :</a:t>
@@ -9331,6 +9325,7 @@
               <a:solidFill>
                 <a:srgbClr val="000000"/>
               </a:solidFill>
+              <a:latin typeface="Abadi" panose="020B0604020104020204" pitchFamily="34" charset="0"/>
             </a:endParaRPr>
           </a:p>
           <a:p>
@@ -9343,6 +9338,7 @@
               <a:solidFill>
                 <a:srgbClr val="000000"/>
               </a:solidFill>
+              <a:latin typeface="Abadi" panose="020B0604020104020204" pitchFamily="34" charset="0"/>
             </a:endParaRPr>
           </a:p>
           <a:p>
@@ -9356,6 +9352,7 @@
                 <a:solidFill>
                   <a:srgbClr val="000000"/>
                 </a:solidFill>
+                <a:latin typeface="Abadi" panose="020B0604020104020204" pitchFamily="34" charset="0"/>
               </a:rPr>
               <a:t>Acquisition de </a:t>
             </a:r>
@@ -9364,6 +9361,7 @@
                 <a:solidFill>
                   <a:srgbClr val="000000"/>
                 </a:solidFill>
+                <a:latin typeface="Abadi" panose="020B0604020104020204" pitchFamily="34" charset="0"/>
               </a:rPr>
               <a:t>nouvelles compétences </a:t>
             </a:r>
@@ -9372,6 +9370,7 @@
                 <a:solidFill>
                   <a:srgbClr val="000000"/>
                 </a:solidFill>
+                <a:latin typeface="Abadi" panose="020B0604020104020204" pitchFamily="34" charset="0"/>
               </a:rPr>
               <a:t>et d'un </a:t>
             </a:r>
@@ -9380,10 +9379,13 @@
                 <a:solidFill>
                   <a:srgbClr val="000000"/>
                 </a:solidFill>
+                <a:latin typeface="Abadi" panose="020B0604020104020204" pitchFamily="34" charset="0"/>
               </a:rPr>
               <a:t>savoir-faire professionnel</a:t>
             </a:r>
-            <a:endParaRPr lang="fr-FR" dirty="0"/>
+            <a:endParaRPr lang="fr-FR" dirty="0">
+              <a:latin typeface="Abadi" panose="020B0604020104020204" pitchFamily="34" charset="0"/>
+            </a:endParaRPr>
           </a:p>
           <a:p>
             <a:pPr algn="ctr">
@@ -9396,6 +9398,7 @@
                 <a:solidFill>
                   <a:srgbClr val="000000"/>
                 </a:solidFill>
+                <a:latin typeface="Abadi" panose="020B0604020104020204" pitchFamily="34" charset="0"/>
               </a:rPr>
               <a:t>Développement de mon </a:t>
             </a:r>
@@ -9404,6 +9407,7 @@
                 <a:solidFill>
                   <a:srgbClr val="000000"/>
                 </a:solidFill>
+                <a:latin typeface="Abadi" panose="020B0604020104020204" pitchFamily="34" charset="0"/>
               </a:rPr>
               <a:t>autonomie</a:t>
             </a:r>
@@ -9412,6 +9416,7 @@
                 <a:solidFill>
                   <a:srgbClr val="000000"/>
                 </a:solidFill>
+                <a:latin typeface="Abadi" panose="020B0604020104020204" pitchFamily="34" charset="0"/>
               </a:rPr>
               <a:t>, </a:t>
             </a:r>
@@ -9420,6 +9425,7 @@
                 <a:solidFill>
                   <a:srgbClr val="000000"/>
                 </a:solidFill>
+                <a:latin typeface="Abadi" panose="020B0604020104020204" pitchFamily="34" charset="0"/>
               </a:rPr>
               <a:t>rigueur</a:t>
             </a:r>
@@ -9428,6 +9434,7 @@
                 <a:solidFill>
                   <a:srgbClr val="000000"/>
                 </a:solidFill>
+                <a:latin typeface="Abadi" panose="020B0604020104020204" pitchFamily="34" charset="0"/>
               </a:rPr>
               <a:t> dans mon travail</a:t>
             </a:r>
@@ -9443,6 +9450,7 @@
                 <a:solidFill>
                   <a:srgbClr val="000000"/>
                 </a:solidFill>
+                <a:latin typeface="Abadi" panose="020B0604020104020204" pitchFamily="34" charset="0"/>
               </a:rPr>
               <a:t>Amélioration de mes </a:t>
             </a:r>
@@ -9451,6 +9459,7 @@
                 <a:solidFill>
                   <a:srgbClr val="000000"/>
                 </a:solidFill>
+                <a:latin typeface="Abadi" panose="020B0604020104020204" pitchFamily="34" charset="0"/>
               </a:rPr>
               <a:t>qualités relationnelles </a:t>
             </a:r>
@@ -9459,6 +9468,7 @@
                 <a:solidFill>
                   <a:srgbClr val="000000"/>
                 </a:solidFill>
+                <a:latin typeface="Abadi" panose="020B0604020104020204" pitchFamily="34" charset="0"/>
               </a:rPr>
               <a:t>dans le monde professionnel</a:t>
             </a:r>
@@ -9474,6 +9484,7 @@
                 <a:solidFill>
                   <a:srgbClr val="000000"/>
                 </a:solidFill>
+                <a:latin typeface="Abadi" panose="020B0604020104020204" pitchFamily="34" charset="0"/>
               </a:rPr>
               <a:t>Découverte d'un domaine qui me </a:t>
             </a:r>
@@ -9482,6 +9493,7 @@
                 <a:solidFill>
                   <a:srgbClr val="000000"/>
                 </a:solidFill>
+                <a:latin typeface="Abadi" panose="020B0604020104020204" pitchFamily="34" charset="0"/>
               </a:rPr>
               <a:t>passionne</a:t>
             </a:r>
@@ -9490,6 +9502,7 @@
                 <a:solidFill>
                   <a:srgbClr val="000000"/>
                 </a:solidFill>
+                <a:latin typeface="Abadi" panose="020B0604020104020204" pitchFamily="34" charset="0"/>
               </a:rPr>
               <a:t> encore plus</a:t>
             </a:r>
@@ -9504,7 +9517,7 @@
 </p:sld>
 </file>
 
-<file path=ppt/slides/slide16.xml><?xml version="1.0" encoding="utf-8"?>
+<file path=ppt/slides/slide15.xml><?xml version="1.0" encoding="utf-8"?>
 <p:sld xmlns:a="http://schemas.openxmlformats.org/drawingml/2006/main" xmlns:r="http://schemas.openxmlformats.org/officeDocument/2006/relationships" xmlns:p="http://schemas.openxmlformats.org/presentationml/2006/main">
   <p:cSld>
     <p:bg>
@@ -9556,11 +9569,11 @@
               </a:lnSpc>
             </a:pPr>
             <a:r>
-              <a:rPr lang="en-US" sz="9950">
+              <a:rPr lang="en-US" sz="9950" dirty="0">
                 <a:solidFill>
                   <a:srgbClr val="3D05AD"/>
                 </a:solidFill>
-                <a:latin typeface="+mj-lt"/>
+                <a:latin typeface="Abadi" panose="020B0604020104020204" pitchFamily="34" charset="0"/>
               </a:rPr>
               <a:t>MERCI DE VOTRE ATTENTION !</a:t>
             </a:r>
@@ -9568,7 +9581,7 @@
               <a:solidFill>
                 <a:srgbClr val="3D05AD"/>
               </a:solidFill>
-              <a:latin typeface="+mj-lt"/>
+              <a:latin typeface="Abadi" panose="020B0604020104020204" pitchFamily="34" charset="0"/>
             </a:endParaRPr>
           </a:p>
         </p:txBody>
@@ -9640,7 +9653,7 @@
                 <a:solidFill>
                   <a:srgbClr val="4407BF"/>
                 </a:solidFill>
-                <a:latin typeface="+mj-lt"/>
+                <a:latin typeface="Abadi" panose="020B0604020104020204" pitchFamily="34" charset="0"/>
                 <a:cs typeface="Poppins" panose="00000500000000000000" pitchFamily="2" charset="0"/>
               </a:rPr>
               <a:t>PLAN</a:t>
@@ -9989,7 +10002,9 @@
                 </a:spcAft>
                 <a:buNone/>
               </a:pPr>
-              <a:endParaRPr dirty="0"/>
+              <a:endParaRPr dirty="0">
+                <a:latin typeface="Abadi" panose="020B0604020104020204" pitchFamily="34" charset="0"/>
+              </a:endParaRPr>
             </a:p>
           </p:txBody>
         </p:sp>
@@ -10337,7 +10352,9 @@
                 </a:spcAft>
                 <a:buNone/>
               </a:pPr>
-              <a:endParaRPr dirty="0"/>
+              <a:endParaRPr dirty="0">
+                <a:latin typeface="Abadi" panose="020B0604020104020204" pitchFamily="34" charset="0"/>
+              </a:endParaRPr>
             </a:p>
           </p:txBody>
         </p:sp>
@@ -10685,7 +10702,9 @@
                 </a:spcAft>
                 <a:buNone/>
               </a:pPr>
-              <a:endParaRPr dirty="0"/>
+              <a:endParaRPr dirty="0">
+                <a:latin typeface="Abadi" panose="020B0604020104020204" pitchFamily="34" charset="0"/>
+              </a:endParaRPr>
             </a:p>
           </p:txBody>
         </p:sp>
@@ -11031,7 +11050,9 @@
                 </a:spcAft>
                 <a:buNone/>
               </a:pPr>
-              <a:endParaRPr dirty="0"/>
+              <a:endParaRPr dirty="0">
+                <a:latin typeface="Abadi" panose="020B0604020104020204" pitchFamily="34" charset="0"/>
+              </a:endParaRPr>
             </a:p>
           </p:txBody>
         </p:sp>
@@ -11379,7 +11400,9 @@
                 </a:spcAft>
                 <a:buNone/>
               </a:pPr>
-              <a:endParaRPr dirty="0"/>
+              <a:endParaRPr dirty="0">
+                <a:latin typeface="Abadi" panose="020B0604020104020204" pitchFamily="34" charset="0"/>
+              </a:endParaRPr>
             </a:p>
           </p:txBody>
         </p:sp>
@@ -11666,7 +11689,7 @@
             <a:pPr marL="0" indent="0"/>
             <a:r>
               <a:rPr lang="fr-FR" sz="2800" dirty="0">
-                <a:latin typeface="+mj-lt"/>
+                <a:latin typeface="Abadi" panose="020B0604020104020204" pitchFamily="34" charset="0"/>
               </a:rPr>
               <a:t>01. Présentation</a:t>
             </a:r>
@@ -11955,7 +11978,7 @@
             <a:pPr marL="0" indent="0"/>
             <a:r>
               <a:rPr lang="fr-FR" sz="2800" dirty="0">
-                <a:latin typeface="+mj-lt"/>
+                <a:latin typeface="Abadi" panose="020B0604020104020204" pitchFamily="34" charset="0"/>
               </a:rPr>
               <a:t>02. Cursus scolaire et professionnel</a:t>
             </a:r>
@@ -12244,7 +12267,7 @@
             <a:pPr marL="0" indent="0"/>
             <a:r>
               <a:rPr lang="fr-FR" sz="2800" dirty="0">
-                <a:latin typeface="+mj-lt"/>
+                <a:latin typeface="Abadi" panose="020B0604020104020204" pitchFamily="34" charset="0"/>
               </a:rPr>
               <a:t>03. Entreprise d’accueil</a:t>
             </a:r>
@@ -12614,7 +12637,9 @@
                   </a:spcAft>
                   <a:buNone/>
                 </a:pPr>
-                <a:endParaRPr dirty="0"/>
+                <a:endParaRPr dirty="0">
+                  <a:latin typeface="Abadi" panose="020B0604020104020204" pitchFamily="34" charset="0"/>
+                </a:endParaRPr>
               </a:p>
             </p:txBody>
           </p:sp>
@@ -12962,7 +12987,9 @@
                   </a:spcAft>
                   <a:buNone/>
                 </a:pPr>
-                <a:endParaRPr dirty="0"/>
+                <a:endParaRPr dirty="0">
+                  <a:latin typeface="Abadi" panose="020B0604020104020204" pitchFamily="34" charset="0"/>
+                </a:endParaRPr>
               </a:p>
             </p:txBody>
           </p:sp>
@@ -13308,7 +13335,9 @@
                   </a:spcAft>
                   <a:buNone/>
                 </a:pPr>
-                <a:endParaRPr dirty="0"/>
+                <a:endParaRPr dirty="0">
+                  <a:latin typeface="Abadi" panose="020B0604020104020204" pitchFamily="34" charset="0"/>
+                </a:endParaRPr>
               </a:p>
             </p:txBody>
           </p:sp>
@@ -13595,7 +13624,7 @@
               <a:pPr marL="0" indent="0"/>
               <a:r>
                 <a:rPr lang="fr-FR" sz="2800" dirty="0">
-                  <a:latin typeface="+mj-lt"/>
+                  <a:latin typeface="Abadi" panose="020B0604020104020204" pitchFamily="34" charset="0"/>
                 </a:rPr>
                 <a:t>04. Mon service</a:t>
               </a:r>
@@ -13884,7 +13913,7 @@
               <a:pPr marL="0" indent="0"/>
               <a:r>
                 <a:rPr lang="fr-FR" sz="2800" dirty="0">
-                  <a:latin typeface="+mj-lt"/>
+                  <a:latin typeface="Abadi" panose="020B0604020104020204" pitchFamily="34" charset="0"/>
                 </a:rPr>
                 <a:t>05. Missions réalisées en formation et en entreprise</a:t>
               </a:r>
@@ -14173,7 +14202,7 @@
               <a:pPr marL="0" indent="0"/>
               <a:r>
                 <a:rPr lang="fr-FR" sz="2800" dirty="0">
-                  <a:latin typeface="+mj-lt"/>
+                  <a:latin typeface="Abadi" panose="020B0604020104020204" pitchFamily="34" charset="0"/>
                 </a:rPr>
                 <a:t>06. Veille sur la supervision informatique</a:t>
               </a:r>
@@ -14462,8 +14491,8 @@
           <a:p>
             <a:pPr marL="0" indent="0"/>
             <a:r>
-              <a:rPr lang="fr-FR" sz="2800">
-                <a:latin typeface="+mj-lt"/>
+              <a:rPr lang="fr-FR" sz="2800" dirty="0">
+                <a:latin typeface="Abadi" panose="020B0604020104020204" pitchFamily="34" charset="0"/>
               </a:rPr>
               <a:t>07. Portfolio</a:t>
             </a:r>
@@ -14751,8 +14780,8 @@
           <a:p>
             <a:pPr marL="0" indent="0"/>
             <a:r>
-              <a:rPr lang="fr-FR" sz="2800">
-                <a:latin typeface="+mj-lt"/>
+              <a:rPr lang="fr-FR" sz="2800" dirty="0">
+                <a:latin typeface="Abadi" panose="020B0604020104020204" pitchFamily="34" charset="0"/>
               </a:rPr>
               <a:t>08. Conclusion</a:t>
             </a:r>
@@ -14833,11 +14862,11 @@
                 </a:lnSpc>
               </a:pPr>
               <a:r>
-                <a:rPr lang="en-US" sz="8950">
+                <a:rPr lang="en-US" sz="8950" dirty="0">
                   <a:solidFill>
                     <a:srgbClr val="3D05AD"/>
                   </a:solidFill>
-                  <a:latin typeface="+mj-lt"/>
+                  <a:latin typeface="Abadi" panose="020B0604020104020204" pitchFamily="34" charset="0"/>
                 </a:rPr>
                 <a:t>01. Adam REFFAD</a:t>
               </a:r>
@@ -14845,7 +14874,7 @@
                 <a:solidFill>
                   <a:srgbClr val="3D05AD"/>
                 </a:solidFill>
-                <a:latin typeface="+mj-lt"/>
+                <a:latin typeface="Abadi" panose="020B0604020104020204" pitchFamily="34" charset="0"/>
               </a:endParaRPr>
             </a:p>
           </p:txBody>
@@ -14881,6 +14910,7 @@
                   <a:solidFill>
                     <a:srgbClr val="3D05AD"/>
                   </a:solidFill>
+                  <a:latin typeface="Abadi" panose="020B0604020104020204" pitchFamily="34" charset="0"/>
                 </a:rPr>
                 <a:t>18 </a:t>
               </a:r>
@@ -14889,6 +14919,7 @@
                   <a:solidFill>
                     <a:srgbClr val="3D05AD"/>
                   </a:solidFill>
+                  <a:latin typeface="Abadi" panose="020B0604020104020204" pitchFamily="34" charset="0"/>
                 </a:rPr>
                 <a:t>ans</a:t>
               </a:r>
@@ -14896,6 +14927,7 @@
                 <a:solidFill>
                   <a:srgbClr val="3D05AD"/>
                 </a:solidFill>
+                <a:latin typeface="Abadi" panose="020B0604020104020204" pitchFamily="34" charset="0"/>
               </a:endParaRPr>
             </a:p>
             <a:p>
@@ -14909,6 +14941,7 @@
                   <a:solidFill>
                     <a:srgbClr val="3D05AD"/>
                   </a:solidFill>
+                  <a:latin typeface="Abadi" panose="020B0604020104020204" pitchFamily="34" charset="0"/>
                 </a:rPr>
                 <a:t>Groslay</a:t>
               </a:r>
@@ -14916,6 +14949,7 @@
                 <a:solidFill>
                   <a:srgbClr val="3D05AD"/>
                 </a:solidFill>
+                <a:latin typeface="Abadi" panose="020B0604020104020204" pitchFamily="34" charset="0"/>
               </a:endParaRPr>
             </a:p>
             <a:p>
@@ -14932,6 +14966,7 @@
                   <a:solidFill>
                     <a:srgbClr val="3D05AD"/>
                   </a:solidFill>
+                  <a:latin typeface="Abadi" panose="020B0604020104020204" pitchFamily="34" charset="0"/>
                 </a:rPr>
                 <a:t>Centres</a:t>
               </a:r>
@@ -14940,6 +14975,7 @@
                   <a:solidFill>
                     <a:srgbClr val="3D05AD"/>
                   </a:solidFill>
+                  <a:latin typeface="Abadi" panose="020B0604020104020204" pitchFamily="34" charset="0"/>
                 </a:rPr>
                 <a:t> </a:t>
               </a:r>
@@ -14948,6 +14984,7 @@
                   <a:solidFill>
                     <a:srgbClr val="3D05AD"/>
                   </a:solidFill>
+                  <a:latin typeface="Abadi" panose="020B0604020104020204" pitchFamily="34" charset="0"/>
                 </a:rPr>
                 <a:t>intérêt</a:t>
               </a:r>
@@ -14956,6 +14993,7 @@
                   <a:solidFill>
                     <a:srgbClr val="3D05AD"/>
                   </a:solidFill>
+                  <a:latin typeface="Abadi" panose="020B0604020104020204" pitchFamily="34" charset="0"/>
                 </a:rPr>
                 <a:t> : </a:t>
               </a:r>
@@ -14964,6 +15002,7 @@
                   <a:solidFill>
                     <a:srgbClr val="3D05AD"/>
                   </a:solidFill>
+                  <a:latin typeface="Abadi" panose="020B0604020104020204" pitchFamily="34" charset="0"/>
                 </a:rPr>
                 <a:t>Programmation</a:t>
               </a:r>
@@ -14972,6 +15011,7 @@
                   <a:solidFill>
                     <a:srgbClr val="3D05AD"/>
                   </a:solidFill>
+                  <a:latin typeface="Abadi" panose="020B0604020104020204" pitchFamily="34" charset="0"/>
                 </a:rPr>
                 <a:t>, Lecture, </a:t>
               </a:r>
@@ -14980,6 +15020,7 @@
                   <a:solidFill>
                     <a:srgbClr val="3D05AD"/>
                   </a:solidFill>
+                  <a:latin typeface="Abadi" panose="020B0604020104020204" pitchFamily="34" charset="0"/>
                 </a:rPr>
                 <a:t>Sport</a:t>
               </a:r>
@@ -14987,6 +15028,7 @@
                 <a:solidFill>
                   <a:srgbClr val="3D05AD"/>
                 </a:solidFill>
+                <a:latin typeface="Abadi" panose="020B0604020104020204" pitchFamily="34" charset="0"/>
                 <a:cs typeface="Poppins"/>
               </a:endParaRPr>
             </a:p>
@@ -15024,6 +15066,7 @@
                 <a:solidFill>
                   <a:srgbClr val="000000"/>
                 </a:solidFill>
+                <a:latin typeface="Abadi" panose="020B0604020104020204" pitchFamily="34" charset="0"/>
               </a:rPr>
               <a:t>Mon alternance</a:t>
             </a:r>
@@ -15061,6 +15104,7 @@
                 <a:solidFill>
                   <a:srgbClr val="000000"/>
                 </a:solidFill>
+                <a:latin typeface="Abadi" panose="020B0604020104020204" pitchFamily="34" charset="0"/>
               </a:rPr>
               <a:t>Mon école</a:t>
             </a:r>
@@ -15082,13 +15126,13 @@
           <p:nvPr/>
         </p:nvPicPr>
         <p:blipFill>
-          <a:blip>
+          <a:blip r:embed="rId2">
             <a:extLst>
               <a:ext uri="{28A0092B-C50C-407E-A947-70E740481C1C}">
                 <a14:useLocalDpi xmlns:a14="http://schemas.microsoft.com/office/drawing/2010/main" val="0"/>
               </a:ext>
               <a:ext uri="{96DAC541-7B7A-43D3-8B79-37D633B846F1}">
-                <asvg:svgBlip xmlns:asvg="http://schemas.microsoft.com/office/drawing/2016/SVG/main" r:embed="rId2"/>
+                <asvg:svgBlip xmlns:asvg="http://schemas.microsoft.com/office/drawing/2016/SVG/main" r:embed="rId3"/>
               </a:ext>
             </a:extLst>
           </a:blip>
@@ -15121,13 +15165,13 @@
           <p:nvPr/>
         </p:nvPicPr>
         <p:blipFill>
-          <a:blip>
+          <a:blip r:embed="rId2">
             <a:extLst>
               <a:ext uri="{28A0092B-C50C-407E-A947-70E740481C1C}">
                 <a14:useLocalDpi xmlns:a14="http://schemas.microsoft.com/office/drawing/2010/main" val="0"/>
               </a:ext>
               <a:ext uri="{96DAC541-7B7A-43D3-8B79-37D633B846F1}">
-                <asvg:svgBlip xmlns:asvg="http://schemas.microsoft.com/office/drawing/2016/SVG/main" r:embed="rId2"/>
+                <asvg:svgBlip xmlns:asvg="http://schemas.microsoft.com/office/drawing/2016/SVG/main" r:embed="rId3"/>
               </a:ext>
             </a:extLst>
           </a:blip>
@@ -15160,7 +15204,7 @@
           <p:nvPr/>
         </p:nvPicPr>
         <p:blipFill>
-          <a:blip r:embed="rId3"/>
+          <a:blip r:embed="rId4"/>
           <a:stretch>
             <a:fillRect/>
           </a:stretch>
@@ -15190,7 +15234,7 @@
           <p:nvPr/>
         </p:nvPicPr>
         <p:blipFill>
-          <a:blip r:embed="rId4"/>
+          <a:blip r:embed="rId5"/>
           <a:stretch>
             <a:fillRect/>
           </a:stretch>
@@ -15265,11 +15309,14 @@
               </a:lnSpc>
             </a:pPr>
             <a:r>
-              <a:rPr lang="en-US" sz="4150" dirty="0"/>
+              <a:rPr lang="en-US" sz="4150" dirty="0">
+                <a:latin typeface="Abadi" panose="020B0604020104020204" pitchFamily="34" charset="0"/>
+              </a:rPr>
               <a:t>2025-2027 - </a:t>
             </a:r>
             <a:r>
               <a:rPr lang="en-US" sz="4150" dirty="0">
+                <a:latin typeface="Abadi" panose="020B0604020104020204" pitchFamily="34" charset="0"/>
                 <a:ea typeface="+mn-lt"/>
                 <a:cs typeface="+mn-lt"/>
               </a:rPr>
@@ -15277,6 +15324,7 @@
             </a:r>
             <a:r>
               <a:rPr lang="en-US" sz="4150" dirty="0" err="1">
+                <a:latin typeface="Abadi" panose="020B0604020104020204" pitchFamily="34" charset="0"/>
                 <a:ea typeface="+mn-lt"/>
                 <a:cs typeface="+mn-lt"/>
               </a:rPr>
@@ -15284,6 +15332,7 @@
             </a:r>
             <a:r>
               <a:rPr lang="en-US" sz="4150" dirty="0">
+                <a:latin typeface="Abadi" panose="020B0604020104020204" pitchFamily="34" charset="0"/>
                 <a:ea typeface="+mn-lt"/>
                 <a:cs typeface="+mn-lt"/>
               </a:rPr>
@@ -15291,6 +15340,7 @@
             </a:r>
             <a:r>
               <a:rPr lang="en-US" sz="4150" dirty="0" err="1">
+                <a:latin typeface="Abadi" panose="020B0604020104020204" pitchFamily="34" charset="0"/>
                 <a:ea typeface="+mn-lt"/>
                 <a:cs typeface="+mn-lt"/>
               </a:rPr>
@@ -15298,12 +15348,14 @@
             </a:r>
             <a:r>
               <a:rPr lang="en-US" sz="4150" dirty="0">
+                <a:latin typeface="Abadi" panose="020B0604020104020204" pitchFamily="34" charset="0"/>
                 <a:ea typeface="+mn-lt"/>
                 <a:cs typeface="+mn-lt"/>
               </a:rPr>
               <a:t> SISR</a:t>
             </a:r>
             <a:endParaRPr lang="en-US" sz="4150" dirty="0" err="1">
+              <a:latin typeface="Abadi" panose="020B0604020104020204" pitchFamily="34" charset="0"/>
               <a:cs typeface="Poppins"/>
             </a:endParaRPr>
           </a:p>
@@ -15313,7 +15365,9 @@
                 <a:spcPts val="1786"/>
               </a:lnSpc>
             </a:pPr>
-            <a:endParaRPr lang="en-US" sz="4176" dirty="0"/>
+            <a:endParaRPr lang="en-US" sz="4176" dirty="0">
+              <a:latin typeface="Abadi" panose="020B0604020104020204" pitchFamily="34" charset="0"/>
+            </a:endParaRPr>
           </a:p>
           <a:p>
             <a:pPr marL="1425575" lvl="1" indent="-571500">
@@ -15324,14 +15378,19 @@
               <a:buChar char="•"/>
             </a:pPr>
             <a:r>
-              <a:rPr lang="en-US" sz="3650" dirty="0" err="1"/>
+              <a:rPr lang="en-US" sz="3650" dirty="0" err="1">
+                <a:latin typeface="Abadi" panose="020B0604020104020204" pitchFamily="34" charset="0"/>
+              </a:rPr>
               <a:t>Administrateur</a:t>
             </a:r>
             <a:r>
-              <a:rPr lang="en-US" sz="3650" dirty="0"/>
+              <a:rPr lang="en-US" sz="3650" dirty="0">
+                <a:latin typeface="Abadi" panose="020B0604020104020204" pitchFamily="34" charset="0"/>
+              </a:rPr>
               <a:t> Supervision</a:t>
             </a:r>
             <a:endParaRPr lang="en-US" sz="5400" dirty="0">
+              <a:latin typeface="Abadi" panose="020B0604020104020204" pitchFamily="34" charset="0"/>
               <a:cs typeface="Poppins"/>
             </a:endParaRPr>
           </a:p>
@@ -15346,13 +15405,13 @@
           <p:nvPr/>
         </p:nvPicPr>
         <p:blipFill>
-          <a:blip>
+          <a:blip r:embed="rId2">
             <a:extLst>
               <a:ext uri="{28A0092B-C50C-407E-A947-70E740481C1C}">
                 <a14:useLocalDpi xmlns:a14="http://schemas.microsoft.com/office/drawing/2010/main" val="0"/>
               </a:ext>
               <a:ext uri="{96DAC541-7B7A-43D3-8B79-37D633B846F1}">
-                <asvg:svgBlip xmlns:asvg="http://schemas.microsoft.com/office/drawing/2016/SVG/main" r:embed="rId2"/>
+                <asvg:svgBlip xmlns:asvg="http://schemas.microsoft.com/office/drawing/2016/SVG/main" r:embed="rId3"/>
               </a:ext>
             </a:extLst>
           </a:blip>
@@ -15398,11 +15457,14 @@
               </a:lnSpc>
             </a:pPr>
             <a:r>
-              <a:rPr lang="en-US" sz="4150" dirty="0"/>
+              <a:rPr lang="en-US" sz="4150" dirty="0">
+                <a:latin typeface="Abadi" panose="020B0604020104020204" pitchFamily="34" charset="0"/>
+              </a:rPr>
               <a:t>2023-2025 - BAC </a:t>
             </a:r>
             <a:r>
               <a:rPr lang="en-US" sz="4150" dirty="0" err="1">
+                <a:latin typeface="Abadi" panose="020B0604020104020204" pitchFamily="34" charset="0"/>
                 <a:ea typeface="+mn-lt"/>
                 <a:cs typeface="+mn-lt"/>
               </a:rPr>
@@ -15410,6 +15472,7 @@
             </a:r>
             <a:r>
               <a:rPr lang="en-US" sz="4150" dirty="0">
+                <a:latin typeface="Abadi" panose="020B0604020104020204" pitchFamily="34" charset="0"/>
                 <a:ea typeface="+mn-lt"/>
                 <a:cs typeface="+mn-lt"/>
               </a:rPr>
@@ -15417,6 +15480,7 @@
             </a:r>
             <a:r>
               <a:rPr lang="en-US" sz="4150" dirty="0" err="1">
+                <a:latin typeface="Abadi" panose="020B0604020104020204" pitchFamily="34" charset="0"/>
                 <a:ea typeface="+mn-lt"/>
                 <a:cs typeface="+mn-lt"/>
               </a:rPr>
@@ -15424,12 +15488,15 @@
             </a:r>
             <a:r>
               <a:rPr lang="en-US" sz="4150" dirty="0">
+                <a:latin typeface="Abadi" panose="020B0604020104020204" pitchFamily="34" charset="0"/>
                 <a:ea typeface="+mn-lt"/>
                 <a:cs typeface="+mn-lt"/>
               </a:rPr>
               <a:t> et NSI</a:t>
             </a:r>
-            <a:endParaRPr lang="en-US" sz="4150" dirty="0"/>
+            <a:endParaRPr lang="en-US" sz="4150" dirty="0">
+              <a:latin typeface="Abadi" panose="020B0604020104020204" pitchFamily="34" charset="0"/>
+            </a:endParaRPr>
           </a:p>
           <a:p>
             <a:pPr algn="l">
@@ -15437,7 +15504,9 @@
                 <a:spcPts val="2346"/>
               </a:lnSpc>
             </a:pPr>
-            <a:endParaRPr lang="en-US" sz="4180" dirty="0"/>
+            <a:endParaRPr lang="en-US" sz="4180" dirty="0">
+              <a:latin typeface="Abadi" panose="020B0604020104020204" pitchFamily="34" charset="0"/>
+            </a:endParaRPr>
           </a:p>
         </p:txBody>
       </p:sp>
@@ -15475,7 +15544,7 @@
                 <a:solidFill>
                   <a:srgbClr val="4407BF"/>
                 </a:solidFill>
-                <a:latin typeface="+mj-lt"/>
+                <a:latin typeface="Abadi" panose="020B0604020104020204" pitchFamily="34" charset="0"/>
               </a:rPr>
               <a:t>02. </a:t>
             </a:r>
@@ -15484,7 +15553,7 @@
                 <a:solidFill>
                   <a:srgbClr val="4407BF"/>
                 </a:solidFill>
-                <a:latin typeface="+mj-lt"/>
+                <a:latin typeface="Abadi" panose="020B0604020104020204" pitchFamily="34" charset="0"/>
               </a:rPr>
               <a:t>Parcours</a:t>
             </a:r>
@@ -15493,7 +15562,7 @@
                 <a:solidFill>
                   <a:srgbClr val="4407BF"/>
                 </a:solidFill>
-                <a:latin typeface="+mj-lt"/>
+                <a:latin typeface="Abadi" panose="020B0604020104020204" pitchFamily="34" charset="0"/>
               </a:rPr>
               <a:t> </a:t>
             </a:r>
@@ -15502,7 +15571,7 @@
                 <a:solidFill>
                   <a:srgbClr val="4407BF"/>
                 </a:solidFill>
-                <a:latin typeface="+mj-lt"/>
+                <a:latin typeface="Abadi" panose="020B0604020104020204" pitchFamily="34" charset="0"/>
               </a:rPr>
               <a:t>scolaire</a:t>
             </a:r>
@@ -15510,7 +15579,7 @@
               <a:solidFill>
                 <a:srgbClr val="4407BF"/>
               </a:solidFill>
-              <a:latin typeface="+mj-lt"/>
+              <a:latin typeface="Abadi" panose="020B0604020104020204" pitchFamily="34" charset="0"/>
             </a:endParaRPr>
           </a:p>
         </p:txBody>
@@ -15548,16 +15617,19 @@
               </a:lnSpc>
             </a:pPr>
             <a:r>
-              <a:rPr lang="en-US" sz="5400">
-                <a:solidFill>
-                  <a:srgbClr val="000000"/>
-                </a:solidFill>
+              <a:rPr lang="en-US" sz="5400" dirty="0">
+                <a:solidFill>
+                  <a:srgbClr val="000000"/>
+                </a:solidFill>
+                <a:latin typeface="Abadi" panose="020B0604020104020204" pitchFamily="34" charset="0"/>
                 <a:ea typeface="+mn-lt"/>
                 <a:cs typeface="+mn-lt"/>
               </a:rPr>
               <a:t>Lycée Jean Jacques Rousseau</a:t>
             </a:r>
-            <a:endParaRPr lang="en-US"/>
+            <a:endParaRPr lang="en-US" dirty="0">
+              <a:latin typeface="Abadi" panose="020B0604020104020204" pitchFamily="34" charset="0"/>
+            </a:endParaRPr>
           </a:p>
         </p:txBody>
       </p:sp>
@@ -15594,21 +15666,25 @@
           <a:p>
             <a:r>
               <a:rPr lang="en-US" sz="5400" dirty="0">
-                <a:latin typeface="Poppins"/>
+                <a:latin typeface="Abadi" panose="020B0604020104020204" pitchFamily="34" charset="0"/>
               </a:rPr>
               <a:t>CFA Campus </a:t>
             </a:r>
             <a:r>
               <a:rPr lang="en-US" sz="5400" dirty="0" err="1">
-                <a:latin typeface="Poppins"/>
+                <a:latin typeface="Abadi" panose="020B0604020104020204" pitchFamily="34" charset="0"/>
               </a:rPr>
               <a:t>Montsouris</a:t>
             </a:r>
-            <a:endParaRPr lang="en-US" dirty="0" err="1"/>
+            <a:endParaRPr lang="en-US" dirty="0" err="1">
+              <a:latin typeface="Abadi" panose="020B0604020104020204" pitchFamily="34" charset="0"/>
+            </a:endParaRPr>
           </a:p>
           <a:p>
             <a:pPr algn="ctr"/>
-            <a:endParaRPr lang="en-US"/>
+            <a:endParaRPr lang="en-US" dirty="0">
+              <a:latin typeface="Abadi" panose="020B0604020104020204" pitchFamily="34" charset="0"/>
+            </a:endParaRPr>
           </a:p>
         </p:txBody>
       </p:sp>
@@ -15654,13 +15730,13 @@
           <p:nvPr/>
         </p:nvPicPr>
         <p:blipFill>
-          <a:blip cstate="print">
+          <a:blip r:embed="rId2" cstate="print">
             <a:extLst>
               <a:ext uri="{28A0092B-C50C-407E-A947-70E740481C1C}">
                 <a14:useLocalDpi xmlns:a14="http://schemas.microsoft.com/office/drawing/2010/main" val="0"/>
               </a:ext>
               <a:ext uri="{96DAC541-7B7A-43D3-8B79-37D633B846F1}">
-                <asvg:svgBlip xmlns:asvg="http://schemas.microsoft.com/office/drawing/2016/SVG/main" r:embed="rId2"/>
+                <asvg:svgBlip xmlns:asvg="http://schemas.microsoft.com/office/drawing/2016/SVG/main" r:embed="rId3"/>
               </a:ext>
             </a:extLst>
           </a:blip>
@@ -15688,13 +15764,13 @@
           <p:nvPr/>
         </p:nvPicPr>
         <p:blipFill>
-          <a:blip cstate="print">
+          <a:blip r:embed="rId4" cstate="print">
             <a:extLst>
               <a:ext uri="{28A0092B-C50C-407E-A947-70E740481C1C}">
                 <a14:useLocalDpi xmlns:a14="http://schemas.microsoft.com/office/drawing/2010/main" val="0"/>
               </a:ext>
               <a:ext uri="{96DAC541-7B7A-43D3-8B79-37D633B846F1}">
-                <asvg:svgBlip xmlns:asvg="http://schemas.microsoft.com/office/drawing/2016/SVG/main" r:embed="rId3"/>
+                <asvg:svgBlip xmlns:asvg="http://schemas.microsoft.com/office/drawing/2016/SVG/main" r:embed="rId5"/>
               </a:ext>
             </a:extLst>
           </a:blip>
@@ -15744,7 +15820,7 @@
                 <a:solidFill>
                   <a:srgbClr val="3D05AD"/>
                 </a:solidFill>
-                <a:latin typeface="+mj-lt"/>
+                <a:latin typeface="Abadi" panose="020B0604020104020204" pitchFamily="34" charset="0"/>
               </a:rPr>
               <a:t>Parcours</a:t>
             </a:r>
@@ -15753,7 +15829,7 @@
                 <a:solidFill>
                   <a:srgbClr val="3D05AD"/>
                 </a:solidFill>
-                <a:latin typeface="+mj-lt"/>
+                <a:latin typeface="Abadi" panose="020B0604020104020204" pitchFamily="34" charset="0"/>
               </a:rPr>
               <a:t> </a:t>
             </a:r>
@@ -15762,7 +15838,7 @@
                 <a:solidFill>
                   <a:srgbClr val="3D05AD"/>
                 </a:solidFill>
-                <a:latin typeface="+mj-lt"/>
+                <a:latin typeface="Abadi" panose="020B0604020104020204" pitchFamily="34" charset="0"/>
               </a:rPr>
               <a:t>professionnel</a:t>
             </a:r>
@@ -15770,7 +15846,7 @@
               <a:solidFill>
                 <a:srgbClr val="3D05AD"/>
               </a:solidFill>
-              <a:latin typeface="+mj-lt"/>
+              <a:latin typeface="Abadi" panose="020B0604020104020204" pitchFamily="34" charset="0"/>
             </a:endParaRPr>
           </a:p>
         </p:txBody>
@@ -15806,6 +15882,7 @@
                 <a:solidFill>
                   <a:srgbClr val="000000"/>
                 </a:solidFill>
+                <a:latin typeface="Abadi" panose="020B0604020104020204" pitchFamily="34" charset="0"/>
               </a:rPr>
               <a:t>Admin supervision </a:t>
             </a:r>
@@ -15814,6 +15891,7 @@
                 <a:solidFill>
                   <a:srgbClr val="000000"/>
                 </a:solidFill>
+                <a:latin typeface="Abadi" panose="020B0604020104020204" pitchFamily="34" charset="0"/>
               </a:rPr>
               <a:t>informatique</a:t>
             </a:r>
@@ -15822,6 +15900,7 @@
                 <a:solidFill>
                   <a:srgbClr val="000000"/>
                 </a:solidFill>
+                <a:latin typeface="Abadi" panose="020B0604020104020204" pitchFamily="34" charset="0"/>
               </a:rPr>
               <a:t> : 2 </a:t>
             </a:r>
@@ -15830,6 +15909,7 @@
                 <a:solidFill>
                   <a:srgbClr val="000000"/>
                 </a:solidFill>
+                <a:latin typeface="Abadi" panose="020B0604020104020204" pitchFamily="34" charset="0"/>
               </a:rPr>
               <a:t>ans</a:t>
             </a:r>
@@ -15838,6 +15918,7 @@
                 <a:solidFill>
                   <a:srgbClr val="000000"/>
                 </a:solidFill>
+                <a:latin typeface="Abadi" panose="020B0604020104020204" pitchFamily="34" charset="0"/>
               </a:rPr>
               <a:t> alternance</a:t>
             </a:r>
@@ -15851,17 +15932,19 @@
               <a:buChar char="⚬"/>
             </a:pPr>
             <a:r>
-              <a:rPr lang="en-US" sz="3400">
-                <a:solidFill>
-                  <a:srgbClr val="000000"/>
-                </a:solidFill>
+              <a:rPr lang="en-US" sz="3400" dirty="0">
+                <a:solidFill>
+                  <a:srgbClr val="000000"/>
+                </a:solidFill>
+                <a:latin typeface="Abadi" panose="020B0604020104020204" pitchFamily="34" charset="0"/>
               </a:rPr>
               <a:t>Ville de Paris</a:t>
             </a:r>
-            <a:endParaRPr lang="en-US" sz="3400">
+            <a:endParaRPr lang="en-US" sz="3400" dirty="0">
               <a:solidFill>
                 <a:srgbClr val="000000"/>
               </a:solidFill>
+              <a:latin typeface="Abadi" panose="020B0604020104020204" pitchFamily="34" charset="0"/>
               <a:cs typeface="Poppins"/>
             </a:endParaRPr>
           </a:p>
@@ -15882,7 +15965,7 @@
         <p:spPr>
           <a:xfrm>
             <a:off x="4689663" y="1906682"/>
-            <a:ext cx="12823607" cy="4984954"/>
+            <a:ext cx="12823607" cy="4369401"/>
           </a:xfrm>
           <a:prstGeom prst="rect">
             <a:avLst/>
@@ -15905,6 +15988,7 @@
                 <a:solidFill>
                   <a:srgbClr val="000000"/>
                 </a:solidFill>
+                <a:latin typeface="Abadi" panose="020B0604020104020204" pitchFamily="34" charset="0"/>
                 <a:ea typeface="+mn-lt"/>
                 <a:cs typeface="+mn-lt"/>
               </a:rPr>
@@ -15915,6 +15999,7 @@
                 <a:solidFill>
                   <a:srgbClr val="000000"/>
                 </a:solidFill>
+                <a:latin typeface="Abadi" panose="020B0604020104020204" pitchFamily="34" charset="0"/>
                 <a:ea typeface="+mn-lt"/>
                 <a:cs typeface="+mn-lt"/>
               </a:rPr>
@@ -15925,6 +16010,7 @@
                 <a:solidFill>
                   <a:srgbClr val="000000"/>
                 </a:solidFill>
+                <a:latin typeface="Abadi" panose="020B0604020104020204" pitchFamily="34" charset="0"/>
                 <a:ea typeface="+mn-lt"/>
                 <a:cs typeface="+mn-lt"/>
               </a:rPr>
@@ -15935,6 +16021,7 @@
                 <a:solidFill>
                   <a:srgbClr val="000000"/>
                 </a:solidFill>
+                <a:latin typeface="Abadi" panose="020B0604020104020204" pitchFamily="34" charset="0"/>
                 <a:ea typeface="+mn-lt"/>
                 <a:cs typeface="+mn-lt"/>
               </a:rPr>
@@ -15945,6 +16032,7 @@
                 <a:solidFill>
                   <a:srgbClr val="000000"/>
                 </a:solidFill>
+                <a:latin typeface="Abadi" panose="020B0604020104020204" pitchFamily="34" charset="0"/>
                 <a:ea typeface="+mn-lt"/>
                 <a:cs typeface="+mn-lt"/>
               </a:rPr>
@@ -15955,6 +16043,7 @@
                 <a:solidFill>
                   <a:srgbClr val="000000"/>
                 </a:solidFill>
+                <a:latin typeface="Abadi" panose="020B0604020104020204" pitchFamily="34" charset="0"/>
                 <a:ea typeface="+mn-lt"/>
                 <a:cs typeface="+mn-lt"/>
               </a:rPr>
@@ -15965,6 +16054,7 @@
                 <a:solidFill>
                   <a:srgbClr val="000000"/>
                 </a:solidFill>
+                <a:latin typeface="Abadi" panose="020B0604020104020204" pitchFamily="34" charset="0"/>
                 <a:ea typeface="+mn-lt"/>
                 <a:cs typeface="+mn-lt"/>
               </a:rPr>
@@ -15975,6 +16065,7 @@
                 <a:solidFill>
                   <a:srgbClr val="000000"/>
                 </a:solidFill>
+                <a:latin typeface="Abadi" panose="020B0604020104020204" pitchFamily="34" charset="0"/>
                 <a:ea typeface="+mn-lt"/>
                 <a:cs typeface="+mn-lt"/>
               </a:rPr>
@@ -15985,12 +16076,15 @@
                 <a:solidFill>
                   <a:srgbClr val="000000"/>
                 </a:solidFill>
+                <a:latin typeface="Abadi" panose="020B0604020104020204" pitchFamily="34" charset="0"/>
                 <a:ea typeface="+mn-lt"/>
                 <a:cs typeface="+mn-lt"/>
               </a:rPr>
               <a:t>) : </a:t>
             </a:r>
-            <a:endParaRPr lang="en-US" dirty="0"/>
+            <a:endParaRPr lang="en-US" dirty="0">
+              <a:latin typeface="Abadi" panose="020B0604020104020204" pitchFamily="34" charset="0"/>
+            </a:endParaRPr>
           </a:p>
           <a:p>
             <a:pPr marL="1468120" lvl="2" indent="-488950">
@@ -16005,6 +16099,7 @@
                 <a:solidFill>
                   <a:srgbClr val="000000"/>
                 </a:solidFill>
+                <a:latin typeface="Abadi" panose="020B0604020104020204" pitchFamily="34" charset="0"/>
                 <a:ea typeface="+mn-lt"/>
                 <a:cs typeface="+mn-lt"/>
               </a:rPr>
@@ -16024,6 +16119,7 @@
                 <a:solidFill>
                   <a:srgbClr val="000000"/>
                 </a:solidFill>
+                <a:latin typeface="Abadi" panose="020B0604020104020204" pitchFamily="34" charset="0"/>
                 <a:ea typeface="+mn-lt"/>
                 <a:cs typeface="+mn-lt"/>
               </a:rPr>
@@ -16034,6 +16130,7 @@
                 <a:solidFill>
                   <a:srgbClr val="000000"/>
                 </a:solidFill>
+                <a:latin typeface="Abadi" panose="020B0604020104020204" pitchFamily="34" charset="0"/>
                 <a:ea typeface="+mn-lt"/>
                 <a:cs typeface="+mn-lt"/>
               </a:rPr>
@@ -16044,6 +16141,7 @@
                 <a:solidFill>
                   <a:srgbClr val="000000"/>
                 </a:solidFill>
+                <a:latin typeface="Abadi" panose="020B0604020104020204" pitchFamily="34" charset="0"/>
                 <a:ea typeface="+mn-lt"/>
                 <a:cs typeface="+mn-lt"/>
               </a:rPr>
@@ -16063,6 +16161,7 @@
                 <a:solidFill>
                   <a:srgbClr val="000000"/>
                 </a:solidFill>
+                <a:latin typeface="Abadi" panose="020B0604020104020204" pitchFamily="34" charset="0"/>
                 <a:ea typeface="+mn-lt"/>
                 <a:cs typeface="+mn-lt"/>
               </a:rPr>
@@ -16073,6 +16172,7 @@
                 <a:solidFill>
                   <a:srgbClr val="000000"/>
                 </a:solidFill>
+                <a:latin typeface="Abadi" panose="020B0604020104020204" pitchFamily="34" charset="0"/>
                 <a:ea typeface="+mn-lt"/>
                 <a:cs typeface="+mn-lt"/>
               </a:rPr>
@@ -16083,6 +16183,7 @@
                 <a:solidFill>
                   <a:srgbClr val="000000"/>
                 </a:solidFill>
+                <a:latin typeface="Abadi" panose="020B0604020104020204" pitchFamily="34" charset="0"/>
                 <a:ea typeface="+mn-lt"/>
                 <a:cs typeface="+mn-lt"/>
               </a:rPr>
@@ -16102,6 +16203,7 @@
                 <a:solidFill>
                   <a:srgbClr val="000000"/>
                 </a:solidFill>
+                <a:latin typeface="Abadi" panose="020B0604020104020204" pitchFamily="34" charset="0"/>
                 <a:ea typeface="+mn-lt"/>
                 <a:cs typeface="+mn-lt"/>
               </a:rPr>
@@ -16112,6 +16214,7 @@
                 <a:solidFill>
                   <a:srgbClr val="000000"/>
                 </a:solidFill>
+                <a:latin typeface="Abadi" panose="020B0604020104020204" pitchFamily="34" charset="0"/>
                 <a:ea typeface="+mn-lt"/>
                 <a:cs typeface="+mn-lt"/>
               </a:rPr>
@@ -16122,6 +16225,7 @@
                 <a:solidFill>
                   <a:srgbClr val="000000"/>
                 </a:solidFill>
+                <a:latin typeface="Abadi" panose="020B0604020104020204" pitchFamily="34" charset="0"/>
                 <a:ea typeface="+mn-lt"/>
                 <a:cs typeface="+mn-lt"/>
               </a:rPr>
@@ -16132,6 +16236,7 @@
                 <a:solidFill>
                   <a:srgbClr val="000000"/>
                 </a:solidFill>
+                <a:latin typeface="Abadi" panose="020B0604020104020204" pitchFamily="34" charset="0"/>
                 <a:ea typeface="+mn-lt"/>
                 <a:cs typeface="+mn-lt"/>
               </a:rPr>
@@ -16142,6 +16247,7 @@
                 <a:solidFill>
                   <a:srgbClr val="000000"/>
                 </a:solidFill>
+                <a:latin typeface="Abadi" panose="020B0604020104020204" pitchFamily="34" charset="0"/>
                 <a:ea typeface="+mn-lt"/>
                 <a:cs typeface="+mn-lt"/>
               </a:rPr>
@@ -16161,16 +16267,18 @@
                 <a:solidFill>
                   <a:srgbClr val="000000"/>
                 </a:solidFill>
+                <a:latin typeface="Abadi" panose="020B0604020104020204" pitchFamily="34" charset="0"/>
                 <a:ea typeface="+mn-lt"/>
                 <a:cs typeface="+mn-lt"/>
               </a:rPr>
               <a:t> </a:t>
             </a:r>
             <a:r>
-              <a:rPr lang="en-US" sz="3400" err="1">
-                <a:solidFill>
-                  <a:srgbClr val="000000"/>
-                </a:solidFill>
+              <a:rPr lang="en-US" sz="3400" dirty="0" err="1">
+                <a:solidFill>
+                  <a:srgbClr val="000000"/>
+                </a:solidFill>
+                <a:latin typeface="Abadi" panose="020B0604020104020204" pitchFamily="34" charset="0"/>
                 <a:ea typeface="+mn-lt"/>
                 <a:cs typeface="+mn-lt"/>
               </a:rPr>
@@ -16181,16 +16289,18 @@
                 <a:solidFill>
                   <a:srgbClr val="000000"/>
                 </a:solidFill>
+                <a:latin typeface="Abadi" panose="020B0604020104020204" pitchFamily="34" charset="0"/>
                 <a:ea typeface="+mn-lt"/>
                 <a:cs typeface="+mn-lt"/>
               </a:rPr>
               <a:t> et gestion du </a:t>
             </a:r>
             <a:r>
-              <a:rPr lang="en-US" sz="3400" err="1">
-                <a:solidFill>
-                  <a:srgbClr val="000000"/>
-                </a:solidFill>
+              <a:rPr lang="en-US" sz="3400" dirty="0" err="1">
+                <a:solidFill>
+                  <a:srgbClr val="000000"/>
+                </a:solidFill>
+                <a:latin typeface="Abadi" panose="020B0604020104020204" pitchFamily="34" charset="0"/>
                 <a:ea typeface="+mn-lt"/>
                 <a:cs typeface="+mn-lt"/>
               </a:rPr>
@@ -16200,6 +16310,7 @@
               <a:solidFill>
                 <a:srgbClr val="000000"/>
               </a:solidFill>
+              <a:latin typeface="Abadi" panose="020B0604020104020204" pitchFamily="34" charset="0"/>
               <a:ea typeface="+mn-lt"/>
               <a:cs typeface="+mn-lt"/>
             </a:endParaRPr>
@@ -16240,7 +16351,9 @@
               </a:lnSpc>
             </a:pPr>
             <a:r>
-              <a:rPr lang="en-US" sz="6600" b="1" dirty="0"/>
+              <a:rPr lang="en-US" sz="6600" b="1" dirty="0">
+                <a:latin typeface="Abadi" panose="020B0604020104020204" pitchFamily="34" charset="0"/>
+              </a:rPr>
               <a:t>ALTERNANCE</a:t>
             </a:r>
           </a:p>
@@ -16280,7 +16393,9 @@
               </a:lnSpc>
             </a:pPr>
             <a:r>
-              <a:rPr lang="en-US" sz="6600" b="1" dirty="0"/>
+              <a:rPr lang="en-US" sz="6600" b="1" dirty="0">
+                <a:latin typeface="Abadi" panose="020B0604020104020204" pitchFamily="34" charset="0"/>
+              </a:rPr>
               <a:t>STAGES</a:t>
             </a:r>
           </a:p>
@@ -16350,7 +16465,7 @@
                 <a:solidFill>
                   <a:srgbClr val="3D05AD"/>
                 </a:solidFill>
-                <a:latin typeface="+mj-lt"/>
+                <a:latin typeface="Abadi" panose="020B0604020104020204" pitchFamily="34" charset="0"/>
               </a:rPr>
               <a:t>03. ENTREPRISE D'ACCUEIL</a:t>
             </a:r>
@@ -16388,7 +16503,7 @@
                 <a:solidFill>
                   <a:srgbClr val="3D05AD"/>
                 </a:solidFill>
-                <a:latin typeface="+mj-lt"/>
+                <a:latin typeface="Abadi" panose="020B0604020104020204" pitchFamily="34" charset="0"/>
               </a:rPr>
               <a:t>Présentation</a:t>
             </a:r>
@@ -16397,7 +16512,7 @@
                 <a:solidFill>
                   <a:srgbClr val="3D05AD"/>
                 </a:solidFill>
-                <a:latin typeface="+mj-lt"/>
+                <a:latin typeface="Abadi" panose="020B0604020104020204" pitchFamily="34" charset="0"/>
               </a:rPr>
               <a:t> de la </a:t>
             </a:r>
@@ -16406,7 +16521,7 @@
                 <a:solidFill>
                   <a:srgbClr val="3D05AD"/>
                 </a:solidFill>
-                <a:latin typeface="+mj-lt"/>
+                <a:latin typeface="Abadi" panose="020B0604020104020204" pitchFamily="34" charset="0"/>
               </a:rPr>
               <a:t>ville</a:t>
             </a:r>
@@ -16415,7 +16530,7 @@
                 <a:solidFill>
                   <a:srgbClr val="3D05AD"/>
                 </a:solidFill>
-                <a:latin typeface="+mj-lt"/>
+                <a:latin typeface="Abadi" panose="020B0604020104020204" pitchFamily="34" charset="0"/>
               </a:rPr>
               <a:t> de Paris</a:t>
             </a:r>
@@ -16423,7 +16538,7 @@
               <a:solidFill>
                 <a:srgbClr val="3D05AD"/>
               </a:solidFill>
-              <a:latin typeface="+mj-lt"/>
+              <a:latin typeface="Abadi" panose="020B0604020104020204" pitchFamily="34" charset="0"/>
             </a:endParaRPr>
           </a:p>
         </p:txBody>
@@ -16459,6 +16574,7 @@
                 <a:solidFill>
                   <a:srgbClr val="3D05AD"/>
                 </a:solidFill>
+                <a:latin typeface="Abadi" panose="020B0604020104020204" pitchFamily="34" charset="0"/>
                 <a:ea typeface="+mn-lt"/>
                 <a:cs typeface="+mn-lt"/>
               </a:rPr>
@@ -16468,6 +16584,7 @@
               <a:solidFill>
                 <a:srgbClr val="000000"/>
               </a:solidFill>
+              <a:latin typeface="Abadi" panose="020B0604020104020204" pitchFamily="34" charset="0"/>
               <a:ea typeface="+mn-lt"/>
               <a:cs typeface="+mn-lt"/>
             </a:endParaRPr>
@@ -16483,6 +16600,7 @@
                 <a:solidFill>
                   <a:srgbClr val="3D05AD"/>
                 </a:solidFill>
+                <a:latin typeface="Abadi" panose="020B0604020104020204" pitchFamily="34" charset="0"/>
                 <a:ea typeface="+mn-lt"/>
                 <a:cs typeface="+mn-lt"/>
               </a:rPr>
@@ -16492,6 +16610,7 @@
                 <a:solidFill>
                   <a:srgbClr val="3D05AD"/>
                 </a:solidFill>
+                <a:latin typeface="Abadi" panose="020B0604020104020204" pitchFamily="34" charset="0"/>
                 <a:ea typeface="+mn-lt"/>
                 <a:cs typeface="+mn-lt"/>
               </a:rPr>
@@ -16502,6 +16621,7 @@
                 <a:solidFill>
                   <a:srgbClr val="3D05AD"/>
                 </a:solidFill>
+                <a:latin typeface="Abadi" panose="020B0604020104020204" pitchFamily="34" charset="0"/>
                 <a:ea typeface="+mn-lt"/>
                 <a:cs typeface="+mn-lt"/>
               </a:rPr>
@@ -16512,12 +16632,14 @@
                 <a:solidFill>
                   <a:srgbClr val="3D05AD"/>
                 </a:solidFill>
+                <a:latin typeface="Abadi" panose="020B0604020104020204" pitchFamily="34" charset="0"/>
                 <a:ea typeface="+mn-lt"/>
                 <a:cs typeface="+mn-lt"/>
               </a:rPr>
               <a:t> pour assurer ses missions et les services fourni à des millions d'utilisateurs en France.</a:t>
             </a:r>
             <a:endParaRPr lang="en-US" sz="3550" dirty="0">
+              <a:latin typeface="Abadi" panose="020B0604020104020204" pitchFamily="34" charset="0"/>
               <a:ea typeface="+mn-lt"/>
               <a:cs typeface="+mn-lt"/>
             </a:endParaRPr>
@@ -16588,7 +16710,7 @@
                 <a:solidFill>
                   <a:srgbClr val="3D05AD"/>
                 </a:solidFill>
-                <a:latin typeface="+mj-lt"/>
+                <a:latin typeface="Abadi" panose="020B0604020104020204" pitchFamily="34" charset="0"/>
               </a:rPr>
               <a:t>04. Le  Service  </a:t>
             </a:r>
@@ -16597,7 +16719,7 @@
                 <a:solidFill>
                   <a:srgbClr val="3D05AD"/>
                 </a:solidFill>
-                <a:latin typeface="+mj-lt"/>
+                <a:latin typeface="Abadi" panose="020B0604020104020204" pitchFamily="34" charset="0"/>
               </a:rPr>
               <a:t>informatique</a:t>
             </a:r>
@@ -16605,7 +16727,7 @@
               <a:solidFill>
                 <a:srgbClr val="3D05AD"/>
               </a:solidFill>
-              <a:latin typeface="+mj-lt"/>
+              <a:latin typeface="Abadi" panose="020B0604020104020204" pitchFamily="34" charset="0"/>
               <a:cs typeface="Poppins Medium"/>
             </a:endParaRPr>
           </a:p>
@@ -16642,12 +16764,14 @@
                 <a:solidFill>
                   <a:srgbClr val="3D05AD"/>
                 </a:solidFill>
+                <a:latin typeface="Abadi" panose="020B0604020104020204" pitchFamily="34" charset="0"/>
                 <a:ea typeface="+mn-lt"/>
                 <a:cs typeface="+mn-lt"/>
               </a:rPr>
               <a:t>227 Rue de Bercy, 75012 Paris</a:t>
             </a:r>
             <a:endParaRPr lang="en-US" dirty="0">
+              <a:latin typeface="Abadi" panose="020B0604020104020204" pitchFamily="34" charset="0"/>
               <a:ea typeface="+mn-lt"/>
               <a:cs typeface="+mn-lt"/>
             </a:endParaRPr>
@@ -16669,7 +16793,7 @@
         <p:spPr>
           <a:xfrm>
             <a:off x="487455" y="3395383"/>
-            <a:ext cx="16489453" cy="4616648"/>
+            <a:ext cx="16489453" cy="4085734"/>
           </a:xfrm>
           <a:prstGeom prst="rect">
             <a:avLst/>
@@ -16690,7 +16814,7 @@
                 <a:solidFill>
                   <a:srgbClr val="3D05AD"/>
                 </a:solidFill>
-                <a:latin typeface="Poppins"/>
+                <a:latin typeface="Abadi" panose="020B0604020104020204" pitchFamily="34" charset="0"/>
               </a:rPr>
               <a:t>Je </a:t>
             </a:r>
@@ -16699,7 +16823,7 @@
                 <a:solidFill>
                   <a:srgbClr val="3D05AD"/>
                 </a:solidFill>
-                <a:latin typeface="Poppins"/>
+                <a:latin typeface="Abadi" panose="020B0604020104020204" pitchFamily="34" charset="0"/>
                 <a:cs typeface="Poppins"/>
               </a:rPr>
               <a:t>travaille</a:t>
@@ -16709,7 +16833,7 @@
                 <a:solidFill>
                   <a:srgbClr val="3D05AD"/>
                 </a:solidFill>
-                <a:latin typeface="Poppins"/>
+                <a:latin typeface="Abadi" panose="020B0604020104020204" pitchFamily="34" charset="0"/>
                 <a:cs typeface="Poppins"/>
               </a:rPr>
               <a:t> au sein de la DSIN (</a:t>
@@ -16719,6 +16843,7 @@
                 <a:solidFill>
                   <a:srgbClr val="3D05AD"/>
                 </a:solidFill>
+                <a:latin typeface="Abadi" panose="020B0604020104020204" pitchFamily="34" charset="0"/>
                 <a:ea typeface="+mn-lt"/>
                 <a:cs typeface="+mn-lt"/>
               </a:rPr>
@@ -16729,6 +16854,7 @@
                 <a:solidFill>
                   <a:srgbClr val="3D05AD"/>
                 </a:solidFill>
+                <a:latin typeface="Abadi" panose="020B0604020104020204" pitchFamily="34" charset="0"/>
                 <a:ea typeface="+mn-lt"/>
                 <a:cs typeface="+mn-lt"/>
               </a:rPr>
@@ -16739,6 +16865,7 @@
                 <a:solidFill>
                   <a:srgbClr val="3D05AD"/>
                 </a:solidFill>
+                <a:latin typeface="Abadi" panose="020B0604020104020204" pitchFamily="34" charset="0"/>
                 <a:ea typeface="+mn-lt"/>
                 <a:cs typeface="+mn-lt"/>
               </a:rPr>
@@ -16749,6 +16876,7 @@
                 <a:solidFill>
                   <a:srgbClr val="3D05AD"/>
                 </a:solidFill>
+                <a:latin typeface="Abadi" panose="020B0604020104020204" pitchFamily="34" charset="0"/>
                 <a:ea typeface="+mn-lt"/>
                 <a:cs typeface="+mn-lt"/>
               </a:rPr>
@@ -16759,6 +16887,7 @@
                 <a:solidFill>
                   <a:srgbClr val="3D05AD"/>
                 </a:solidFill>
+                <a:latin typeface="Abadi" panose="020B0604020104020204" pitchFamily="34" charset="0"/>
                 <a:ea typeface="+mn-lt"/>
                 <a:cs typeface="+mn-lt"/>
               </a:rPr>
@@ -16769,7 +16898,7 @@
                 <a:solidFill>
                   <a:srgbClr val="3D05AD"/>
                 </a:solidFill>
-                <a:latin typeface="Poppins"/>
+                <a:latin typeface="Abadi" panose="020B0604020104020204" pitchFamily="34" charset="0"/>
                 <a:cs typeface="Poppins"/>
               </a:rPr>
               <a:t>). </a:t>
@@ -16778,7 +16907,7 @@
               <a:solidFill>
                 <a:srgbClr val="000000"/>
               </a:solidFill>
-              <a:latin typeface="Poppins"/>
+              <a:latin typeface="Abadi" panose="020B0604020104020204" pitchFamily="34" charset="0"/>
               <a:cs typeface="Poppins"/>
             </a:endParaRPr>
           </a:p>
@@ -16788,7 +16917,7 @@
                 <a:solidFill>
                   <a:srgbClr val="3D05AD"/>
                 </a:solidFill>
-                <a:latin typeface="Poppins"/>
+                <a:latin typeface="Abadi" panose="020B0604020104020204" pitchFamily="34" charset="0"/>
                 <a:cs typeface="Poppins"/>
               </a:rPr>
               <a:t>dans la section STIPS (</a:t>
@@ -16798,6 +16927,7 @@
                 <a:solidFill>
                   <a:srgbClr val="3D05AD"/>
                 </a:solidFill>
+                <a:latin typeface="Abadi" panose="020B0604020104020204" pitchFamily="34" charset="0"/>
                 <a:ea typeface="+mn-lt"/>
                 <a:cs typeface="+mn-lt"/>
               </a:rPr>
@@ -16808,7 +16938,7 @@
                 <a:solidFill>
                   <a:srgbClr val="3D05AD"/>
                 </a:solidFill>
-                <a:latin typeface="Poppins"/>
+                <a:latin typeface="Abadi" panose="020B0604020104020204" pitchFamily="34" charset="0"/>
                 <a:cs typeface="Poppins"/>
               </a:rPr>
               <a:t>). </a:t>
@@ -16817,7 +16947,7 @@
               <a:solidFill>
                 <a:srgbClr val="000000"/>
               </a:solidFill>
-              <a:latin typeface="Poppins"/>
+              <a:latin typeface="Abadi" panose="020B0604020104020204" pitchFamily="34" charset="0"/>
               <a:cs typeface="Poppins"/>
             </a:endParaRPr>
           </a:p>
@@ -16827,7 +16957,7 @@
                 <a:solidFill>
                   <a:srgbClr val="3D05AD"/>
                 </a:solidFill>
-                <a:latin typeface="Poppins"/>
+                <a:latin typeface="Abadi" panose="020B0604020104020204" pitchFamily="34" charset="0"/>
                 <a:cs typeface="Poppins"/>
               </a:rPr>
               <a:t>au bureau BECID (</a:t>
@@ -16837,6 +16967,7 @@
                 <a:solidFill>
                   <a:srgbClr val="3D05AD"/>
                 </a:solidFill>
+                <a:latin typeface="Abadi" panose="020B0604020104020204" pitchFamily="34" charset="0"/>
                 <a:ea typeface="+mn-lt"/>
                 <a:cs typeface="+mn-lt"/>
               </a:rPr>
@@ -16847,6 +16978,7 @@
                 <a:solidFill>
                   <a:srgbClr val="3D05AD"/>
                 </a:solidFill>
+                <a:latin typeface="Abadi" panose="020B0604020104020204" pitchFamily="34" charset="0"/>
                 <a:ea typeface="+mn-lt"/>
                 <a:cs typeface="+mn-lt"/>
               </a:rPr>
@@ -16857,6 +16989,7 @@
                 <a:solidFill>
                   <a:srgbClr val="3D05AD"/>
                 </a:solidFill>
+                <a:latin typeface="Abadi" panose="020B0604020104020204" pitchFamily="34" charset="0"/>
                 <a:ea typeface="+mn-lt"/>
                 <a:cs typeface="+mn-lt"/>
               </a:rPr>
@@ -16867,6 +17000,7 @@
                 <a:solidFill>
                   <a:srgbClr val="3D05AD"/>
                 </a:solidFill>
+                <a:latin typeface="Abadi" panose="020B0604020104020204" pitchFamily="34" charset="0"/>
                 <a:ea typeface="+mn-lt"/>
                 <a:cs typeface="+mn-lt"/>
               </a:rPr>
@@ -16877,6 +17011,7 @@
                 <a:solidFill>
                   <a:srgbClr val="3D05AD"/>
                 </a:solidFill>
+                <a:latin typeface="Abadi" panose="020B0604020104020204" pitchFamily="34" charset="0"/>
                 <a:ea typeface="+mn-lt"/>
                 <a:cs typeface="+mn-lt"/>
               </a:rPr>
@@ -16887,7 +17022,7 @@
                 <a:solidFill>
                   <a:srgbClr val="3D05AD"/>
                 </a:solidFill>
-                <a:latin typeface="Poppins"/>
+                <a:latin typeface="Abadi" panose="020B0604020104020204" pitchFamily="34" charset="0"/>
                 <a:cs typeface="Poppins"/>
               </a:rPr>
               <a:t>). Dans le service Supervision </a:t>
@@ -16897,7 +17032,7 @@
                 <a:solidFill>
                   <a:srgbClr val="3D05AD"/>
                 </a:solidFill>
-                <a:latin typeface="Poppins"/>
+                <a:latin typeface="Abadi" panose="020B0604020104020204" pitchFamily="34" charset="0"/>
                 <a:cs typeface="Poppins"/>
               </a:rPr>
               <a:t>informatique</a:t>
@@ -16906,7 +17041,7 @@
               <a:solidFill>
                 <a:srgbClr val="3D05AD"/>
               </a:solidFill>
-              <a:latin typeface="Poppins"/>
+              <a:latin typeface="Abadi" panose="020B0604020104020204" pitchFamily="34" charset="0"/>
               <a:cs typeface="Poppins"/>
             </a:endParaRPr>
           </a:p>
@@ -16915,7 +17050,7 @@
               <a:solidFill>
                 <a:srgbClr val="3D05AD"/>
               </a:solidFill>
-              <a:latin typeface="Poppins"/>
+              <a:latin typeface="Abadi" panose="020B0604020104020204" pitchFamily="34" charset="0"/>
               <a:cs typeface="Poppins"/>
             </a:endParaRPr>
           </a:p>
@@ -16925,7 +17060,7 @@
                 <a:solidFill>
                   <a:srgbClr val="3D05AD"/>
                 </a:solidFill>
-                <a:latin typeface="Poppins"/>
+                <a:latin typeface="Abadi" panose="020B0604020104020204" pitchFamily="34" charset="0"/>
                 <a:cs typeface="Poppins"/>
               </a:rPr>
               <a:t>Nous </a:t>
@@ -16935,7 +17070,7 @@
                 <a:solidFill>
                   <a:srgbClr val="3D05AD"/>
                 </a:solidFill>
-                <a:latin typeface="Poppins"/>
+                <a:latin typeface="Abadi" panose="020B0604020104020204" pitchFamily="34" charset="0"/>
                 <a:cs typeface="Poppins"/>
               </a:rPr>
               <a:t>travaillons</a:t>
@@ -16945,7 +17080,7 @@
                 <a:solidFill>
                   <a:srgbClr val="3D05AD"/>
                 </a:solidFill>
-                <a:latin typeface="Poppins"/>
+                <a:latin typeface="Abadi" panose="020B0604020104020204" pitchFamily="34" charset="0"/>
                 <a:cs typeface="Poppins"/>
               </a:rPr>
               <a:t> de concert avec les </a:t>
@@ -16955,7 +17090,7 @@
                 <a:solidFill>
                   <a:srgbClr val="3D05AD"/>
                 </a:solidFill>
-                <a:latin typeface="Poppins"/>
+                <a:latin typeface="Abadi" panose="020B0604020104020204" pitchFamily="34" charset="0"/>
                 <a:cs typeface="Poppins"/>
               </a:rPr>
               <a:t>autres</a:t>
@@ -16965,7 +17100,7 @@
                 <a:solidFill>
                   <a:srgbClr val="3D05AD"/>
                 </a:solidFill>
-                <a:latin typeface="Poppins"/>
+                <a:latin typeface="Abadi" panose="020B0604020104020204" pitchFamily="34" charset="0"/>
                 <a:cs typeface="Poppins"/>
               </a:rPr>
               <a:t> service du </a:t>
@@ -16975,7 +17110,7 @@
                 <a:solidFill>
                   <a:srgbClr val="3D05AD"/>
                 </a:solidFill>
-                <a:latin typeface="Poppins"/>
+                <a:latin typeface="Abadi" panose="020B0604020104020204" pitchFamily="34" charset="0"/>
                 <a:cs typeface="Poppins"/>
               </a:rPr>
               <a:t>batiment</a:t>
@@ -16985,7 +17120,7 @@
                 <a:solidFill>
                   <a:srgbClr val="3D05AD"/>
                 </a:solidFill>
-                <a:latin typeface="Poppins"/>
+                <a:latin typeface="Abadi" panose="020B0604020104020204" pitchFamily="34" charset="0"/>
                 <a:cs typeface="Poppins"/>
               </a:rPr>
               <a:t> </a:t>
@@ -16995,7 +17130,7 @@
                 <a:solidFill>
                   <a:srgbClr val="3D05AD"/>
                 </a:solidFill>
-                <a:latin typeface="Poppins"/>
+                <a:latin typeface="Abadi" panose="020B0604020104020204" pitchFamily="34" charset="0"/>
                 <a:cs typeface="Poppins"/>
               </a:rPr>
               <a:t>comme</a:t>
@@ -17005,7 +17140,7 @@
                 <a:solidFill>
                   <a:srgbClr val="3D05AD"/>
                 </a:solidFill>
-                <a:latin typeface="Poppins"/>
+                <a:latin typeface="Abadi" panose="020B0604020104020204" pitchFamily="34" charset="0"/>
                 <a:cs typeface="Poppins"/>
               </a:rPr>
               <a:t> la </a:t>
@@ -17015,7 +17150,7 @@
                 <a:solidFill>
                   <a:srgbClr val="3D05AD"/>
                 </a:solidFill>
-                <a:latin typeface="Poppins"/>
+                <a:latin typeface="Abadi" panose="020B0604020104020204" pitchFamily="34" charset="0"/>
                 <a:cs typeface="Poppins"/>
               </a:rPr>
               <a:t>Virtualisation</a:t>
@@ -17025,7 +17160,7 @@
                 <a:solidFill>
                   <a:srgbClr val="3D05AD"/>
                 </a:solidFill>
-                <a:latin typeface="Poppins"/>
+                <a:latin typeface="Abadi" panose="020B0604020104020204" pitchFamily="34" charset="0"/>
                 <a:cs typeface="Poppins"/>
               </a:rPr>
               <a:t> et la MGIS (Mission et gestion </a:t>
@@ -17035,7 +17170,7 @@
                 <a:solidFill>
                   <a:srgbClr val="3D05AD"/>
                 </a:solidFill>
-                <a:latin typeface="Poppins"/>
+                <a:latin typeface="Abadi" panose="020B0604020104020204" pitchFamily="34" charset="0"/>
                 <a:cs typeface="Poppins"/>
               </a:rPr>
               <a:t>d’identité</a:t>
@@ -17045,7 +17180,7 @@
                 <a:solidFill>
                   <a:srgbClr val="3D05AD"/>
                 </a:solidFill>
-                <a:latin typeface="Poppins"/>
+                <a:latin typeface="Abadi" panose="020B0604020104020204" pitchFamily="34" charset="0"/>
                 <a:cs typeface="Poppins"/>
               </a:rPr>
               <a:t> et </a:t>
@@ -17055,7 +17190,7 @@
                 <a:solidFill>
                   <a:srgbClr val="3D05AD"/>
                 </a:solidFill>
-                <a:latin typeface="Poppins"/>
+                <a:latin typeface="Abadi" panose="020B0604020104020204" pitchFamily="34" charset="0"/>
                 <a:cs typeface="Poppins"/>
               </a:rPr>
               <a:t>securité</a:t>
@@ -17065,18 +17200,21 @@
                 <a:solidFill>
                   <a:srgbClr val="3D05AD"/>
                 </a:solidFill>
-                <a:latin typeface="Poppins"/>
+                <a:latin typeface="Abadi" panose="020B0604020104020204" pitchFamily="34" charset="0"/>
                 <a:cs typeface="Poppins"/>
               </a:rPr>
               <a:t>)</a:t>
             </a:r>
             <a:endParaRPr lang="en-US" sz="3450" dirty="0">
+              <a:latin typeface="Abadi" panose="020B0604020104020204" pitchFamily="34" charset="0"/>
               <a:cs typeface="Poppins"/>
             </a:endParaRPr>
           </a:p>
           <a:p>
             <a:pPr algn="ctr"/>
-            <a:endParaRPr lang="en-US" dirty="0"/>
+            <a:endParaRPr lang="en-US" dirty="0">
+              <a:latin typeface="Abadi" panose="020B0604020104020204" pitchFamily="34" charset="0"/>
+            </a:endParaRPr>
           </a:p>
         </p:txBody>
       </p:sp>
@@ -17144,7 +17282,7 @@
                 <a:solidFill>
                   <a:srgbClr val="3D05AD"/>
                 </a:solidFill>
-                <a:latin typeface="+mj-lt"/>
+                <a:latin typeface="Abadi" panose="020B0604020104020204" pitchFamily="34" charset="0"/>
               </a:rPr>
               <a:t>Le parc informatique</a:t>
             </a:r>
@@ -17209,62 +17347,82 @@
           <a:lstStyle/>
           <a:p>
             <a:r>
-              <a:rPr lang="fr-FR" dirty="0"/>
+              <a:rPr lang="fr-FR" dirty="0">
+                <a:latin typeface="Abadi" panose="020B0604020104020204" pitchFamily="34" charset="0"/>
+              </a:rPr>
               <a:t>Il y a environ 20 mille machines supervisées et en exécution dans la ville. </a:t>
             </a:r>
           </a:p>
           <a:p>
             <a:r>
-              <a:rPr lang="fr-FR" dirty="0"/>
+              <a:rPr lang="fr-FR" dirty="0">
+                <a:latin typeface="Abadi" panose="020B0604020104020204" pitchFamily="34" charset="0"/>
+              </a:rPr>
               <a:t>-Dont 6 785 machines virtuelles (linux et </a:t>
             </a:r>
             <a:r>
-              <a:rPr lang="fr-FR" dirty="0" err="1"/>
+              <a:rPr lang="fr-FR" dirty="0" err="1">
+                <a:latin typeface="Abadi" panose="020B0604020104020204" pitchFamily="34" charset="0"/>
+              </a:rPr>
               <a:t>windows</a:t>
             </a:r>
             <a:r>
-              <a:rPr lang="fr-FR" dirty="0"/>
+              <a:rPr lang="fr-FR" dirty="0">
+                <a:latin typeface="Abadi" panose="020B0604020104020204" pitchFamily="34" charset="0"/>
+              </a:rPr>
               <a:t>) sous 144 hôtes physiques </a:t>
             </a:r>
             <a:r>
-              <a:rPr lang="fr-FR" dirty="0" err="1"/>
+              <a:rPr lang="fr-FR" dirty="0" err="1">
+                <a:latin typeface="Abadi" panose="020B0604020104020204" pitchFamily="34" charset="0"/>
+              </a:rPr>
               <a:t>Vmware</a:t>
             </a:r>
             <a:r>
-              <a:rPr lang="fr-FR"/>
-              <a:t>/ESX </a:t>
-            </a:r>
-            <a:r>
-              <a:rPr lang="fr-FR" dirty="0"/>
-              <a:t>(22 clusters)</a:t>
+              <a:rPr lang="fr-FR" dirty="0">
+                <a:latin typeface="Abadi" panose="020B0604020104020204" pitchFamily="34" charset="0"/>
+              </a:rPr>
+              <a:t>/ESX (22 clusters)</a:t>
             </a:r>
           </a:p>
           <a:p>
             <a:r>
-              <a:rPr lang="fr-FR" dirty="0"/>
+              <a:rPr lang="fr-FR" dirty="0">
+                <a:latin typeface="Abadi" panose="020B0604020104020204" pitchFamily="34" charset="0"/>
+              </a:rPr>
               <a:t>-Et 1 152 machines virtuelles (linux et </a:t>
             </a:r>
             <a:r>
-              <a:rPr lang="fr-FR" dirty="0" err="1"/>
+              <a:rPr lang="fr-FR" dirty="0" err="1">
+                <a:latin typeface="Abadi" panose="020B0604020104020204" pitchFamily="34" charset="0"/>
+              </a:rPr>
               <a:t>windows</a:t>
             </a:r>
             <a:r>
-              <a:rPr lang="fr-FR" dirty="0"/>
+              <a:rPr lang="fr-FR" dirty="0">
+                <a:latin typeface="Abadi" panose="020B0604020104020204" pitchFamily="34" charset="0"/>
+              </a:rPr>
               <a:t>) sous 78 hôtes physiques Nutanix/AHV (11 clusters)</a:t>
             </a:r>
           </a:p>
           <a:p>
             <a:r>
-              <a:rPr lang="fr-FR" dirty="0"/>
+              <a:rPr lang="fr-FR" dirty="0">
+                <a:latin typeface="Abadi" panose="020B0604020104020204" pitchFamily="34" charset="0"/>
+              </a:rPr>
               <a:t>Tout le reste ce sont des machines extérieures à la ville, des climatiseurs, des baies de stockage ou des équipement réseaux (répéteur, routeur, switch etc…) ou autre.</a:t>
             </a:r>
           </a:p>
           <a:p>
-            <a:endParaRPr lang="fr-FR" dirty="0"/>
+            <a:endParaRPr lang="fr-FR" dirty="0">
+              <a:latin typeface="Abadi" panose="020B0604020104020204" pitchFamily="34" charset="0"/>
+            </a:endParaRPr>
           </a:p>
           <a:p>
             <a:r>
-              <a:rPr lang="fr-FR" dirty="0"/>
+              <a:rPr lang="fr-FR" dirty="0">
+                <a:latin typeface="Abadi" panose="020B0604020104020204" pitchFamily="34" charset="0"/>
+              </a:rPr>
               <a:t>(Ce sont les chiffres de Janvier 2026, le nombre d’hôte physique et virtuel a grandement augmenté depuis ce qui nous rapproche des 20K actuellement)</a:t>
             </a:r>
           </a:p>
@@ -17339,7 +17497,7 @@
                 <a:solidFill>
                   <a:srgbClr val="3D05AD"/>
                 </a:solidFill>
-                <a:latin typeface="+mj-lt"/>
+                <a:latin typeface="Abadi" panose="020B0604020104020204" pitchFamily="34" charset="0"/>
               </a:rPr>
               <a:t>Logiciels</a:t>
             </a:r>
@@ -17348,7 +17506,7 @@
                 <a:solidFill>
                   <a:srgbClr val="3D05AD"/>
                 </a:solidFill>
-                <a:latin typeface="+mj-lt"/>
+                <a:latin typeface="Abadi" panose="020B0604020104020204" pitchFamily="34" charset="0"/>
               </a:rPr>
               <a:t> </a:t>
             </a:r>
@@ -17357,7 +17515,7 @@
                 <a:solidFill>
                   <a:srgbClr val="3D05AD"/>
                 </a:solidFill>
-                <a:latin typeface="+mj-lt"/>
+                <a:latin typeface="Abadi" panose="020B0604020104020204" pitchFamily="34" charset="0"/>
               </a:rPr>
               <a:t>utilisés</a:t>
             </a:r>
@@ -17365,7 +17523,7 @@
               <a:solidFill>
                 <a:srgbClr val="3D05AD"/>
               </a:solidFill>
-              <a:latin typeface="+mj-lt"/>
+              <a:latin typeface="Abadi" panose="020B0604020104020204" pitchFamily="34" charset="0"/>
             </a:endParaRPr>
           </a:p>
         </p:txBody>
@@ -17407,10 +17565,13 @@
                 <a:solidFill>
                   <a:srgbClr val="000000"/>
                 </a:solidFill>
+                <a:latin typeface="Abadi" panose="020B0604020104020204" pitchFamily="34" charset="0"/>
               </a:rPr>
               <a:t>Pour superviser les 20k machines</a:t>
             </a:r>
-            <a:endParaRPr lang="en-US" dirty="0"/>
+            <a:endParaRPr lang="en-US" dirty="0">
+              <a:latin typeface="Abadi" panose="020B0604020104020204" pitchFamily="34" charset="0"/>
+            </a:endParaRPr>
           </a:p>
         </p:txBody>
       </p:sp>
@@ -17451,6 +17612,7 @@
                 <a:solidFill>
                   <a:srgbClr val="000000"/>
                 </a:solidFill>
+                <a:latin typeface="Abadi" panose="020B0604020104020204" pitchFamily="34" charset="0"/>
               </a:rPr>
               <a:t>pour se connecter aux serveurs virtuels et à distances en SSH</a:t>
             </a:r>
@@ -17458,6 +17620,7 @@
               <a:solidFill>
                 <a:srgbClr val="000000"/>
               </a:solidFill>
+              <a:latin typeface="Abadi" panose="020B0604020104020204" pitchFamily="34" charset="0"/>
               <a:cs typeface="Poppins"/>
             </a:endParaRPr>
           </a:p>
@@ -17500,6 +17663,7 @@
                 <a:solidFill>
                   <a:srgbClr val="000000"/>
                 </a:solidFill>
+                <a:latin typeface="Abadi" panose="020B0604020104020204" pitchFamily="34" charset="0"/>
               </a:rPr>
               <a:t>Une version métier de </a:t>
             </a:r>
@@ -17508,6 +17672,7 @@
                 <a:solidFill>
                   <a:srgbClr val="000000"/>
                 </a:solidFill>
+                <a:latin typeface="Abadi" panose="020B0604020104020204" pitchFamily="34" charset="0"/>
               </a:rPr>
               <a:t>Easy</a:t>
             </a:r>
@@ -17516,6 +17681,7 @@
                 <a:solidFill>
                   <a:srgbClr val="000000"/>
                 </a:solidFill>
+                <a:latin typeface="Abadi" panose="020B0604020104020204" pitchFamily="34" charset="0"/>
               </a:rPr>
               <a:t> Vista pour les tickets (nommé "Satis" dans l'entreprise)</a:t>
             </a:r>
@@ -17523,6 +17689,7 @@
               <a:solidFill>
                 <a:srgbClr val="000000"/>
               </a:solidFill>
+              <a:latin typeface="Abadi" panose="020B0604020104020204" pitchFamily="34" charset="0"/>
               <a:cs typeface="Poppins"/>
             </a:endParaRPr>
           </a:p>
@@ -17702,6 +17869,7 @@
                 <a:solidFill>
                   <a:srgbClr val="000000"/>
                 </a:solidFill>
+                <a:latin typeface="Abadi" panose="020B0604020104020204" pitchFamily="34" charset="0"/>
               </a:rPr>
               <a:t>Évidemment le pack office</a:t>
             </a:r>
@@ -17709,6 +17877,7 @@
               <a:solidFill>
                 <a:srgbClr val="000000"/>
               </a:solidFill>
+              <a:latin typeface="Abadi" panose="020B0604020104020204" pitchFamily="34" charset="0"/>
               <a:cs typeface="Poppins"/>
             </a:endParaRPr>
           </a:p>
